--- a/slides/talk-2-workshop.pptx
+++ b/slides/talk-2-workshop.pptx
@@ -3123,14 +3123,14 @@
         </p:nvSpPr>
         <p:spPr>
           <a:xfrm>
-            <a:off x="1371600" y="2194560"/>
-            <a:ext cx="1371600" cy="54864"/>
+            <a:off x="0" y="0"/>
+            <a:ext cx="12191695" cy="109728"/>
           </a:xfrm>
           <a:prstGeom prst="rect">
             <a:avLst/>
           </a:prstGeom>
           <a:solidFill>
-            <a:srgbClr val="00D4F5"/>
+            <a:srgbClr val="FF6B35"/>
           </a:solidFill>
           <a:ln>
             <a:noFill/>
@@ -3166,8 +3166,8 @@
         </p:nvSpPr>
         <p:spPr>
           <a:xfrm>
-            <a:off x="1371600" y="2377440"/>
-            <a:ext cx="9144000" cy="1097280"/>
+            <a:off x="914400" y="1371600"/>
+            <a:ext cx="10058400" cy="1371600"/>
           </a:xfrm>
           <a:prstGeom prst="rect">
             <a:avLst/>
@@ -3180,7 +3180,10 @@
           </a:bodyPr>
           <a:lstStyle/>
           <a:p>
-            <a:pPr algn="l">
+            <a:pPr algn="ctr">
+              <a:spcAft>
+                <a:spcPts val="400"/>
+              </a:spcAft>
               <a:defRPr sz="5400" b="1">
                 <a:solidFill>
                   <a:srgbClr val="FFFFFF"/>
@@ -3189,23 +3192,7 @@
               </a:defRPr>
             </a:pPr>
             <a:r>
-              <a:t>AI Workshop</a:t>
-            </a:r>
-          </a:p>
-          <a:p>
-            <a:pPr algn="l">
-              <a:spcBef>
-                <a:spcPts val="400"/>
-              </a:spcBef>
-              <a:defRPr sz="3600" b="0">
-                <a:solidFill>
-                  <a:srgbClr val="FF6B35"/>
-                </a:solidFill>
-                <a:latin typeface="Calibri"/>
-              </a:defRPr>
-            </a:pPr>
-            <a:r>
-              <a:t>Hands-On with Real Business Tasks</a:t>
+              <a:t>Live AI Workshop</a:t>
             </a:r>
           </a:p>
         </p:txBody>
@@ -3218,8 +3205,8 @@
         </p:nvSpPr>
         <p:spPr>
           <a:xfrm>
-            <a:off x="1371600" y="4114800"/>
-            <a:ext cx="7315200" cy="457200"/>
+            <a:off x="914400" y="2743200"/>
+            <a:ext cx="10058400" cy="914400"/>
           </a:xfrm>
           <a:prstGeom prst="rect">
             <a:avLst/>
@@ -3232,16 +3219,97 @@
           </a:bodyPr>
           <a:lstStyle/>
           <a:p>
-            <a:pPr algn="l">
-              <a:defRPr sz="2200" b="0">
-                <a:solidFill>
-                  <a:srgbClr val="BBBBCC"/>
-                </a:solidFill>
-                <a:latin typeface="Calibri"/>
-              </a:defRPr>
-            </a:pPr>
-            <a:r>
-              <a:t>Enriched Solutions  •  Ali Sherazi</a:t>
+            <a:pPr algn="ctr">
+              <a:spcAft>
+                <a:spcPts val="400"/>
+              </a:spcAft>
+              <a:defRPr sz="3200" b="0">
+                <a:solidFill>
+                  <a:srgbClr val="00D4F5"/>
+                </a:solidFill>
+                <a:latin typeface="Calibri"/>
+              </a:defRPr>
+            </a:pPr>
+            <a:r>
+              <a:t>5 Real Business Use Cases in 35 Minutes</a:t>
+            </a:r>
+          </a:p>
+        </p:txBody>
+      </p:sp>
+      <p:sp>
+        <p:nvSpPr>
+          <p:cNvPr id="5" name="TextBox 4"/>
+          <p:cNvSpPr txBox="1"/>
+          <p:nvPr/>
+        </p:nvSpPr>
+        <p:spPr>
+          <a:xfrm>
+            <a:off x="914400" y="4114800"/>
+            <a:ext cx="10058400" cy="548640"/>
+          </a:xfrm>
+          <a:prstGeom prst="rect">
+            <a:avLst/>
+          </a:prstGeom>
+          <a:noFill/>
+        </p:spPr>
+        <p:txBody>
+          <a:bodyPr wrap="square">
+            <a:spAutoFit/>
+          </a:bodyPr>
+          <a:lstStyle/>
+          <a:p>
+            <a:pPr algn="ctr">
+              <a:spcAft>
+                <a:spcPts val="400"/>
+              </a:spcAft>
+              <a:defRPr sz="2400" b="1">
+                <a:solidFill>
+                  <a:srgbClr val="FF6B35"/>
+                </a:solidFill>
+                <a:latin typeface="Calibri"/>
+              </a:defRPr>
+            </a:pPr>
+            <a:r>
+              <a:t>Enriched Solutions</a:t>
+            </a:r>
+          </a:p>
+        </p:txBody>
+      </p:sp>
+      <p:sp>
+        <p:nvSpPr>
+          <p:cNvPr id="6" name="TextBox 5"/>
+          <p:cNvSpPr txBox="1"/>
+          <p:nvPr/>
+        </p:nvSpPr>
+        <p:spPr>
+          <a:xfrm>
+            <a:off x="914400" y="4663440"/>
+            <a:ext cx="10058400" cy="457200"/>
+          </a:xfrm>
+          <a:prstGeom prst="rect">
+            <a:avLst/>
+          </a:prstGeom>
+          <a:noFill/>
+        </p:spPr>
+        <p:txBody>
+          <a:bodyPr wrap="square">
+            <a:spAutoFit/>
+          </a:bodyPr>
+          <a:lstStyle/>
+          <a:p>
+            <a:pPr algn="ctr">
+              <a:spcAft>
+                <a:spcPts val="400"/>
+              </a:spcAft>
+              <a:defRPr sz="2000" b="0">
+                <a:solidFill>
+                  <a:srgbClr val="CCCCCC"/>
+                </a:solidFill>
+                <a:latin typeface="Calibri"/>
+              </a:defRPr>
+            </a:pPr>
+            <a:r>
+              <a:t>Presented by Ali</a:t>
             </a:r>
           </a:p>
         </p:txBody>
@@ -3274,63 +3342,24 @@
       <p:grpSpPr/>
       <p:sp>
         <p:nvSpPr>
-          <p:cNvPr id="2" name="TextBox 1"/>
-          <p:cNvSpPr txBox="1"/>
-          <p:nvPr/>
-        </p:nvSpPr>
-        <p:spPr>
-          <a:xfrm>
-            <a:off x="731520" y="274320"/>
-            <a:ext cx="4572000" cy="548640"/>
-          </a:xfrm>
-          <a:prstGeom prst="rect">
-            <a:avLst/>
-          </a:prstGeom>
-          <a:noFill/>
-        </p:spPr>
-        <p:txBody>
-          <a:bodyPr wrap="square">
-            <a:spAutoFit/>
-          </a:bodyPr>
-          <a:lstStyle/>
-          <a:p>
-            <a:pPr algn="l">
-              <a:defRPr sz="2400" b="1">
-                <a:solidFill>
-                  <a:srgbClr val="00D4F5"/>
-                </a:solidFill>
-                <a:latin typeface="Calibri"/>
-              </a:defRPr>
-            </a:pPr>
-            <a:r>
-              <a:t>Use Case 3 — The Prompt</a:t>
-            </a:r>
-          </a:p>
-        </p:txBody>
-      </p:sp>
-      <p:sp>
-        <p:nvSpPr>
-          <p:cNvPr id="3" name="Rounded Rectangle 2"/>
+          <p:cNvPr id="2" name="Rectangle 1"/>
           <p:cNvSpPr/>
           <p:nvPr/>
         </p:nvSpPr>
         <p:spPr>
           <a:xfrm>
-            <a:off x="457200" y="914400"/>
-            <a:ext cx="11247120" cy="5303520"/>
-          </a:xfrm>
-          <a:prstGeom prst="roundRect">
+            <a:off x="0" y="0"/>
+            <a:ext cx="12191695" cy="73152"/>
+          </a:xfrm>
+          <a:prstGeom prst="rect">
             <a:avLst/>
           </a:prstGeom>
           <a:solidFill>
-            <a:srgbClr val="2A2E3E"/>
+            <a:srgbClr val="00D4F5"/>
           </a:solidFill>
-          <a:ln w="12700">
-            <a:solidFill>
-              <a:srgbClr val="3A3E4E"/>
-            </a:solidFill>
+          <a:ln>
+            <a:noFill/>
           </a:ln>
-          <a:effectLst/>
         </p:spPr>
         <p:style>
           <a:lnRef idx="1">
@@ -3356,14 +3385,14 @@
       </p:sp>
       <p:sp>
         <p:nvSpPr>
-          <p:cNvPr id="4" name="TextBox 3"/>
+          <p:cNvPr id="3" name="TextBox 2"/>
           <p:cNvSpPr txBox="1"/>
           <p:nvPr/>
         </p:nvSpPr>
         <p:spPr>
           <a:xfrm>
-            <a:off x="731520" y="1097280"/>
-            <a:ext cx="10698480" cy="4937760"/>
+            <a:off x="548640" y="274320"/>
+            <a:ext cx="10972800" cy="640080"/>
           </a:xfrm>
           <a:prstGeom prst="rect">
             <a:avLst/>
@@ -3376,199 +3405,169 @@
           </a:bodyPr>
           <a:lstStyle/>
           <a:p>
-            <a:pPr>
-              <a:defRPr sz="1300">
-                <a:solidFill>
-                  <a:srgbClr val="E0E8F0"/>
+            <a:pPr algn="l">
+              <a:spcAft>
+                <a:spcPts val="400"/>
+              </a:spcAft>
+              <a:defRPr sz="3200" b="1">
+                <a:solidFill>
+                  <a:srgbClr val="FFFFFF"/>
+                </a:solidFill>
+                <a:latin typeface="Calibri"/>
+              </a:defRPr>
+            </a:pPr>
+            <a:r>
+              <a:t>🎨 UC3: The Prompts</a:t>
+            </a:r>
+          </a:p>
+        </p:txBody>
+      </p:sp>
+      <p:sp>
+        <p:nvSpPr>
+          <p:cNvPr id="4" name="Rectangle 3"/>
+          <p:cNvSpPr/>
+          <p:nvPr/>
+        </p:nvSpPr>
+        <p:spPr>
+          <a:xfrm>
+            <a:off x="365760" y="1097280"/>
+            <a:ext cx="11430000" cy="5303520"/>
+          </a:xfrm>
+          <a:prstGeom prst="rect">
+            <a:avLst/>
+          </a:prstGeom>
+          <a:solidFill>
+            <a:srgbClr val="121422"/>
+          </a:solidFill>
+          <a:ln>
+            <a:noFill/>
+          </a:ln>
+        </p:spPr>
+        <p:style>
+          <a:lnRef idx="1">
+            <a:schemeClr val="accent1"/>
+          </a:lnRef>
+          <a:fillRef idx="3">
+            <a:schemeClr val="accent1"/>
+          </a:fillRef>
+          <a:effectRef idx="2">
+            <a:schemeClr val="accent1"/>
+          </a:effectRef>
+          <a:fontRef idx="minor">
+            <a:schemeClr val="lt1"/>
+          </a:fontRef>
+        </p:style>
+        <p:txBody>
+          <a:bodyPr rtlCol="0" anchor="ctr"/>
+          <a:lstStyle/>
+          <a:p>
+            <a:pPr algn="ctr"/>
+          </a:p>
+        </p:txBody>
+      </p:sp>
+      <p:sp>
+        <p:nvSpPr>
+          <p:cNvPr id="5" name="TextBox 4"/>
+          <p:cNvSpPr txBox="1"/>
+          <p:nvPr/>
+        </p:nvSpPr>
+        <p:spPr>
+          <a:xfrm>
+            <a:off x="548640" y="1280160"/>
+            <a:ext cx="10972800" cy="4937760"/>
+          </a:xfrm>
+          <a:prstGeom prst="rect">
+            <a:avLst/>
+          </a:prstGeom>
+          <a:noFill/>
+        </p:spPr>
+        <p:txBody>
+          <a:bodyPr wrap="square">
+            <a:spAutoFit/>
+          </a:bodyPr>
+          <a:lstStyle/>
+          <a:p>
+            <a:pPr algn="l">
+              <a:spcAft>
+                <a:spcPts val="400"/>
+              </a:spcAft>
+              <a:defRPr sz="1400" b="0">
+                <a:solidFill>
+                  <a:srgbClr val="00D4F5"/>
                 </a:solidFill>
                 <a:latin typeface="Consolas"/>
               </a:defRPr>
             </a:pPr>
             <a:r>
-              <a:t>Build a brand identity for "Aether" — an AI-powered air quality monitoring platform for smart cities. Target: city councils, property developers, health-conscious urban professionals.</a:t>
-            </a:r>
-          </a:p>
-          <a:p>
-            <a:pPr>
-              <a:spcBef>
-                <a:spcPts val="200"/>
-              </a:spcBef>
-              <a:defRPr sz="1300">
-                <a:solidFill>
-                  <a:srgbClr val="E0E8F0"/>
-                </a:solidFill>
-                <a:latin typeface="Consolas"/>
-              </a:defRPr>
-            </a:pPr>
-          </a:p>
-          <a:p>
-            <a:pPr>
-              <a:spcBef>
-                <a:spcPts val="200"/>
-              </a:spcBef>
-              <a:defRPr sz="1300">
-                <a:solidFill>
-                  <a:srgbClr val="E0E8F0"/>
-                </a:solidFill>
-                <a:latin typeface="Consolas"/>
-              </a:defRPr>
-            </a:pPr>
-            <a:r>
-              <a:t>Brand feel: clean, scientific, trustworthy, slightly futuristic — "calm technology."</a:t>
-            </a:r>
-          </a:p>
-          <a:p>
-            <a:pPr>
-              <a:spcBef>
-                <a:spcPts val="200"/>
-              </a:spcBef>
-              <a:defRPr sz="1300">
-                <a:solidFill>
-                  <a:srgbClr val="E0E8F0"/>
-                </a:solidFill>
-                <a:latin typeface="Consolas"/>
-              </a:defRPr>
-            </a:pPr>
-          </a:p>
-          <a:p>
-            <a:pPr>
-              <a:spcBef>
-                <a:spcPts val="200"/>
-              </a:spcBef>
-              <a:defRPr sz="1300">
-                <a:solidFill>
-                  <a:srgbClr val="E0E8F0"/>
-                </a:solidFill>
-                <a:latin typeface="Consolas"/>
-              </a:defRPr>
-            </a:pPr>
+              <a:t>[ChatGPT — GPT Image]</a:t>
+            </a:r>
+            <a:br/>
+            <a:br/>
+            <a:r>
+              <a:t>I'm building a brand identity for "Aether" — an AI-powered air quality</a:t>
+            </a:r>
+            <a:br/>
+            <a:r>
+              <a:t>monitoring platform for smart cities. Target: city councils, property</a:t>
+            </a:r>
+            <a:br/>
+            <a:r>
+              <a:t>developers, health-conscious urban professionals. Brand feel: clean,</a:t>
+            </a:r>
+            <a:br/>
+            <a:r>
+              <a:t>scientific, trustworthy, slightly futuristic — "calm technology."</a:t>
+            </a:r>
+            <a:br/>
+            <a:br/>
             <a:r>
               <a:t>Generate a logo:</a:t>
             </a:r>
-          </a:p>
-          <a:p>
-            <a:pPr>
-              <a:spcBef>
-                <a:spcPts val="200"/>
-              </a:spcBef>
-              <a:defRPr sz="1300">
-                <a:solidFill>
-                  <a:srgbClr val="E0E8F0"/>
-                </a:solidFill>
-                <a:latin typeface="Consolas"/>
-              </a:defRPr>
-            </a:pPr>
+            <a:br/>
             <a:r>
               <a:t>- Modern logomark (icon + wordmark)</a:t>
             </a:r>
-          </a:p>
-          <a:p>
-            <a:pPr>
-              <a:spcBef>
-                <a:spcPts val="200"/>
-              </a:spcBef>
-              <a:defRPr sz="1300">
-                <a:solidFill>
-                  <a:srgbClr val="E0E8F0"/>
-                </a:solidFill>
-                <a:latin typeface="Consolas"/>
-              </a:defRPr>
-            </a:pPr>
-            <a:r>
-              <a:t>- Icon: abstractly represents air/atmosphere — flowing lines, gradients, stylised "A"</a:t>
-            </a:r>
-          </a:p>
-          <a:p>
-            <a:pPr>
-              <a:spcBef>
-                <a:spcPts val="200"/>
-              </a:spcBef>
-              <a:defRPr sz="1300">
-                <a:solidFill>
-                  <a:srgbClr val="E0E8F0"/>
-                </a:solidFill>
-                <a:latin typeface="Consolas"/>
-              </a:defRPr>
-            </a:pPr>
-            <a:r>
-              <a:t>- Palette: deep teal/navy primary, fresh green or sky blue accent</a:t>
-            </a:r>
-          </a:p>
-          <a:p>
-            <a:pPr>
-              <a:spcBef>
-                <a:spcPts val="200"/>
-              </a:spcBef>
-              <a:defRPr sz="1300">
-                <a:solidFill>
-                  <a:srgbClr val="E0E8F0"/>
-                </a:solidFill>
-                <a:latin typeface="Consolas"/>
-              </a:defRPr>
-            </a:pPr>
-            <a:r>
-              <a:t>- Clean sans-serif typeface</a:t>
-            </a:r>
-          </a:p>
-          <a:p>
-            <a:pPr>
-              <a:spcBef>
-                <a:spcPts val="200"/>
-              </a:spcBef>
-              <a:defRPr sz="1300">
-                <a:solidFill>
-                  <a:srgbClr val="E0E8F0"/>
-                </a:solidFill>
-                <a:latin typeface="Consolas"/>
-              </a:defRPr>
-            </a:pPr>
-            <a:r>
-              <a:t>- Works on white and dark backgrounds, at small sizes</a:t>
-            </a:r>
-          </a:p>
-          <a:p>
-            <a:pPr>
-              <a:spcBef>
-                <a:spcPts val="200"/>
-              </a:spcBef>
-              <a:defRPr sz="1300">
-                <a:solidFill>
-                  <a:srgbClr val="E0E8F0"/>
-                </a:solidFill>
-                <a:latin typeface="Consolas"/>
-              </a:defRPr>
-            </a:pPr>
-          </a:p>
-          <a:p>
-            <a:pPr>
-              <a:spcBef>
-                <a:spcPts val="200"/>
-              </a:spcBef>
-              <a:defRPr sz="1300">
-                <a:solidFill>
-                  <a:srgbClr val="E0E8F0"/>
-                </a:solidFill>
-                <a:latin typeface="Consolas"/>
-              </a:defRPr>
-            </a:pPr>
-            <a:r>
-              <a:t>Style: minimal, geometric, professional. Think Stripe, Linear, Notion.</a:t>
-            </a:r>
-          </a:p>
-          <a:p>
-            <a:pPr>
-              <a:spcBef>
-                <a:spcPts val="200"/>
-              </a:spcBef>
-              <a:defRPr sz="1300">
-                <a:solidFill>
-                  <a:srgbClr val="E0E8F0"/>
-                </a:solidFill>
-                <a:latin typeface="Consolas"/>
-              </a:defRPr>
-            </a:pPr>
-            <a:r>
-              <a:t>NOT cartoonish, not complex.</a:t>
+            <a:br/>
+            <a:r>
+              <a:t>- Icon: abstractly represents air/atmosphere — flowing lines, gradients,</a:t>
+            </a:r>
+            <a:br/>
+            <a:r>
+              <a:t>  or a stylised "A"</a:t>
+            </a:r>
+            <a:br/>
+            <a:r>
+              <a:t>- Colours: deep teal/navy primary, fresh green or sky blue accent</a:t>
+            </a:r>
+            <a:br/>
+            <a:r>
+              <a:t>- Clean sans-serif typeface for wordmark</a:t>
+            </a:r>
+            <a:br/>
+            <a:r>
+              <a:t>- Works on white AND dark backgrounds</a:t>
+            </a:r>
+            <a:br/>
+            <a:r>
+              <a:t>- Simple enough for favicon / app icon</a:t>
+            </a:r>
+            <a:br/>
+            <a:br/>
+            <a:r>
+              <a:t>Style: minimal, geometric, professional. Not cartoonish.</a:t>
+            </a:r>
+            <a:br/>
+            <a:r>
+              <a:t>Think Stripe, Linear, or Notion's brand aesthetic.</a:t>
+            </a:r>
+            <a:br/>
+            <a:br/>
+            <a:r>
+              <a:t>[Then iterate: "Strip it back to just a clean icon mark —</a:t>
+            </a:r>
+            <a:br/>
+            <a:r>
+              <a:t>no text. Geometric, 2-3 colours only. Like Airbnb's logo."]</a:t>
             </a:r>
           </a:p>
         </p:txBody>
@@ -3607,8 +3606,8 @@
         </p:nvSpPr>
         <p:spPr>
           <a:xfrm>
-            <a:off x="731520" y="548640"/>
-            <a:ext cx="73152" cy="548640"/>
+            <a:off x="0" y="0"/>
+            <a:ext cx="12191695" cy="73152"/>
           </a:xfrm>
           <a:prstGeom prst="rect">
             <a:avLst/>
@@ -3650,8 +3649,8 @@
         </p:nvSpPr>
         <p:spPr>
           <a:xfrm>
-            <a:off x="1005840" y="457200"/>
-            <a:ext cx="9144000" cy="822960"/>
+            <a:off x="548640" y="274320"/>
+            <a:ext cx="10972800" cy="640080"/>
           </a:xfrm>
           <a:prstGeom prst="rect">
             <a:avLst/>
@@ -3665,6 +3664,9 @@
           <a:lstStyle/>
           <a:p>
             <a:pPr algn="l">
+              <a:spcAft>
+                <a:spcPts val="400"/>
+              </a:spcAft>
               <a:defRPr sz="3600" b="1">
                 <a:solidFill>
                   <a:srgbClr val="FFFFFF"/>
@@ -3673,21 +3675,64 @@
               </a:defRPr>
             </a:pPr>
             <a:r>
-              <a:t>Use Case 3: Key Takeaways</a:t>
-            </a:r>
-          </a:p>
-        </p:txBody>
-      </p:sp>
-      <p:sp>
-        <p:nvSpPr>
-          <p:cNvPr id="4" name="TextBox 3"/>
+              <a:t>🎨 UC3: Key Takeaways</a:t>
+            </a:r>
+          </a:p>
+        </p:txBody>
+      </p:sp>
+      <p:sp>
+        <p:nvSpPr>
+          <p:cNvPr id="4" name="Rectangle 3"/>
+          <p:cNvSpPr/>
+          <p:nvPr/>
+        </p:nvSpPr>
+        <p:spPr>
+          <a:xfrm>
+            <a:off x="365760" y="1280160"/>
+            <a:ext cx="11430000" cy="5029200"/>
+          </a:xfrm>
+          <a:prstGeom prst="rect">
+            <a:avLst/>
+          </a:prstGeom>
+          <a:solidFill>
+            <a:srgbClr val="222638"/>
+          </a:solidFill>
+          <a:ln>
+            <a:noFill/>
+          </a:ln>
+        </p:spPr>
+        <p:style>
+          <a:lnRef idx="1">
+            <a:schemeClr val="accent1"/>
+          </a:lnRef>
+          <a:fillRef idx="3">
+            <a:schemeClr val="accent1"/>
+          </a:fillRef>
+          <a:effectRef idx="2">
+            <a:schemeClr val="accent1"/>
+          </a:effectRef>
+          <a:fontRef idx="minor">
+            <a:schemeClr val="lt1"/>
+          </a:fontRef>
+        </p:style>
+        <p:txBody>
+          <a:bodyPr rtlCol="0" anchor="ctr"/>
+          <a:lstStyle/>
+          <a:p>
+            <a:pPr algn="ctr"/>
+          </a:p>
+        </p:txBody>
+      </p:sp>
+      <p:sp>
+        <p:nvSpPr>
+          <p:cNvPr id="5" name="TextBox 4"/>
           <p:cNvSpPr txBox="1"/>
           <p:nvPr/>
         </p:nvSpPr>
         <p:spPr>
           <a:xfrm>
-            <a:off x="1005840" y="1280160"/>
-            <a:ext cx="9144000" cy="457200"/>
+            <a:off x="548640" y="1371600"/>
+            <a:ext cx="10972800" cy="4846320"/>
           </a:xfrm>
           <a:prstGeom prst="rect">
             <a:avLst/>
@@ -3701,163 +3746,168 @@
           <a:lstStyle/>
           <a:p>
             <a:pPr algn="l">
+              <a:spcAft>
+                <a:spcPts val="400"/>
+              </a:spcAft>
+              <a:defRPr sz="2400" b="1">
+                <a:solidFill>
+                  <a:srgbClr val="FF6B35"/>
+                </a:solidFill>
+                <a:latin typeface="Calibri"/>
+              </a:defRPr>
+            </a:pPr>
+            <a:r>
+              <a:t>What Just Happened</a:t>
+            </a:r>
+          </a:p>
+          <a:p>
+            <a:pPr algn="l">
+              <a:defRPr sz="2000" b="0">
+                <a:solidFill>
+                  <a:srgbClr val="FFFFFF"/>
+                </a:solidFill>
+                <a:latin typeface="Calibri"/>
+              </a:defRPr>
+            </a:pPr>
+            <a:r>
+              <a:t>✅ Logo generated from text description in seconds</a:t>
+            </a:r>
+          </a:p>
+          <a:p>
+            <a:pPr algn="l">
+              <a:defRPr sz="2000" b="0">
+                <a:solidFill>
+                  <a:srgbClr val="FFFFFF"/>
+                </a:solidFill>
+                <a:latin typeface="Calibri"/>
+              </a:defRPr>
+            </a:pPr>
+            <a:r>
+              <a:t>✅ Refined through iteration (full logo → minimal icon)</a:t>
+            </a:r>
+          </a:p>
+          <a:p>
+            <a:pPr algn="l">
+              <a:defRPr sz="2000" b="0">
+                <a:solidFill>
+                  <a:srgbClr val="FFFFFF"/>
+                </a:solidFill>
+                <a:latin typeface="Calibri"/>
+              </a:defRPr>
+            </a:pPr>
+            <a:r>
+              <a:t>✅ Full brand system: colours, typography, guidelines</a:t>
+            </a:r>
+          </a:p>
+          <a:p>
+            <a:pPr algn="l">
+              <a:defRPr sz="2000" b="0">
+                <a:solidFill>
+                  <a:srgbClr val="FFFFFF"/>
+                </a:solidFill>
+                <a:latin typeface="Calibri"/>
+              </a:defRPr>
+            </a:pPr>
+            <a:r>
+              <a:t>✅ Business card mockup</a:t>
+            </a:r>
+          </a:p>
+          <a:p>
+            <a:pPr algn="l">
+              <a:defRPr sz="1200" b="0">
+                <a:solidFill>
+                  <a:srgbClr val="FFFFFF"/>
+                </a:solidFill>
+                <a:latin typeface="Calibri"/>
+              </a:defRPr>
+            </a:pPr>
+          </a:p>
+          <a:p>
+            <a:pPr algn="l">
+              <a:defRPr sz="2200" b="1">
+                <a:solidFill>
+                  <a:srgbClr val="00D4F5"/>
+                </a:solidFill>
+                <a:latin typeface="Calibri"/>
+              </a:defRPr>
+            </a:pPr>
+            <a:r>
+              <a:t>⏱ Time: ~4 minutes  vs  weeks with a design agency</a:t>
+            </a:r>
+          </a:p>
+          <a:p>
+            <a:pPr algn="l">
+              <a:defRPr sz="1200" b="0">
+                <a:solidFill>
+                  <a:srgbClr val="FFFFFF"/>
+                </a:solidFill>
+                <a:latin typeface="Calibri"/>
+              </a:defRPr>
+            </a:pPr>
+          </a:p>
+          <a:p>
+            <a:pPr algn="l">
+              <a:defRPr sz="2200" b="1">
+                <a:solidFill>
+                  <a:srgbClr val="FF6B35"/>
+                </a:solidFill>
+                <a:latin typeface="Calibri"/>
+              </a:defRPr>
+            </a:pPr>
+            <a:r>
+              <a:t>💡 Key Lesson: Use Different Tools for Different Strengths</a:t>
+            </a:r>
+          </a:p>
+          <a:p>
+            <a:pPr algn="l">
               <a:defRPr sz="1800" b="0">
                 <a:solidFill>
-                  <a:srgbClr val="BBBBCC"/>
-                </a:solidFill>
-                <a:latin typeface="Calibri"/>
-              </a:defRPr>
-            </a:pPr>
-            <a:r>
-              <a:t>🎨  What to notice in the output</a:t>
-            </a:r>
-          </a:p>
-        </p:txBody>
-      </p:sp>
-      <p:sp>
-        <p:nvSpPr>
-          <p:cNvPr id="5" name="TextBox 4"/>
-          <p:cNvSpPr txBox="1"/>
-          <p:nvPr/>
-        </p:nvSpPr>
-        <p:spPr>
-          <a:xfrm>
-            <a:off x="1005840" y="1828800"/>
-            <a:ext cx="10058400" cy="4572000"/>
-          </a:xfrm>
-          <a:prstGeom prst="rect">
-            <a:avLst/>
-          </a:prstGeom>
-          <a:noFill/>
-        </p:spPr>
-        <p:txBody>
-          <a:bodyPr wrap="square">
-            <a:spAutoFit/>
-          </a:bodyPr>
-          <a:lstStyle/>
-          <a:p>
-            <a:pPr>
-              <a:defRPr sz="2200" b="1">
-                <a:solidFill>
-                  <a:srgbClr val="FFFFFF"/>
-                </a:solidFill>
-                <a:latin typeface="Calibri"/>
-              </a:defRPr>
-            </a:pPr>
-            <a:r>
-              <a:t>▸ Reference brands set the bar</a:t>
-            </a:r>
-          </a:p>
-          <a:p>
-            <a:pPr>
-              <a:spcBef>
-                <a:spcPts val="200"/>
-              </a:spcBef>
-              <a:defRPr sz="1800">
-                <a:solidFill>
-                  <a:srgbClr val="BBBBCC"/>
-                </a:solidFill>
-                <a:latin typeface="Calibri"/>
-              </a:defRPr>
-            </a:pPr>
-            <a:r>
-              <a:t>    Naming Stripe/Linear/Notion guides the AI's aesthetic</a:t>
-            </a:r>
-          </a:p>
-          <a:p>
-            <a:pPr>
-              <a:spcBef>
-                <a:spcPts val="1000"/>
-              </a:spcBef>
-              <a:defRPr sz="2200" b="1">
-                <a:solidFill>
-                  <a:srgbClr val="FFFFFF"/>
-                </a:solidFill>
-                <a:latin typeface="Calibri"/>
-              </a:defRPr>
-            </a:pPr>
-            <a:r>
-              <a:t>▸ Say what you DON'T want</a:t>
-            </a:r>
-          </a:p>
-          <a:p>
-            <a:pPr>
-              <a:spcBef>
-                <a:spcPts val="200"/>
-              </a:spcBef>
-              <a:defRPr sz="1800">
-                <a:solidFill>
-                  <a:srgbClr val="BBBBCC"/>
-                </a:solidFill>
-                <a:latin typeface="Calibri"/>
-              </a:defRPr>
-            </a:pPr>
-            <a:r>
-              <a:t>    'Not cartoonish, not complex' constrains the creative space</a:t>
-            </a:r>
-          </a:p>
-          <a:p>
-            <a:pPr>
-              <a:spcBef>
-                <a:spcPts val="1000"/>
-              </a:spcBef>
-              <a:defRPr sz="2200" b="1">
-                <a:solidFill>
-                  <a:srgbClr val="FFFFFF"/>
-                </a:solidFill>
-                <a:latin typeface="Calibri"/>
-              </a:defRPr>
-            </a:pPr>
-            <a:r>
-              <a:t>▸ Build incrementally</a:t>
-            </a:r>
-          </a:p>
-          <a:p>
-            <a:pPr>
-              <a:spcBef>
-                <a:spcPts val="200"/>
-              </a:spcBef>
-              <a:defRPr sz="1800">
-                <a:solidFill>
-                  <a:srgbClr val="BBBBCC"/>
-                </a:solidFill>
-                <a:latin typeface="Calibri"/>
-              </a:defRPr>
-            </a:pPr>
-            <a:r>
-              <a:t>    Logo → refine → palette → typography → mockup</a:t>
-            </a:r>
-          </a:p>
-          <a:p>
-            <a:pPr>
-              <a:spcBef>
-                <a:spcPts val="1000"/>
-              </a:spcBef>
-              <a:defRPr sz="2200" b="1">
-                <a:solidFill>
-                  <a:srgbClr val="FFFFFF"/>
-                </a:solidFill>
-                <a:latin typeface="Calibri"/>
-              </a:defRPr>
-            </a:pPr>
-            <a:r>
-              <a:t>▸ A brief for your designer</a:t>
-            </a:r>
-          </a:p>
-          <a:p>
-            <a:pPr>
-              <a:spcBef>
-                <a:spcPts val="200"/>
-              </a:spcBef>
-              <a:defRPr sz="1800">
-                <a:solidFill>
-                  <a:srgbClr val="BBBBCC"/>
-                </a:solidFill>
-                <a:latin typeface="Calibri"/>
-              </a:defRPr>
-            </a:pPr>
-            <a:r>
-              <a:t>    Not a finished identity — a solid starting direction</a:t>
+                  <a:srgbClr val="CCCCCC"/>
+                </a:solidFill>
+                <a:latin typeface="Calibri"/>
+              </a:defRPr>
+            </a:pPr>
+            <a:r>
+              <a:t>• ChatGPT → image generation (GPT Image, free tier)</a:t>
+            </a:r>
+          </a:p>
+          <a:p>
+            <a:pPr algn="l">
+              <a:defRPr sz="1800" b="0">
+                <a:solidFill>
+                  <a:srgbClr val="CCCCCC"/>
+                </a:solidFill>
+                <a:latin typeface="Calibri"/>
+              </a:defRPr>
+            </a:pPr>
+            <a:r>
+              <a:t>• Claude → text, structure, guidelines, documents</a:t>
+            </a:r>
+          </a:p>
+          <a:p>
+            <a:pPr algn="l">
+              <a:defRPr sz="1800" b="0">
+                <a:solidFill>
+                  <a:srgbClr val="CCCCCC"/>
+                </a:solidFill>
+                <a:latin typeface="Calibri"/>
+              </a:defRPr>
+            </a:pPr>
+            <a:r>
+              <a:t>• Reference brands in your prompt to set creative direction</a:t>
+            </a:r>
+          </a:p>
+          <a:p>
+            <a:pPr algn="l">
+              <a:defRPr sz="1800" b="0">
+                <a:solidFill>
+                  <a:srgbClr val="CCCCCC"/>
+                </a:solidFill>
+                <a:latin typeface="Calibri"/>
+              </a:defRPr>
+            </a:pPr>
+            <a:r>
+              <a:t>• Constrain the creative space → better output</a:t>
             </a:r>
           </a:p>
         </p:txBody>
@@ -3896,8 +3946,8 @@
         </p:nvSpPr>
         <p:spPr>
           <a:xfrm>
-            <a:off x="731520" y="548640"/>
-            <a:ext cx="73152" cy="548640"/>
+            <a:off x="0" y="0"/>
+            <a:ext cx="12191695" cy="73152"/>
           </a:xfrm>
           <a:prstGeom prst="rect">
             <a:avLst/>
@@ -3939,8 +3989,8 @@
         </p:nvSpPr>
         <p:spPr>
           <a:xfrm>
-            <a:off x="1005840" y="457200"/>
-            <a:ext cx="9144000" cy="822960"/>
+            <a:off x="548640" y="274320"/>
+            <a:ext cx="10972800" cy="640080"/>
           </a:xfrm>
           <a:prstGeom prst="rect">
             <a:avLst/>
@@ -3954,6 +4004,9 @@
           <a:lstStyle/>
           <a:p>
             <a:pPr algn="l">
+              <a:spcAft>
+                <a:spcPts val="400"/>
+              </a:spcAft>
               <a:defRPr sz="3600" b="1">
                 <a:solidFill>
                   <a:srgbClr val="FFFFFF"/>
@@ -3962,7 +4015,7 @@
               </a:defRPr>
             </a:pPr>
             <a:r>
-              <a:t>Use Case 4: Market Research</a:t>
+              <a:t>🔍 Use Case 4: Market Research</a:t>
             </a:r>
           </a:p>
         </p:txBody>
@@ -3975,8 +4028,8 @@
         </p:nvSpPr>
         <p:spPr>
           <a:xfrm>
-            <a:off x="1005840" y="1280160"/>
-            <a:ext cx="9144000" cy="457200"/>
+            <a:off x="548640" y="914400"/>
+            <a:ext cx="10972800" cy="457200"/>
           </a:xfrm>
           <a:prstGeom prst="rect">
             <a:avLst/>
@@ -3990,29 +4043,75 @@
           <a:lstStyle/>
           <a:p>
             <a:pPr algn="l">
+              <a:spcAft>
+                <a:spcPts val="400"/>
+              </a:spcAft>
               <a:defRPr sz="1800" b="0">
                 <a:solidFill>
-                  <a:srgbClr val="BBBBCC"/>
-                </a:solidFill>
-                <a:latin typeface="Calibri"/>
-              </a:defRPr>
-            </a:pPr>
-            <a:r>
-              <a:t>🔍  Deep research with citations, not hallucinations</a:t>
-            </a:r>
-          </a:p>
-        </p:txBody>
-      </p:sp>
-      <p:sp>
-        <p:nvSpPr>
-          <p:cNvPr id="5" name="TextBox 4"/>
+                  <a:srgbClr val="CCCCCC"/>
+                </a:solidFill>
+                <a:latin typeface="Calibri"/>
+              </a:defRPr>
+            </a:pPr>
+            <a:r>
+              <a:t>From scratch → Sourced report with citations — uses Claude web search</a:t>
+            </a:r>
+          </a:p>
+        </p:txBody>
+      </p:sp>
+      <p:sp>
+        <p:nvSpPr>
+          <p:cNvPr id="5" name="Rectangle 4"/>
+          <p:cNvSpPr/>
+          <p:nvPr/>
+        </p:nvSpPr>
+        <p:spPr>
+          <a:xfrm>
+            <a:off x="365760" y="1463040"/>
+            <a:ext cx="11430000" cy="2011680"/>
+          </a:xfrm>
+          <a:prstGeom prst="rect">
+            <a:avLst/>
+          </a:prstGeom>
+          <a:solidFill>
+            <a:srgbClr val="222638"/>
+          </a:solidFill>
+          <a:ln>
+            <a:noFill/>
+          </a:ln>
+        </p:spPr>
+        <p:style>
+          <a:lnRef idx="1">
+            <a:schemeClr val="accent1"/>
+          </a:lnRef>
+          <a:fillRef idx="3">
+            <a:schemeClr val="accent1"/>
+          </a:fillRef>
+          <a:effectRef idx="2">
+            <a:schemeClr val="accent1"/>
+          </a:effectRef>
+          <a:fontRef idx="minor">
+            <a:schemeClr val="lt1"/>
+          </a:fontRef>
+        </p:style>
+        <p:txBody>
+          <a:bodyPr rtlCol="0" anchor="ctr"/>
+          <a:lstStyle/>
+          <a:p>
+            <a:pPr algn="ctr"/>
+          </a:p>
+        </p:txBody>
+      </p:sp>
+      <p:sp>
+        <p:nvSpPr>
+          <p:cNvPr id="6" name="TextBox 5"/>
           <p:cNvSpPr txBox="1"/>
           <p:nvPr/>
         </p:nvSpPr>
         <p:spPr>
           <a:xfrm>
-            <a:off x="1005840" y="1828800"/>
-            <a:ext cx="10058400" cy="4572000"/>
+            <a:off x="548640" y="1554480"/>
+            <a:ext cx="10972800" cy="1828800"/>
           </a:xfrm>
           <a:prstGeom prst="rect">
             <a:avLst/>
@@ -4025,64 +4124,241 @@
           </a:bodyPr>
           <a:lstStyle/>
           <a:p>
-            <a:pPr>
-              <a:defRPr sz="2200" b="0">
-                <a:solidFill>
-                  <a:srgbClr val="FFFFFF"/>
-                </a:solidFill>
-                <a:latin typeface="Calibri"/>
-              </a:defRPr>
-            </a:pPr>
-            <a:r>
-              <a:t>▸ Market: UK sustainable packaging industry</a:t>
-            </a:r>
-          </a:p>
-          <a:p>
-            <a:pPr>
-              <a:spcBef>
-                <a:spcPts val="1000"/>
-              </a:spcBef>
-              <a:defRPr sz="2200" b="0">
-                <a:solidFill>
-                  <a:srgbClr val="FFFFFF"/>
-                </a:solidFill>
-                <a:latin typeface="Calibri"/>
-              </a:defRPr>
-            </a:pPr>
-            <a:r>
-              <a:t>▸ Tool: Perplexity Pro — real-time web search with cited sources</a:t>
-            </a:r>
-          </a:p>
-          <a:p>
-            <a:pPr>
-              <a:spcBef>
-                <a:spcPts val="1000"/>
-              </a:spcBef>
-              <a:defRPr sz="2200" b="0">
-                <a:solidFill>
-                  <a:srgbClr val="FFFFFF"/>
-                </a:solidFill>
-                <a:latin typeface="Calibri"/>
-              </a:defRPr>
-            </a:pPr>
-            <a:r>
-              <a:t>▸ Goal: Market size, competitors, trends, SWOT, TAM/SAM/SOM</a:t>
-            </a:r>
-          </a:p>
-          <a:p>
-            <a:pPr>
-              <a:spcBef>
-                <a:spcPts val="1000"/>
-              </a:spcBef>
-              <a:defRPr sz="2200" b="0">
-                <a:solidFill>
-                  <a:srgbClr val="FFFFFF"/>
-                </a:solidFill>
-                <a:latin typeface="Calibri"/>
-              </a:defRPr>
-            </a:pPr>
-            <a:r>
-              <a:t>▸ The difference: Every claim links to a real, verifiable source</a:t>
+            <a:pPr algn="l">
+              <a:spcAft>
+                <a:spcPts val="400"/>
+              </a:spcAft>
+              <a:defRPr sz="2400" b="1">
+                <a:solidFill>
+                  <a:srgbClr val="FF6B35"/>
+                </a:solidFill>
+                <a:latin typeface="Calibri"/>
+              </a:defRPr>
+            </a:pPr>
+            <a:r>
+              <a:t>The Scenario</a:t>
+            </a:r>
+          </a:p>
+          <a:p>
+            <a:pPr algn="l">
+              <a:defRPr sz="1800" b="0">
+                <a:solidFill>
+                  <a:srgbClr val="FFFFFF"/>
+                </a:solidFill>
+                <a:latin typeface="Calibri"/>
+              </a:defRPr>
+            </a:pPr>
+            <a:r>
+              <a:t>• Research the UK sustainable packaging market from scratch</a:t>
+            </a:r>
+          </a:p>
+          <a:p>
+            <a:pPr algn="l">
+              <a:defRPr sz="1800" b="0">
+                <a:solidFill>
+                  <a:srgbClr val="FFFFFF"/>
+                </a:solidFill>
+                <a:latin typeface="Calibri"/>
+              </a:defRPr>
+            </a:pPr>
+            <a:r>
+              <a:t>• No files, no data — just a prompt and AI with web access</a:t>
+            </a:r>
+          </a:p>
+          <a:p>
+            <a:pPr algn="l">
+              <a:defRPr sz="1800" b="0">
+                <a:solidFill>
+                  <a:srgbClr val="FFFFFF"/>
+                </a:solidFill>
+                <a:latin typeface="Calibri"/>
+              </a:defRPr>
+            </a:pPr>
+            <a:r>
+              <a:t>• Need: market size, drivers, competitors, trends, recommendations</a:t>
+            </a:r>
+          </a:p>
+          <a:p>
+            <a:pPr algn="l">
+              <a:defRPr sz="1800" b="0">
+                <a:solidFill>
+                  <a:srgbClr val="FFFFFF"/>
+                </a:solidFill>
+                <a:latin typeface="Calibri"/>
+              </a:defRPr>
+            </a:pPr>
+            <a:r>
+              <a:t>• All claims must be cited with clickable sources</a:t>
+            </a:r>
+          </a:p>
+        </p:txBody>
+      </p:sp>
+      <p:sp>
+        <p:nvSpPr>
+          <p:cNvPr id="7" name="Rectangle 6"/>
+          <p:cNvSpPr/>
+          <p:nvPr/>
+        </p:nvSpPr>
+        <p:spPr>
+          <a:xfrm>
+            <a:off x="365760" y="3749039"/>
+            <a:ext cx="11430000" cy="2834640"/>
+          </a:xfrm>
+          <a:prstGeom prst="rect">
+            <a:avLst/>
+          </a:prstGeom>
+          <a:solidFill>
+            <a:srgbClr val="2A2E42"/>
+          </a:solidFill>
+          <a:ln>
+            <a:noFill/>
+          </a:ln>
+        </p:spPr>
+        <p:style>
+          <a:lnRef idx="1">
+            <a:schemeClr val="accent1"/>
+          </a:lnRef>
+          <a:fillRef idx="3">
+            <a:schemeClr val="accent1"/>
+          </a:fillRef>
+          <a:effectRef idx="2">
+            <a:schemeClr val="accent1"/>
+          </a:effectRef>
+          <a:fontRef idx="minor">
+            <a:schemeClr val="lt1"/>
+          </a:fontRef>
+        </p:style>
+        <p:txBody>
+          <a:bodyPr rtlCol="0" anchor="ctr"/>
+          <a:lstStyle/>
+          <a:p>
+            <a:pPr algn="ctr"/>
+          </a:p>
+        </p:txBody>
+      </p:sp>
+      <p:sp>
+        <p:nvSpPr>
+          <p:cNvPr id="8" name="TextBox 7"/>
+          <p:cNvSpPr txBox="1"/>
+          <p:nvPr/>
+        </p:nvSpPr>
+        <p:spPr>
+          <a:xfrm>
+            <a:off x="548640" y="3840480"/>
+            <a:ext cx="10972800" cy="2651760"/>
+          </a:xfrm>
+          <a:prstGeom prst="rect">
+            <a:avLst/>
+          </a:prstGeom>
+          <a:noFill/>
+        </p:spPr>
+        <p:txBody>
+          <a:bodyPr wrap="square">
+            <a:spAutoFit/>
+          </a:bodyPr>
+          <a:lstStyle/>
+          <a:p>
+            <a:pPr algn="l">
+              <a:spcAft>
+                <a:spcPts val="400"/>
+              </a:spcAft>
+              <a:defRPr sz="2200" b="1">
+                <a:solidFill>
+                  <a:srgbClr val="00D4F5"/>
+                </a:solidFill>
+                <a:latin typeface="Calibri"/>
+              </a:defRPr>
+            </a:pPr>
+            <a:r>
+              <a:t>The Iteration Chain</a:t>
+            </a:r>
+          </a:p>
+          <a:p>
+            <a:pPr algn="l">
+              <a:defRPr sz="1700" b="0">
+                <a:solidFill>
+                  <a:srgbClr val="FFFFFF"/>
+                </a:solidFill>
+                <a:latin typeface="Calibri"/>
+              </a:defRPr>
+            </a:pPr>
+            <a:r>
+              <a:t>1️⃣  Full market report → 5 sections, sourced, board-ready tone</a:t>
+            </a:r>
+          </a:p>
+          <a:p>
+            <a:pPr algn="l">
+              <a:defRPr sz="1700" b="0">
+                <a:solidFill>
+                  <a:srgbClr val="FFFFFF"/>
+                </a:solidFill>
+                <a:latin typeface="Calibri"/>
+              </a:defRPr>
+            </a:pPr>
+            <a:r>
+              <a:t>2️⃣  SWOT analysis → for a seaweed-based packaging startup</a:t>
+            </a:r>
+          </a:p>
+          <a:p>
+            <a:pPr algn="l">
+              <a:defRPr sz="1700" b="0">
+                <a:solidFill>
+                  <a:srgbClr val="FFFFFF"/>
+                </a:solidFill>
+                <a:latin typeface="Calibri"/>
+              </a:defRPr>
+            </a:pPr>
+            <a:r>
+              <a:t>3️⃣  Competitive threat assessment → top 5 competitors, vulnerabilities</a:t>
+            </a:r>
+          </a:p>
+          <a:p>
+            <a:pPr algn="l">
+              <a:defRPr sz="1700" b="0">
+                <a:solidFill>
+                  <a:srgbClr val="FFFFFF"/>
+                </a:solidFill>
+                <a:latin typeface="Calibri"/>
+              </a:defRPr>
+            </a:pPr>
+            <a:r>
+              <a:t>4️⃣  TAM / SAM / SOM → market sizing with assumptions</a:t>
+            </a:r>
+          </a:p>
+          <a:p>
+            <a:pPr algn="l">
+              <a:defRPr sz="1700" b="0">
+                <a:solidFill>
+                  <a:srgbClr val="FFFFFF"/>
+                </a:solidFill>
+                <a:latin typeface="Calibri"/>
+              </a:defRPr>
+            </a:pPr>
+            <a:r>
+              <a:t>5️⃣  Executive summary → 250 words, investor-memo ready</a:t>
+            </a:r>
+          </a:p>
+          <a:p>
+            <a:pPr algn="l">
+              <a:defRPr sz="800" b="0">
+                <a:solidFill>
+                  <a:srgbClr val="FFFFFF"/>
+                </a:solidFill>
+                <a:latin typeface="Calibri"/>
+              </a:defRPr>
+            </a:pPr>
+          </a:p>
+          <a:p>
+            <a:pPr algn="l">
+              <a:defRPr sz="1600" b="1">
+                <a:solidFill>
+                  <a:srgbClr val="00D4F5"/>
+                </a:solidFill>
+                <a:latin typeface="Calibri"/>
+              </a:defRPr>
+            </a:pPr>
+            <a:r>
+              <a:t>Tool: Claude with web search — searches the internet, cites every claim</a:t>
             </a:r>
           </a:p>
         </p:txBody>
@@ -4115,63 +4391,24 @@
       <p:grpSpPr/>
       <p:sp>
         <p:nvSpPr>
-          <p:cNvPr id="2" name="TextBox 1"/>
-          <p:cNvSpPr txBox="1"/>
-          <p:nvPr/>
-        </p:nvSpPr>
-        <p:spPr>
-          <a:xfrm>
-            <a:off x="731520" y="274320"/>
-            <a:ext cx="4572000" cy="548640"/>
-          </a:xfrm>
-          <a:prstGeom prst="rect">
-            <a:avLst/>
-          </a:prstGeom>
-          <a:noFill/>
-        </p:spPr>
-        <p:txBody>
-          <a:bodyPr wrap="square">
-            <a:spAutoFit/>
-          </a:bodyPr>
-          <a:lstStyle/>
-          <a:p>
-            <a:pPr algn="l">
-              <a:defRPr sz="2400" b="1">
-                <a:solidFill>
-                  <a:srgbClr val="00D4F5"/>
-                </a:solidFill>
-                <a:latin typeface="Calibri"/>
-              </a:defRPr>
-            </a:pPr>
-            <a:r>
-              <a:t>Use Case 4 — The Prompt</a:t>
-            </a:r>
-          </a:p>
-        </p:txBody>
-      </p:sp>
-      <p:sp>
-        <p:nvSpPr>
-          <p:cNvPr id="3" name="Rounded Rectangle 2"/>
+          <p:cNvPr id="2" name="Rectangle 1"/>
           <p:cNvSpPr/>
           <p:nvPr/>
         </p:nvSpPr>
         <p:spPr>
           <a:xfrm>
-            <a:off x="457200" y="914400"/>
-            <a:ext cx="11247120" cy="5303520"/>
-          </a:xfrm>
-          <a:prstGeom prst="roundRect">
+            <a:off x="0" y="0"/>
+            <a:ext cx="12191695" cy="73152"/>
+          </a:xfrm>
+          <a:prstGeom prst="rect">
             <a:avLst/>
           </a:prstGeom>
           <a:solidFill>
-            <a:srgbClr val="2A2E3E"/>
+            <a:srgbClr val="00D4F5"/>
           </a:solidFill>
-          <a:ln w="12700">
-            <a:solidFill>
-              <a:srgbClr val="3A3E4E"/>
-            </a:solidFill>
+          <a:ln>
+            <a:noFill/>
           </a:ln>
-          <a:effectLst/>
         </p:spPr>
         <p:style>
           <a:lnRef idx="1">
@@ -4197,14 +4434,14 @@
       </p:sp>
       <p:sp>
         <p:nvSpPr>
-          <p:cNvPr id="4" name="TextBox 3"/>
+          <p:cNvPr id="3" name="TextBox 2"/>
           <p:cNvSpPr txBox="1"/>
           <p:nvPr/>
         </p:nvSpPr>
         <p:spPr>
           <a:xfrm>
-            <a:off x="731520" y="1097280"/>
-            <a:ext cx="10698480" cy="4937760"/>
+            <a:off x="548640" y="274320"/>
+            <a:ext cx="10972800" cy="640080"/>
           </a:xfrm>
           <a:prstGeom prst="rect">
             <a:avLst/>
@@ -4217,206 +4454,163 @@
           </a:bodyPr>
           <a:lstStyle/>
           <a:p>
-            <a:pPr>
-              <a:defRPr sz="1300">
-                <a:solidFill>
-                  <a:srgbClr val="E0E8F0"/>
+            <a:pPr algn="l">
+              <a:spcAft>
+                <a:spcPts val="400"/>
+              </a:spcAft>
+              <a:defRPr sz="3200" b="1">
+                <a:solidFill>
+                  <a:srgbClr val="FFFFFF"/>
+                </a:solidFill>
+                <a:latin typeface="Calibri"/>
+              </a:defRPr>
+            </a:pPr>
+            <a:r>
+              <a:t>🔍 UC4: The Prompt</a:t>
+            </a:r>
+          </a:p>
+        </p:txBody>
+      </p:sp>
+      <p:sp>
+        <p:nvSpPr>
+          <p:cNvPr id="4" name="Rectangle 3"/>
+          <p:cNvSpPr/>
+          <p:nvPr/>
+        </p:nvSpPr>
+        <p:spPr>
+          <a:xfrm>
+            <a:off x="365760" y="1097280"/>
+            <a:ext cx="11430000" cy="5303520"/>
+          </a:xfrm>
+          <a:prstGeom prst="rect">
+            <a:avLst/>
+          </a:prstGeom>
+          <a:solidFill>
+            <a:srgbClr val="121422"/>
+          </a:solidFill>
+          <a:ln>
+            <a:noFill/>
+          </a:ln>
+        </p:spPr>
+        <p:style>
+          <a:lnRef idx="1">
+            <a:schemeClr val="accent1"/>
+          </a:lnRef>
+          <a:fillRef idx="3">
+            <a:schemeClr val="accent1"/>
+          </a:fillRef>
+          <a:effectRef idx="2">
+            <a:schemeClr val="accent1"/>
+          </a:effectRef>
+          <a:fontRef idx="minor">
+            <a:schemeClr val="lt1"/>
+          </a:fontRef>
+        </p:style>
+        <p:txBody>
+          <a:bodyPr rtlCol="0" anchor="ctr"/>
+          <a:lstStyle/>
+          <a:p>
+            <a:pPr algn="ctr"/>
+          </a:p>
+        </p:txBody>
+      </p:sp>
+      <p:sp>
+        <p:nvSpPr>
+          <p:cNvPr id="5" name="TextBox 4"/>
+          <p:cNvSpPr txBox="1"/>
+          <p:nvPr/>
+        </p:nvSpPr>
+        <p:spPr>
+          <a:xfrm>
+            <a:off x="548640" y="1280160"/>
+            <a:ext cx="10972800" cy="4937760"/>
+          </a:xfrm>
+          <a:prstGeom prst="rect">
+            <a:avLst/>
+          </a:prstGeom>
+          <a:noFill/>
+        </p:spPr>
+        <p:txBody>
+          <a:bodyPr wrap="square">
+            <a:spAutoFit/>
+          </a:bodyPr>
+          <a:lstStyle/>
+          <a:p>
+            <a:pPr algn="l">
+              <a:spcAft>
+                <a:spcPts val="400"/>
+              </a:spcAft>
+              <a:defRPr sz="1400" b="0">
+                <a:solidFill>
+                  <a:srgbClr val="00D4F5"/>
                 </a:solidFill>
                 <a:latin typeface="Consolas"/>
               </a:defRPr>
             </a:pPr>
             <a:r>
-              <a:t>Comprehensive market research: UK sustainable packaging industry (2026).</a:t>
-            </a:r>
-          </a:p>
-          <a:p>
-            <a:pPr>
-              <a:spcBef>
-                <a:spcPts val="200"/>
-              </a:spcBef>
-              <a:defRPr sz="1300">
-                <a:solidFill>
-                  <a:srgbClr val="E0E8F0"/>
-                </a:solidFill>
-                <a:latin typeface="Consolas"/>
-              </a:defRPr>
-            </a:pPr>
-          </a:p>
-          <a:p>
-            <a:pPr>
-              <a:spcBef>
-                <a:spcPts val="200"/>
-              </a:spcBef>
-              <a:defRPr sz="1300">
-                <a:solidFill>
-                  <a:srgbClr val="E0E8F0"/>
-                </a:solidFill>
-                <a:latin typeface="Consolas"/>
-              </a:defRPr>
-            </a:pPr>
-            <a:r>
-              <a:t>1. Market Overview: Size (£), growth rate (CAGR), projected 2030 size.</a:t>
-            </a:r>
-          </a:p>
-          <a:p>
-            <a:pPr>
-              <a:spcBef>
-                <a:spcPts val="200"/>
-              </a:spcBef>
-              <a:defRPr sz="1300">
-                <a:solidFill>
-                  <a:srgbClr val="E0E8F0"/>
-                </a:solidFill>
-                <a:latin typeface="Consolas"/>
-              </a:defRPr>
-            </a:pPr>
-            <a:r>
-              <a:t>   Segments: biodegradable plastics, paper/cardboard, reusable packaging, edible/dissolvable.</a:t>
-            </a:r>
-          </a:p>
-          <a:p>
-            <a:pPr>
-              <a:spcBef>
-                <a:spcPts val="200"/>
-              </a:spcBef>
-              <a:defRPr sz="1300">
-                <a:solidFill>
-                  <a:srgbClr val="E0E8F0"/>
-                </a:solidFill>
-                <a:latin typeface="Consolas"/>
-              </a:defRPr>
-            </a:pPr>
-          </a:p>
-          <a:p>
-            <a:pPr>
-              <a:spcBef>
-                <a:spcPts val="200"/>
-              </a:spcBef>
-              <a:defRPr sz="1300">
-                <a:solidFill>
-                  <a:srgbClr val="E0E8F0"/>
-                </a:solidFill>
-                <a:latin typeface="Consolas"/>
-              </a:defRPr>
-            </a:pPr>
-            <a:r>
-              <a:t>2. Key Drivers: Regulatory (UK Plastic Packaging Tax, EPR), consumer demand, retailer commitments (name companies), tech advances.</a:t>
-            </a:r>
-          </a:p>
-          <a:p>
-            <a:pPr>
-              <a:spcBef>
-                <a:spcPts val="200"/>
-              </a:spcBef>
-              <a:defRPr sz="1300">
-                <a:solidFill>
-                  <a:srgbClr val="E0E8F0"/>
-                </a:solidFill>
-                <a:latin typeface="Consolas"/>
-              </a:defRPr>
-            </a:pPr>
-          </a:p>
-          <a:p>
-            <a:pPr>
-              <a:spcBef>
-                <a:spcPts val="200"/>
-              </a:spcBef>
-              <a:defRPr sz="1300">
-                <a:solidFill>
-                  <a:srgbClr val="E0E8F0"/>
-                </a:solidFill>
-                <a:latin typeface="Consolas"/>
-              </a:defRPr>
-            </a:pPr>
-            <a:r>
-              <a:t>3. Competitive Landscape: Top 10 UK companies — focus area, revenue/funding, differentiator.</a:t>
-            </a:r>
-          </a:p>
-          <a:p>
-            <a:pPr>
-              <a:spcBef>
-                <a:spcPts val="200"/>
-              </a:spcBef>
-              <a:defRPr sz="1300">
-                <a:solidFill>
-                  <a:srgbClr val="E0E8F0"/>
-                </a:solidFill>
-                <a:latin typeface="Consolas"/>
-              </a:defRPr>
-            </a:pPr>
-          </a:p>
-          <a:p>
-            <a:pPr>
-              <a:spcBef>
-                <a:spcPts val="200"/>
-              </a:spcBef>
-              <a:defRPr sz="1300">
-                <a:solidFill>
-                  <a:srgbClr val="E0E8F0"/>
-                </a:solidFill>
-                <a:latin typeface="Consolas"/>
-              </a:defRPr>
-            </a:pPr>
-            <a:r>
-              <a:t>4. Challenges: Cost premiums, performance limits, supply chain, greenwashing.</a:t>
-            </a:r>
-          </a:p>
-          <a:p>
-            <a:pPr>
-              <a:spcBef>
-                <a:spcPts val="200"/>
-              </a:spcBef>
-              <a:defRPr sz="1300">
-                <a:solidFill>
-                  <a:srgbClr val="E0E8F0"/>
-                </a:solidFill>
-                <a:latin typeface="Consolas"/>
-              </a:defRPr>
-            </a:pPr>
-          </a:p>
-          <a:p>
-            <a:pPr>
-              <a:spcBef>
-                <a:spcPts val="200"/>
-              </a:spcBef>
-              <a:defRPr sz="1300">
-                <a:solidFill>
-                  <a:srgbClr val="E0E8F0"/>
-                </a:solidFill>
-                <a:latin typeface="Consolas"/>
-              </a:defRPr>
-            </a:pPr>
-            <a:r>
-              <a:t>5. Trends 2026-2028: Emerging materials, AI in packaging, circular economy, D2C shifts.</a:t>
-            </a:r>
-          </a:p>
-          <a:p>
-            <a:pPr>
-              <a:spcBef>
-                <a:spcPts val="200"/>
-              </a:spcBef>
-              <a:defRPr sz="1300">
-                <a:solidFill>
-                  <a:srgbClr val="E0E8F0"/>
-                </a:solidFill>
-                <a:latin typeface="Consolas"/>
-              </a:defRPr>
-            </a:pPr>
-          </a:p>
-          <a:p>
-            <a:pPr>
-              <a:spcBef>
-                <a:spcPts val="200"/>
-              </a:spcBef>
-              <a:defRPr sz="1300">
-                <a:solidFill>
-                  <a:srgbClr val="E0E8F0"/>
-                </a:solidFill>
-                <a:latin typeface="Consolas"/>
-              </a:defRPr>
-            </a:pPr>
-            <a:r>
-              <a:t>Cite all statistics with sources. Professional tone for a board strategy presentation.</a:t>
+              <a:t>Search the web and conduct a comprehensive market research analysis of the</a:t>
+            </a:r>
+            <a:br/>
+            <a:r>
+              <a:t>UK sustainable packaging industry as of 2026. Structured report covering:</a:t>
+            </a:r>
+            <a:br/>
+            <a:br/>
+            <a:r>
+              <a:t>1. Market Overview: Current market size (£), CAGR, projected size by 2030.</a:t>
+            </a:r>
+            <a:br/>
+            <a:r>
+              <a:t>   Segments: biodegradable plastics, paper/cardboard, reusable systems,</a:t>
+            </a:r>
+            <a:br/>
+            <a:r>
+              <a:t>   edible/dissolvable packaging.</a:t>
+            </a:r>
+            <a:br/>
+            <a:br/>
+            <a:r>
+              <a:t>2. Key Market Drivers: UK Plastic Packaging Tax, EPR regulations, consumer</a:t>
+            </a:r>
+            <a:br/>
+            <a:r>
+              <a:t>   demand shifts, retailer commitments (name companies), tech advances.</a:t>
+            </a:r>
+            <a:br/>
+            <a:br/>
+            <a:r>
+              <a:t>3. Competitive Landscape: Top 10 companies (established + startups).</a:t>
+            </a:r>
+            <a:br/>
+            <a:r>
+              <a:t>   For each: focus area, revenue/funding, key differentiator.</a:t>
+            </a:r>
+            <a:br/>
+            <a:br/>
+            <a:r>
+              <a:t>4. Challenges &amp; Barriers: Cost premiums, performance limitations,</a:t>
+            </a:r>
+            <a:br/>
+            <a:r>
+              <a:t>   supply chain constraints, greenwashing concerns.</a:t>
+            </a:r>
+            <a:br/>
+            <a:br/>
+            <a:r>
+              <a:t>5. Key Trends 2026-2028: Emerging materials, AI/automation in packaging,</a:t>
+            </a:r>
+            <a:br/>
+            <a:r>
+              <a:t>   circular economy, D2C shifts.</a:t>
+            </a:r>
+            <a:br/>
+            <a:br/>
+            <a:r>
+              <a:t>Cite all statistics with sources. Most recent data available.</a:t>
+            </a:r>
+            <a:br/>
+            <a:r>
+              <a:t>Professional tone suitable for board strategy presentation.</a:t>
             </a:r>
           </a:p>
         </p:txBody>
@@ -4455,14 +4649,14 @@
         </p:nvSpPr>
         <p:spPr>
           <a:xfrm>
-            <a:off x="731520" y="548640"/>
-            <a:ext cx="73152" cy="548640"/>
+            <a:off x="0" y="0"/>
+            <a:ext cx="12191695" cy="73152"/>
           </a:xfrm>
           <a:prstGeom prst="rect">
             <a:avLst/>
           </a:prstGeom>
           <a:solidFill>
-            <a:srgbClr val="00D4F5"/>
+            <a:srgbClr val="FF6B35"/>
           </a:solidFill>
           <a:ln>
             <a:noFill/>
@@ -4498,8 +4692,8 @@
         </p:nvSpPr>
         <p:spPr>
           <a:xfrm>
-            <a:off x="1005840" y="457200"/>
-            <a:ext cx="9144000" cy="822960"/>
+            <a:off x="548640" y="274320"/>
+            <a:ext cx="10972800" cy="640080"/>
           </a:xfrm>
           <a:prstGeom prst="rect">
             <a:avLst/>
@@ -4513,6 +4707,9 @@
           <a:lstStyle/>
           <a:p>
             <a:pPr algn="l">
+              <a:spcAft>
+                <a:spcPts val="400"/>
+              </a:spcAft>
               <a:defRPr sz="3600" b="1">
                 <a:solidFill>
                   <a:srgbClr val="FFFFFF"/>
@@ -4521,21 +4718,64 @@
               </a:defRPr>
             </a:pPr>
             <a:r>
-              <a:t>Use Case 4: Key Takeaways</a:t>
-            </a:r>
-          </a:p>
-        </p:txBody>
-      </p:sp>
-      <p:sp>
-        <p:nvSpPr>
-          <p:cNvPr id="4" name="TextBox 3"/>
+              <a:t>🔍 UC4: Key Takeaways</a:t>
+            </a:r>
+          </a:p>
+        </p:txBody>
+      </p:sp>
+      <p:sp>
+        <p:nvSpPr>
+          <p:cNvPr id="4" name="Rectangle 3"/>
+          <p:cNvSpPr/>
+          <p:nvPr/>
+        </p:nvSpPr>
+        <p:spPr>
+          <a:xfrm>
+            <a:off x="365760" y="1280160"/>
+            <a:ext cx="11430000" cy="5029200"/>
+          </a:xfrm>
+          <a:prstGeom prst="rect">
+            <a:avLst/>
+          </a:prstGeom>
+          <a:solidFill>
+            <a:srgbClr val="222638"/>
+          </a:solidFill>
+          <a:ln>
+            <a:noFill/>
+          </a:ln>
+        </p:spPr>
+        <p:style>
+          <a:lnRef idx="1">
+            <a:schemeClr val="accent1"/>
+          </a:lnRef>
+          <a:fillRef idx="3">
+            <a:schemeClr val="accent1"/>
+          </a:fillRef>
+          <a:effectRef idx="2">
+            <a:schemeClr val="accent1"/>
+          </a:effectRef>
+          <a:fontRef idx="minor">
+            <a:schemeClr val="lt1"/>
+          </a:fontRef>
+        </p:style>
+        <p:txBody>
+          <a:bodyPr rtlCol="0" anchor="ctr"/>
+          <a:lstStyle/>
+          <a:p>
+            <a:pPr algn="ctr"/>
+          </a:p>
+        </p:txBody>
+      </p:sp>
+      <p:sp>
+        <p:nvSpPr>
+          <p:cNvPr id="5" name="TextBox 4"/>
           <p:cNvSpPr txBox="1"/>
           <p:nvPr/>
         </p:nvSpPr>
         <p:spPr>
           <a:xfrm>
-            <a:off x="1005840" y="1280160"/>
-            <a:ext cx="9144000" cy="457200"/>
+            <a:off x="548640" y="1371600"/>
+            <a:ext cx="10972800" cy="4846320"/>
           </a:xfrm>
           <a:prstGeom prst="rect">
             <a:avLst/>
@@ -4549,163 +4789,168 @@
           <a:lstStyle/>
           <a:p>
             <a:pPr algn="l">
+              <a:spcAft>
+                <a:spcPts val="400"/>
+              </a:spcAft>
+              <a:defRPr sz="2400" b="1">
+                <a:solidFill>
+                  <a:srgbClr val="FF6B35"/>
+                </a:solidFill>
+                <a:latin typeface="Calibri"/>
+              </a:defRPr>
+            </a:pPr>
+            <a:r>
+              <a:t>What Just Happened</a:t>
+            </a:r>
+          </a:p>
+          <a:p>
+            <a:pPr algn="l">
+              <a:defRPr sz="2000" b="0">
+                <a:solidFill>
+                  <a:srgbClr val="FFFFFF"/>
+                </a:solidFill>
+                <a:latin typeface="Calibri"/>
+              </a:defRPr>
+            </a:pPr>
+            <a:r>
+              <a:t>✅ Full market research report with cited sources</a:t>
+            </a:r>
+          </a:p>
+          <a:p>
+            <a:pPr algn="l">
+              <a:defRPr sz="2000" b="0">
+                <a:solidFill>
+                  <a:srgbClr val="FFFFFF"/>
+                </a:solidFill>
+                <a:latin typeface="Calibri"/>
+              </a:defRPr>
+            </a:pPr>
+            <a:r>
+              <a:t>✅ Real data — clickable links you can verify</a:t>
+            </a:r>
+          </a:p>
+          <a:p>
+            <a:pPr algn="l">
+              <a:defRPr sz="2000" b="0">
+                <a:solidFill>
+                  <a:srgbClr val="FFFFFF"/>
+                </a:solidFill>
+                <a:latin typeface="Calibri"/>
+              </a:defRPr>
+            </a:pPr>
+            <a:r>
+              <a:t>✅ SWOT analysis for a specific new entrant</a:t>
+            </a:r>
+          </a:p>
+          <a:p>
+            <a:pPr algn="l">
+              <a:defRPr sz="2000" b="0">
+                <a:solidFill>
+                  <a:srgbClr val="FFFFFF"/>
+                </a:solidFill>
+                <a:latin typeface="Calibri"/>
+              </a:defRPr>
+            </a:pPr>
+            <a:r>
+              <a:t>✅ TAM/SAM/SOM with explicit assumptions</a:t>
+            </a:r>
+          </a:p>
+          <a:p>
+            <a:pPr algn="l">
+              <a:defRPr sz="1200" b="0">
+                <a:solidFill>
+                  <a:srgbClr val="FFFFFF"/>
+                </a:solidFill>
+                <a:latin typeface="Calibri"/>
+              </a:defRPr>
+            </a:pPr>
+          </a:p>
+          <a:p>
+            <a:pPr algn="l">
+              <a:defRPr sz="2200" b="1">
+                <a:solidFill>
+                  <a:srgbClr val="00D4F5"/>
+                </a:solidFill>
+                <a:latin typeface="Calibri"/>
+              </a:defRPr>
+            </a:pPr>
+            <a:r>
+              <a:t>⏱ Time: ~90 seconds  vs  weeks for a research team (£5-10K+)</a:t>
+            </a:r>
+          </a:p>
+          <a:p>
+            <a:pPr algn="l">
+              <a:defRPr sz="1200" b="0">
+                <a:solidFill>
+                  <a:srgbClr val="FFFFFF"/>
+                </a:solidFill>
+                <a:latin typeface="Calibri"/>
+              </a:defRPr>
+            </a:pPr>
+          </a:p>
+          <a:p>
+            <a:pPr algn="l">
+              <a:defRPr sz="2200" b="1">
+                <a:solidFill>
+                  <a:srgbClr val="FF6B35"/>
+                </a:solidFill>
+                <a:latin typeface="Calibri"/>
+              </a:defRPr>
+            </a:pPr>
+            <a:r>
+              <a:t>💡 The Game-Changer: AI + Web Search = Cited Research</a:t>
+            </a:r>
+          </a:p>
+          <a:p>
+            <a:pPr algn="l">
               <a:defRPr sz="1800" b="0">
                 <a:solidFill>
-                  <a:srgbClr val="BBBBCC"/>
-                </a:solidFill>
-                <a:latin typeface="Calibri"/>
-              </a:defRPr>
-            </a:pPr>
-            <a:r>
-              <a:t>🔍  What to notice in the output</a:t>
-            </a:r>
-          </a:p>
-        </p:txBody>
-      </p:sp>
-      <p:sp>
-        <p:nvSpPr>
-          <p:cNvPr id="5" name="TextBox 4"/>
-          <p:cNvSpPr txBox="1"/>
-          <p:nvPr/>
-        </p:nvSpPr>
-        <p:spPr>
-          <a:xfrm>
-            <a:off x="1005840" y="1828800"/>
-            <a:ext cx="10058400" cy="4572000"/>
-          </a:xfrm>
-          <a:prstGeom prst="rect">
-            <a:avLst/>
-          </a:prstGeom>
-          <a:noFill/>
-        </p:spPr>
-        <p:txBody>
-          <a:bodyPr wrap="square">
-            <a:spAutoFit/>
-          </a:bodyPr>
-          <a:lstStyle/>
-          <a:p>
-            <a:pPr>
-              <a:defRPr sz="2200" b="1">
-                <a:solidFill>
-                  <a:srgbClr val="FFFFFF"/>
-                </a:solidFill>
-                <a:latin typeface="Calibri"/>
-              </a:defRPr>
-            </a:pPr>
-            <a:r>
-              <a:t>▸ Sources make it real</a:t>
-            </a:r>
-          </a:p>
-          <a:p>
-            <a:pPr>
-              <a:spcBef>
-                <a:spcPts val="200"/>
-              </a:spcBef>
-              <a:defRPr sz="1800">
-                <a:solidFill>
-                  <a:srgbClr val="BBBBCC"/>
-                </a:solidFill>
-                <a:latin typeface="Calibri"/>
-              </a:defRPr>
-            </a:pPr>
-            <a:r>
-              <a:t>    Every stat links to a verifiable article or report</a:t>
-            </a:r>
-          </a:p>
-          <a:p>
-            <a:pPr>
-              <a:spcBef>
-                <a:spcPts val="1000"/>
-              </a:spcBef>
-              <a:defRPr sz="2200" b="1">
-                <a:solidFill>
-                  <a:srgbClr val="FFFFFF"/>
-                </a:solidFill>
-                <a:latin typeface="Calibri"/>
-              </a:defRPr>
-            </a:pPr>
-            <a:r>
-              <a:t>▸ Start broad, drill deep</a:t>
-            </a:r>
-          </a:p>
-          <a:p>
-            <a:pPr>
-              <a:spcBef>
-                <a:spcPts val="200"/>
-              </a:spcBef>
-              <a:defRPr sz="1800">
-                <a:solidFill>
-                  <a:srgbClr val="BBBBCC"/>
-                </a:solidFill>
-                <a:latin typeface="Calibri"/>
-              </a:defRPr>
-            </a:pPr>
-            <a:r>
-              <a:t>    Market overview → SWOT → competitive threat → TAM/SAM/SOM</a:t>
-            </a:r>
-          </a:p>
-          <a:p>
-            <a:pPr>
-              <a:spcBef>
-                <a:spcPts val="1000"/>
-              </a:spcBef>
-              <a:defRPr sz="2200" b="1">
-                <a:solidFill>
-                  <a:srgbClr val="FFFFFF"/>
-                </a:solidFill>
-                <a:latin typeface="Calibri"/>
-              </a:defRPr>
-            </a:pPr>
-            <a:r>
-              <a:t>▸ Not a McKinsey report</a:t>
-            </a:r>
-          </a:p>
-          <a:p>
-            <a:pPr>
-              <a:spcBef>
-                <a:spcPts val="200"/>
-              </a:spcBef>
-              <a:defRPr sz="1800">
-                <a:solidFill>
-                  <a:srgbClr val="BBBBCC"/>
-                </a:solidFill>
-                <a:latin typeface="Calibri"/>
-              </a:defRPr>
-            </a:pPr>
-            <a:r>
-              <a:t>    But 70-80% of the way there in 90 seconds</a:t>
-            </a:r>
-          </a:p>
-          <a:p>
-            <a:pPr>
-              <a:spcBef>
-                <a:spcPts val="1000"/>
-              </a:spcBef>
-              <a:defRPr sz="2200" b="1">
-                <a:solidFill>
-                  <a:srgbClr val="FFFFFF"/>
-                </a:solidFill>
-                <a:latin typeface="Calibri"/>
-              </a:defRPr>
-            </a:pPr>
-            <a:r>
-              <a:t>▸ Verify before you present</a:t>
-            </a:r>
-          </a:p>
-          <a:p>
-            <a:pPr>
-              <a:spcBef>
-                <a:spcPts val="200"/>
-              </a:spcBef>
-              <a:defRPr sz="1800">
-                <a:solidFill>
-                  <a:srgbClr val="BBBBCC"/>
-                </a:solidFill>
-                <a:latin typeface="Calibri"/>
-              </a:defRPr>
-            </a:pPr>
-            <a:r>
-              <a:t>    Click the citations — trust but verify</a:t>
+                  <a:srgbClr val="CCCCCC"/>
+                </a:solidFill>
+                <a:latin typeface="Calibri"/>
+              </a:defRPr>
+            </a:pPr>
+            <a:r>
+              <a:t>• Not hallucinated — every claim has a clickable source</a:t>
+            </a:r>
+          </a:p>
+          <a:p>
+            <a:pPr algn="l">
+              <a:defRPr sz="1800" b="0">
+                <a:solidFill>
+                  <a:srgbClr val="CCCCCC"/>
+                </a:solidFill>
+                <a:latin typeface="Calibri"/>
+              </a:defRPr>
+            </a:pPr>
+            <a:r>
+              <a:t>• Start broad, then drill down with follow-up prompts</a:t>
+            </a:r>
+          </a:p>
+          <a:p>
+            <a:pPr algn="l">
+              <a:defRPr sz="1800" b="0">
+                <a:solidFill>
+                  <a:srgbClr val="CCCCCC"/>
+                </a:solidFill>
+                <a:latin typeface="Calibri"/>
+              </a:defRPr>
+            </a:pPr>
+            <a:r>
+              <a:t>• Gets you 70-80% of a McKinsey report in 90 seconds</a:t>
+            </a:r>
+          </a:p>
+          <a:p>
+            <a:pPr algn="l">
+              <a:defRPr sz="1800" b="0">
+                <a:solidFill>
+                  <a:srgbClr val="CCCCCC"/>
+                </a:solidFill>
+                <a:latin typeface="Calibri"/>
+              </a:defRPr>
+            </a:pPr>
+            <a:r>
+              <a:t>• Your expertise fills the last 20%</a:t>
             </a:r>
           </a:p>
         </p:txBody>
@@ -4744,14 +4989,14 @@
         </p:nvSpPr>
         <p:spPr>
           <a:xfrm>
-            <a:off x="731520" y="548640"/>
-            <a:ext cx="73152" cy="548640"/>
+            <a:off x="0" y="0"/>
+            <a:ext cx="12191695" cy="73152"/>
           </a:xfrm>
           <a:prstGeom prst="rect">
             <a:avLst/>
           </a:prstGeom>
           <a:solidFill>
-            <a:srgbClr val="FF6B35"/>
+            <a:srgbClr val="00D4F5"/>
           </a:solidFill>
           <a:ln>
             <a:noFill/>
@@ -4787,8 +5032,8 @@
         </p:nvSpPr>
         <p:spPr>
           <a:xfrm>
-            <a:off x="1005840" y="457200"/>
-            <a:ext cx="9144000" cy="822960"/>
+            <a:off x="548640" y="274320"/>
+            <a:ext cx="10972800" cy="640080"/>
           </a:xfrm>
           <a:prstGeom prst="rect">
             <a:avLst/>
@@ -4802,6 +5047,9 @@
           <a:lstStyle/>
           <a:p>
             <a:pPr algn="l">
+              <a:spcAft>
+                <a:spcPts val="400"/>
+              </a:spcAft>
               <a:defRPr sz="3600" b="1">
                 <a:solidFill>
                   <a:srgbClr val="FFFFFF"/>
@@ -4810,7 +5058,7 @@
               </a:defRPr>
             </a:pPr>
             <a:r>
-              <a:t>Use Case 5: Investor Pitch Deck</a:t>
+              <a:t>🚀 Use Case 5: Investor Pitch Deck</a:t>
             </a:r>
           </a:p>
         </p:txBody>
@@ -4823,8 +5071,8 @@
         </p:nvSpPr>
         <p:spPr>
           <a:xfrm>
-            <a:off x="1005840" y="1280160"/>
-            <a:ext cx="9144000" cy="457200"/>
+            <a:off x="548640" y="914400"/>
+            <a:ext cx="10972800" cy="457200"/>
           </a:xfrm>
           <a:prstGeom prst="rect">
             <a:avLst/>
@@ -4838,29 +5086,75 @@
           <a:lstStyle/>
           <a:p>
             <a:pPr algn="l">
+              <a:spcAft>
+                <a:spcPts val="400"/>
+              </a:spcAft>
               <a:defRPr sz="1800" b="0">
                 <a:solidFill>
-                  <a:srgbClr val="BBBBCC"/>
-                </a:solidFill>
-                <a:latin typeface="Calibri"/>
-              </a:defRPr>
-            </a:pPr>
-            <a:r>
-              <a:t>🚀  From a napkin idea to a designed pitch deck</a:t>
-            </a:r>
-          </a:p>
-        </p:txBody>
-      </p:sp>
-      <p:sp>
-        <p:nvSpPr>
-          <p:cNvPr id="5" name="TextBox 4"/>
+                  <a:srgbClr val="CCCCCC"/>
+                </a:solidFill>
+                <a:latin typeface="Calibri"/>
+              </a:defRPr>
+            </a:pPr>
+            <a:r>
+              <a:t>One paragraph → 12-slide pitch deck — uses Claude artifacts</a:t>
+            </a:r>
+          </a:p>
+        </p:txBody>
+      </p:sp>
+      <p:sp>
+        <p:nvSpPr>
+          <p:cNvPr id="5" name="Rectangle 4"/>
+          <p:cNvSpPr/>
+          <p:nvPr/>
+        </p:nvSpPr>
+        <p:spPr>
+          <a:xfrm>
+            <a:off x="365760" y="1463040"/>
+            <a:ext cx="11430000" cy="2011680"/>
+          </a:xfrm>
+          <a:prstGeom prst="rect">
+            <a:avLst/>
+          </a:prstGeom>
+          <a:solidFill>
+            <a:srgbClr val="222638"/>
+          </a:solidFill>
+          <a:ln>
+            <a:noFill/>
+          </a:ln>
+        </p:spPr>
+        <p:style>
+          <a:lnRef idx="1">
+            <a:schemeClr val="accent1"/>
+          </a:lnRef>
+          <a:fillRef idx="3">
+            <a:schemeClr val="accent1"/>
+          </a:fillRef>
+          <a:effectRef idx="2">
+            <a:schemeClr val="accent1"/>
+          </a:effectRef>
+          <a:fontRef idx="minor">
+            <a:schemeClr val="lt1"/>
+          </a:fontRef>
+        </p:style>
+        <p:txBody>
+          <a:bodyPr rtlCol="0" anchor="ctr"/>
+          <a:lstStyle/>
+          <a:p>
+            <a:pPr algn="ctr"/>
+          </a:p>
+        </p:txBody>
+      </p:sp>
+      <p:sp>
+        <p:nvSpPr>
+          <p:cNvPr id="6" name="TextBox 5"/>
           <p:cNvSpPr txBox="1"/>
           <p:nvPr/>
         </p:nvSpPr>
         <p:spPr>
           <a:xfrm>
-            <a:off x="1005840" y="1828800"/>
-            <a:ext cx="10058400" cy="4572000"/>
+            <a:off x="548640" y="1554480"/>
+            <a:ext cx="10972800" cy="1828800"/>
           </a:xfrm>
           <a:prstGeom prst="rect">
             <a:avLst/>
@@ -4873,64 +5167,241 @@
           </a:bodyPr>
           <a:lstStyle/>
           <a:p>
-            <a:pPr>
-              <a:defRPr sz="2200" b="0">
-                <a:solidFill>
-                  <a:srgbClr val="FFFFFF"/>
-                </a:solidFill>
-                <a:latin typeface="Calibri"/>
-              </a:defRPr>
-            </a:pPr>
-            <a:r>
-              <a:t>▸ Startup: Aether — smart city air quality monitoring (the brand we just created!)</a:t>
-            </a:r>
-          </a:p>
-          <a:p>
-            <a:pPr>
-              <a:spcBef>
-                <a:spcPts val="1000"/>
-              </a:spcBef>
-              <a:defRPr sz="2200" b="0">
-                <a:solidFill>
-                  <a:srgbClr val="FFFFFF"/>
-                </a:solidFill>
-                <a:latin typeface="Calibri"/>
-              </a:defRPr>
-            </a:pPr>
-            <a:r>
-              <a:t>▸ Round: Seed, raising £4M</a:t>
-            </a:r>
-          </a:p>
-          <a:p>
-            <a:pPr>
-              <a:spcBef>
-                <a:spcPts val="1000"/>
-              </a:spcBef>
-              <a:defRPr sz="2200" b="0">
-                <a:solidFill>
-                  <a:srgbClr val="FFFFFF"/>
-                </a:solidFill>
-                <a:latin typeface="Calibri"/>
-              </a:defRPr>
-            </a:pPr>
-            <a:r>
-              <a:t>▸ Goal: 12-slide pitch deck — then design it with Gamma.app</a:t>
-            </a:r>
-          </a:p>
-          <a:p>
-            <a:pPr>
-              <a:spcBef>
-                <a:spcPts val="1000"/>
-              </a:spcBef>
-              <a:defRPr sz="2200" b="0">
-                <a:solidFill>
-                  <a:srgbClr val="FFFFFF"/>
-                </a:solidFill>
-                <a:latin typeface="Calibri"/>
-              </a:defRPr>
-            </a:pPr>
-            <a:r>
-              <a:t>▸ Two AI tools working together: Claude for content, Gamma for design</a:t>
+            <a:pPr algn="l">
+              <a:spcAft>
+                <a:spcPts val="400"/>
+              </a:spcAft>
+              <a:defRPr sz="2400" b="1">
+                <a:solidFill>
+                  <a:srgbClr val="FF6B35"/>
+                </a:solidFill>
+                <a:latin typeface="Calibri"/>
+              </a:defRPr>
+            </a:pPr>
+            <a:r>
+              <a:t>The Scenario</a:t>
+            </a:r>
+          </a:p>
+          <a:p>
+            <a:pPr algn="l">
+              <a:defRPr sz="1800" b="0">
+                <a:solidFill>
+                  <a:srgbClr val="FFFFFF"/>
+                </a:solidFill>
+                <a:latin typeface="Calibri"/>
+              </a:defRPr>
+            </a:pPr>
+            <a:r>
+              <a:t>• "Aether" — B2B SaaS, IoT + AI air quality monitoring for smart cities</a:t>
+            </a:r>
+          </a:p>
+          <a:p>
+            <a:pPr algn="l">
+              <a:defRPr sz="1800" b="0">
+                <a:solidFill>
+                  <a:srgbClr val="FFFFFF"/>
+                </a:solidFill>
+                <a:latin typeface="Calibri"/>
+              </a:defRPr>
+            </a:pPr>
+            <a:r>
+              <a:t>• Seed round: raising £4M</a:t>
+            </a:r>
+          </a:p>
+          <a:p>
+            <a:pPr algn="l">
+              <a:defRPr sz="1800" b="0">
+                <a:solidFill>
+                  <a:srgbClr val="FFFFFF"/>
+                </a:solidFill>
+                <a:latin typeface="Calibri"/>
+              </a:defRPr>
+            </a:pPr>
+            <a:r>
+              <a:t>• 3 pilot cities, £1.2M pre-seed, team of 4 (ex-Dyson, DeepMind, Capita, Octopus)</a:t>
+            </a:r>
+          </a:p>
+          <a:p>
+            <a:pPr algn="l">
+              <a:defRPr sz="1800" b="0">
+                <a:solidFill>
+                  <a:srgbClr val="FFFFFF"/>
+                </a:solidFill>
+                <a:latin typeface="Calibri"/>
+              </a:defRPr>
+            </a:pPr>
+            <a:r>
+              <a:t>• Need: 12-slide deck with content, visuals, speaker notes</a:t>
+            </a:r>
+          </a:p>
+        </p:txBody>
+      </p:sp>
+      <p:sp>
+        <p:nvSpPr>
+          <p:cNvPr id="7" name="Rectangle 6"/>
+          <p:cNvSpPr/>
+          <p:nvPr/>
+        </p:nvSpPr>
+        <p:spPr>
+          <a:xfrm>
+            <a:off x="365760" y="3749039"/>
+            <a:ext cx="11430000" cy="2834640"/>
+          </a:xfrm>
+          <a:prstGeom prst="rect">
+            <a:avLst/>
+          </a:prstGeom>
+          <a:solidFill>
+            <a:srgbClr val="2A2E42"/>
+          </a:solidFill>
+          <a:ln>
+            <a:noFill/>
+          </a:ln>
+        </p:spPr>
+        <p:style>
+          <a:lnRef idx="1">
+            <a:schemeClr val="accent1"/>
+          </a:lnRef>
+          <a:fillRef idx="3">
+            <a:schemeClr val="accent1"/>
+          </a:fillRef>
+          <a:effectRef idx="2">
+            <a:schemeClr val="accent1"/>
+          </a:effectRef>
+          <a:fontRef idx="minor">
+            <a:schemeClr val="lt1"/>
+          </a:fontRef>
+        </p:style>
+        <p:txBody>
+          <a:bodyPr rtlCol="0" anchor="ctr"/>
+          <a:lstStyle/>
+          <a:p>
+            <a:pPr algn="ctr"/>
+          </a:p>
+        </p:txBody>
+      </p:sp>
+      <p:sp>
+        <p:nvSpPr>
+          <p:cNvPr id="8" name="TextBox 7"/>
+          <p:cNvSpPr txBox="1"/>
+          <p:nvPr/>
+        </p:nvSpPr>
+        <p:spPr>
+          <a:xfrm>
+            <a:off x="548640" y="3840480"/>
+            <a:ext cx="10972800" cy="2651760"/>
+          </a:xfrm>
+          <a:prstGeom prst="rect">
+            <a:avLst/>
+          </a:prstGeom>
+          <a:noFill/>
+        </p:spPr>
+        <p:txBody>
+          <a:bodyPr wrap="square">
+            <a:spAutoFit/>
+          </a:bodyPr>
+          <a:lstStyle/>
+          <a:p>
+            <a:pPr algn="l">
+              <a:spcAft>
+                <a:spcPts val="400"/>
+              </a:spcAft>
+              <a:defRPr sz="2200" b="1">
+                <a:solidFill>
+                  <a:srgbClr val="00D4F5"/>
+                </a:solidFill>
+                <a:latin typeface="Calibri"/>
+              </a:defRPr>
+            </a:pPr>
+            <a:r>
+              <a:t>Slide Structure</a:t>
+            </a:r>
+          </a:p>
+          <a:p>
+            <a:pPr algn="l">
+              <a:defRPr sz="1600" b="0">
+                <a:solidFill>
+                  <a:srgbClr val="FFFFFF"/>
+                </a:solidFill>
+                <a:latin typeface="Calibri"/>
+              </a:defRPr>
+            </a:pPr>
+            <a:r>
+              <a:t>1. Title  |  2. Problem  |  3. Solution  |  4. How It Works</a:t>
+            </a:r>
+          </a:p>
+          <a:p>
+            <a:pPr algn="l">
+              <a:defRPr sz="1600" b="0">
+                <a:solidFill>
+                  <a:srgbClr val="FFFFFF"/>
+                </a:solidFill>
+                <a:latin typeface="Calibri"/>
+              </a:defRPr>
+            </a:pPr>
+            <a:r>
+              <a:t>5. Market Opportunity  |  6. Traction  |  7. Business Model</a:t>
+            </a:r>
+          </a:p>
+          <a:p>
+            <a:pPr algn="l">
+              <a:defRPr sz="1600" b="0">
+                <a:solidFill>
+                  <a:srgbClr val="FFFFFF"/>
+                </a:solidFill>
+                <a:latin typeface="Calibri"/>
+              </a:defRPr>
+            </a:pPr>
+            <a:r>
+              <a:t>8. Competitive Landscape  |  9. Team  |  10. Go-to-Market</a:t>
+            </a:r>
+          </a:p>
+          <a:p>
+            <a:pPr algn="l">
+              <a:defRPr sz="1600" b="0">
+                <a:solidFill>
+                  <a:srgbClr val="FFFFFF"/>
+                </a:solidFill>
+                <a:latin typeface="Calibri"/>
+              </a:defRPr>
+            </a:pPr>
+            <a:r>
+              <a:t>11. Financial Projections  |  12. The Ask (£4M)</a:t>
+            </a:r>
+          </a:p>
+          <a:p>
+            <a:pPr algn="l">
+              <a:defRPr sz="800" b="0">
+                <a:solidFill>
+                  <a:srgbClr val="FFFFFF"/>
+                </a:solidFill>
+                <a:latin typeface="Calibri"/>
+              </a:defRPr>
+            </a:pPr>
+          </a:p>
+          <a:p>
+            <a:pPr algn="l">
+              <a:defRPr sz="1600" b="1">
+                <a:solidFill>
+                  <a:srgbClr val="00D4F5"/>
+                </a:solidFill>
+                <a:latin typeface="Calibri"/>
+              </a:defRPr>
+            </a:pPr>
+            <a:r>
+              <a:t>Tool: Claude artifacts — creates styled, presentable slides directly</a:t>
+            </a:r>
+          </a:p>
+          <a:p>
+            <a:pPr algn="l">
+              <a:defRPr sz="1600" b="0">
+                <a:solidFill>
+                  <a:srgbClr val="CCCCCC"/>
+                </a:solidFill>
+                <a:latin typeface="Calibri"/>
+              </a:defRPr>
+            </a:pPr>
+            <a:r>
+              <a:t>No copy-pasting into another app — present right from Claude!</a:t>
             </a:r>
           </a:p>
         </p:txBody>
@@ -4963,63 +5434,24 @@
       <p:grpSpPr/>
       <p:sp>
         <p:nvSpPr>
-          <p:cNvPr id="2" name="TextBox 1"/>
-          <p:cNvSpPr txBox="1"/>
-          <p:nvPr/>
-        </p:nvSpPr>
-        <p:spPr>
-          <a:xfrm>
-            <a:off x="731520" y="274320"/>
-            <a:ext cx="4572000" cy="548640"/>
-          </a:xfrm>
-          <a:prstGeom prst="rect">
-            <a:avLst/>
-          </a:prstGeom>
-          <a:noFill/>
-        </p:spPr>
-        <p:txBody>
-          <a:bodyPr wrap="square">
-            <a:spAutoFit/>
-          </a:bodyPr>
-          <a:lstStyle/>
-          <a:p>
-            <a:pPr algn="l">
-              <a:defRPr sz="2400" b="1">
-                <a:solidFill>
-                  <a:srgbClr val="00D4F5"/>
-                </a:solidFill>
-                <a:latin typeface="Calibri"/>
-              </a:defRPr>
-            </a:pPr>
-            <a:r>
-              <a:t>Use Case 5 — The Prompt</a:t>
-            </a:r>
-          </a:p>
-        </p:txBody>
-      </p:sp>
-      <p:sp>
-        <p:nvSpPr>
-          <p:cNvPr id="3" name="Rounded Rectangle 2"/>
+          <p:cNvPr id="2" name="Rectangle 1"/>
           <p:cNvSpPr/>
           <p:nvPr/>
         </p:nvSpPr>
         <p:spPr>
           <a:xfrm>
-            <a:off x="457200" y="914400"/>
-            <a:ext cx="11247120" cy="5303520"/>
-          </a:xfrm>
-          <a:prstGeom prst="roundRect">
+            <a:off x="0" y="0"/>
+            <a:ext cx="12191695" cy="73152"/>
+          </a:xfrm>
+          <a:prstGeom prst="rect">
             <a:avLst/>
           </a:prstGeom>
           <a:solidFill>
-            <a:srgbClr val="2A2E3E"/>
+            <a:srgbClr val="00D4F5"/>
           </a:solidFill>
-          <a:ln w="12700">
-            <a:solidFill>
-              <a:srgbClr val="3A3E4E"/>
-            </a:solidFill>
+          <a:ln>
+            <a:noFill/>
           </a:ln>
-          <a:effectLst/>
         </p:spPr>
         <p:style>
           <a:lnRef idx="1">
@@ -5045,14 +5477,14 @@
       </p:sp>
       <p:sp>
         <p:nvSpPr>
-          <p:cNvPr id="4" name="TextBox 3"/>
+          <p:cNvPr id="3" name="TextBox 2"/>
           <p:cNvSpPr txBox="1"/>
           <p:nvPr/>
         </p:nvSpPr>
         <p:spPr>
           <a:xfrm>
-            <a:off x="731520" y="1097280"/>
-            <a:ext cx="10698480" cy="4937760"/>
+            <a:off x="548640" y="274320"/>
+            <a:ext cx="10972800" cy="640080"/>
           </a:xfrm>
           <a:prstGeom prst="rect">
             <a:avLst/>
@@ -5065,295 +5497,161 @@
           </a:bodyPr>
           <a:lstStyle/>
           <a:p>
-            <a:pPr>
-              <a:defRPr sz="1100">
-                <a:solidFill>
-                  <a:srgbClr val="E0E8F0"/>
+            <a:pPr algn="l">
+              <a:spcAft>
+                <a:spcPts val="400"/>
+              </a:spcAft>
+              <a:defRPr sz="3200" b="1">
+                <a:solidFill>
+                  <a:srgbClr val="FFFFFF"/>
+                </a:solidFill>
+                <a:latin typeface="Calibri"/>
+              </a:defRPr>
+            </a:pPr>
+            <a:r>
+              <a:t>🚀 UC5: The Prompt</a:t>
+            </a:r>
+          </a:p>
+        </p:txBody>
+      </p:sp>
+      <p:sp>
+        <p:nvSpPr>
+          <p:cNvPr id="4" name="Rectangle 3"/>
+          <p:cNvSpPr/>
+          <p:nvPr/>
+        </p:nvSpPr>
+        <p:spPr>
+          <a:xfrm>
+            <a:off x="365760" y="1097280"/>
+            <a:ext cx="11430000" cy="5303520"/>
+          </a:xfrm>
+          <a:prstGeom prst="rect">
+            <a:avLst/>
+          </a:prstGeom>
+          <a:solidFill>
+            <a:srgbClr val="121422"/>
+          </a:solidFill>
+          <a:ln>
+            <a:noFill/>
+          </a:ln>
+        </p:spPr>
+        <p:style>
+          <a:lnRef idx="1">
+            <a:schemeClr val="accent1"/>
+          </a:lnRef>
+          <a:fillRef idx="3">
+            <a:schemeClr val="accent1"/>
+          </a:fillRef>
+          <a:effectRef idx="2">
+            <a:schemeClr val="accent1"/>
+          </a:effectRef>
+          <a:fontRef idx="minor">
+            <a:schemeClr val="lt1"/>
+          </a:fontRef>
+        </p:style>
+        <p:txBody>
+          <a:bodyPr rtlCol="0" anchor="ctr"/>
+          <a:lstStyle/>
+          <a:p>
+            <a:pPr algn="ctr"/>
+          </a:p>
+        </p:txBody>
+      </p:sp>
+      <p:sp>
+        <p:nvSpPr>
+          <p:cNvPr id="5" name="TextBox 4"/>
+          <p:cNvSpPr txBox="1"/>
+          <p:nvPr/>
+        </p:nvSpPr>
+        <p:spPr>
+          <a:xfrm>
+            <a:off x="548640" y="1280160"/>
+            <a:ext cx="10972800" cy="4937760"/>
+          </a:xfrm>
+          <a:prstGeom prst="rect">
+            <a:avLst/>
+          </a:prstGeom>
+          <a:noFill/>
+        </p:spPr>
+        <p:txBody>
+          <a:bodyPr wrap="square">
+            <a:spAutoFit/>
+          </a:bodyPr>
+          <a:lstStyle/>
+          <a:p>
+            <a:pPr algn="l">
+              <a:spcAft>
+                <a:spcPts val="400"/>
+              </a:spcAft>
+              <a:defRPr sz="1400" b="0">
+                <a:solidFill>
+                  <a:srgbClr val="00D4F5"/>
                 </a:solidFill>
                 <a:latin typeface="Consolas"/>
               </a:defRPr>
             </a:pPr>
             <a:r>
-              <a:t>Create a 12-slide investor pitch deck for Aether (Seed round, raising £4M):</a:t>
-            </a:r>
-          </a:p>
-          <a:p>
-            <a:pPr>
-              <a:spcBef>
-                <a:spcPts val="200"/>
-              </a:spcBef>
-              <a:defRPr sz="1100">
-                <a:solidFill>
-                  <a:srgbClr val="E0E8F0"/>
-                </a:solidFill>
-                <a:latin typeface="Consolas"/>
-              </a:defRPr>
-            </a:pPr>
-          </a:p>
-          <a:p>
-            <a:pPr>
-              <a:spcBef>
-                <a:spcPts val="200"/>
-              </a:spcBef>
-              <a:defRPr sz="1100">
-                <a:solidFill>
-                  <a:srgbClr val="E0E8F0"/>
-                </a:solidFill>
-                <a:latin typeface="Consolas"/>
-              </a:defRPr>
-            </a:pPr>
-            <a:r>
-              <a:t>Aether: B2B SaaS — IoT sensors + AI analytics for real-time hyperlocal air quality monitoring. 3 pilot cities, £1.2M pre-seed, team of 4 (ex-Dyson, ex-DeepMind, ex-Capita, ex-Octopus Energy).</a:t>
-            </a:r>
-          </a:p>
-          <a:p>
-            <a:pPr>
-              <a:spcBef>
-                <a:spcPts val="200"/>
-              </a:spcBef>
-              <a:defRPr sz="1100">
-                <a:solidFill>
-                  <a:srgbClr val="E0E8F0"/>
-                </a:solidFill>
-                <a:latin typeface="Consolas"/>
-              </a:defRPr>
-            </a:pPr>
-          </a:p>
-          <a:p>
-            <a:pPr>
-              <a:spcBef>
-                <a:spcPts val="200"/>
-              </a:spcBef>
-              <a:defRPr sz="1100">
-                <a:solidFill>
-                  <a:srgbClr val="E0E8F0"/>
-                </a:solidFill>
-                <a:latin typeface="Consolas"/>
-              </a:defRPr>
-            </a:pPr>
-            <a:r>
-              <a:t>Slides:</a:t>
-            </a:r>
-          </a:p>
-          <a:p>
-            <a:pPr>
-              <a:spcBef>
-                <a:spcPts val="200"/>
-              </a:spcBef>
-              <a:defRPr sz="1100">
-                <a:solidFill>
-                  <a:srgbClr val="E0E8F0"/>
-                </a:solidFill>
-                <a:latin typeface="Consolas"/>
-              </a:defRPr>
-            </a:pPr>
-            <a:r>
-              <a:t>1. Title — name, tagline, one-liner</a:t>
-            </a:r>
-          </a:p>
-          <a:p>
-            <a:pPr>
-              <a:spcBef>
-                <a:spcPts val="200"/>
-              </a:spcBef>
-              <a:defRPr sz="1100">
-                <a:solidFill>
-                  <a:srgbClr val="E0E8F0"/>
-                </a:solidFill>
-                <a:latin typeface="Consolas"/>
-              </a:defRPr>
-            </a:pPr>
-            <a:r>
-              <a:t>2. The Problem — 36K deaths/year in UK. Emotional + urgent.</a:t>
-            </a:r>
-          </a:p>
-          <a:p>
-            <a:pPr>
-              <a:spcBef>
-                <a:spcPts val="200"/>
-              </a:spcBef>
-              <a:defRPr sz="1100">
-                <a:solidFill>
-                  <a:srgbClr val="E0E8F0"/>
-                </a:solidFill>
-                <a:latin typeface="Consolas"/>
-              </a:defRPr>
-            </a:pPr>
-            <a:r>
-              <a:t>3. The Solution — What Aether does, simply.</a:t>
-            </a:r>
-          </a:p>
-          <a:p>
-            <a:pPr>
-              <a:spcBef>
-                <a:spcPts val="200"/>
-              </a:spcBef>
-              <a:defRPr sz="1100">
-                <a:solidFill>
-                  <a:srgbClr val="E0E8F0"/>
-                </a:solidFill>
-                <a:latin typeface="Consolas"/>
-              </a:defRPr>
-            </a:pPr>
-            <a:r>
-              <a:t>4. How It Works — 3 simple steps.</a:t>
-            </a:r>
-          </a:p>
-          <a:p>
-            <a:pPr>
-              <a:spcBef>
-                <a:spcPts val="200"/>
-              </a:spcBef>
-              <a:defRPr sz="1100">
-                <a:solidFill>
-                  <a:srgbClr val="E0E8F0"/>
-                </a:solidFill>
-                <a:latin typeface="Consolas"/>
-              </a:defRPr>
-            </a:pPr>
-            <a:r>
-              <a:t>5. Market Opportunity — size, growth, why now.</a:t>
-            </a:r>
-          </a:p>
-          <a:p>
-            <a:pPr>
-              <a:spcBef>
-                <a:spcPts val="200"/>
-              </a:spcBef>
-              <a:defRPr sz="1100">
-                <a:solidFill>
-                  <a:srgbClr val="E0E8F0"/>
-                </a:solidFill>
-                <a:latin typeface="Consolas"/>
-              </a:defRPr>
-            </a:pPr>
-            <a:r>
-              <a:t>6. Traction — 3 pilots, key metrics, testimonials.</a:t>
-            </a:r>
-          </a:p>
-          <a:p>
-            <a:pPr>
-              <a:spcBef>
-                <a:spcPts val="200"/>
-              </a:spcBef>
-              <a:defRPr sz="1100">
-                <a:solidFill>
-                  <a:srgbClr val="E0E8F0"/>
-                </a:solidFill>
-                <a:latin typeface="Consolas"/>
-              </a:defRPr>
-            </a:pPr>
-            <a:r>
-              <a:t>7. Business Model — pricing tiers.</a:t>
-            </a:r>
-          </a:p>
-          <a:p>
-            <a:pPr>
-              <a:spcBef>
-                <a:spcPts val="200"/>
-              </a:spcBef>
-              <a:defRPr sz="1100">
-                <a:solidFill>
-                  <a:srgbClr val="E0E8F0"/>
-                </a:solidFill>
-                <a:latin typeface="Consolas"/>
-              </a:defRPr>
-            </a:pPr>
-            <a:r>
-              <a:t>8. Competitive Landscape — 2x2 matrix.</a:t>
-            </a:r>
-          </a:p>
-          <a:p>
-            <a:pPr>
-              <a:spcBef>
-                <a:spcPts val="200"/>
-              </a:spcBef>
-              <a:defRPr sz="1100">
-                <a:solidFill>
-                  <a:srgbClr val="E0E8F0"/>
-                </a:solidFill>
-                <a:latin typeface="Consolas"/>
-              </a:defRPr>
-            </a:pPr>
-            <a:r>
-              <a:t>9. The Team — founders + credentials.</a:t>
-            </a:r>
-          </a:p>
-          <a:p>
-            <a:pPr>
-              <a:spcBef>
-                <a:spcPts val="200"/>
-              </a:spcBef>
-              <a:defRPr sz="1100">
-                <a:solidFill>
-                  <a:srgbClr val="E0E8F0"/>
-                </a:solidFill>
-                <a:latin typeface="Consolas"/>
-              </a:defRPr>
-            </a:pPr>
-            <a:r>
-              <a:t>10. Go-to-Market — 12-month plan.</a:t>
-            </a:r>
-          </a:p>
-          <a:p>
-            <a:pPr>
-              <a:spcBef>
-                <a:spcPts val="200"/>
-              </a:spcBef>
-              <a:defRPr sz="1100">
-                <a:solidFill>
-                  <a:srgbClr val="E0E8F0"/>
-                </a:solidFill>
-                <a:latin typeface="Consolas"/>
-              </a:defRPr>
-            </a:pPr>
-            <a:r>
-              <a:t>11. Financials — 3-year forecast.</a:t>
-            </a:r>
-          </a:p>
-          <a:p>
-            <a:pPr>
-              <a:spcBef>
-                <a:spcPts val="200"/>
-              </a:spcBef>
-              <a:defRPr sz="1100">
-                <a:solidFill>
-                  <a:srgbClr val="E0E8F0"/>
-                </a:solidFill>
-                <a:latin typeface="Consolas"/>
-              </a:defRPr>
-            </a:pPr>
-            <a:r>
-              <a:t>12. The Ask — £4M, use of funds, milestones.</a:t>
-            </a:r>
-          </a:p>
-          <a:p>
-            <a:pPr>
-              <a:spcBef>
-                <a:spcPts val="200"/>
-              </a:spcBef>
-              <a:defRPr sz="1100">
-                <a:solidFill>
-                  <a:srgbClr val="E0E8F0"/>
-                </a:solidFill>
-                <a:latin typeface="Consolas"/>
-              </a:defRPr>
-            </a:pPr>
-          </a:p>
-          <a:p>
-            <a:pPr>
-              <a:spcBef>
-                <a:spcPts val="200"/>
-              </a:spcBef>
-              <a:defRPr sz="1100">
-                <a:solidFill>
-                  <a:srgbClr val="E0E8F0"/>
-                </a:solidFill>
-                <a:latin typeface="Consolas"/>
-              </a:defRPr>
-            </a:pPr>
-            <a:r>
-              <a:t>Each slide: headline, 2-4 bullet points, visual suggestion. Confident, investor-facing tone.</a:t>
+              <a:t>Create a 12-slide investor pitch deck as a presentation artifact for:</a:t>
+            </a:r>
+            <a:br/>
+            <a:br/>
+            <a:r>
+              <a:t>Aether — B2B SaaS using low-cost IoT sensors + AI analytics for real-time,</a:t>
+            </a:r>
+            <a:br/>
+            <a:r>
+              <a:t>hyperlocal air quality monitoring. Customers: city councils, property</a:t>
+            </a:r>
+            <a:br/>
+            <a:r>
+              <a:t>developers, health services. 3 pilot cities, £1.2M pre-seed. Team: ex-Dyson</a:t>
+            </a:r>
+            <a:br/>
+            <a:r>
+              <a:t>engineering lead, ex-DeepMind ML researcher, ex-Capita smart cities PM,</a:t>
+            </a:r>
+            <a:br/>
+            <a:r>
+              <a:t>commercial lead from Octopus Energy. Raising £4M seed.</a:t>
+            </a:r>
+            <a:br/>
+            <a:br/>
+            <a:r>
+              <a:t>Slides: Title → Problem (36K UK deaths/yr from air pollution) → Solution →</a:t>
+            </a:r>
+            <a:br/>
+            <a:r>
+              <a:t>How It Works (3 steps) → Market Opportunity → Traction (metrics) →</a:t>
+            </a:r>
+            <a:br/>
+            <a:r>
+              <a:t>Business Model (pricing tiers) → Competitive Landscape (2×2 matrix) →</a:t>
+            </a:r>
+            <a:br/>
+            <a:r>
+              <a:t>Team → Go-to-Market → Financial Projections (3-year) → The Ask (£4M)</a:t>
+            </a:r>
+            <a:br/>
+            <a:br/>
+            <a:r>
+              <a:t>Each slide: bold headline + 2-4 bullets + visual suggestion.</a:t>
+            </a:r>
+            <a:br/>
+            <a:r>
+              <a:t>Dark navy/teal colour scheme. Confident investor-facing tone.</a:t>
+            </a:r>
+            <a:br/>
+            <a:r>
+              <a:t>Create as a presentation artifact with styled slides.</a:t>
+            </a:r>
+            <a:br/>
+            <a:br/>
+            <a:r>
+              <a:t>[Then iterate: emotional Problem rewrite, detailed financials,</a:t>
+            </a:r>
+            <a:br/>
+            <a:r>
+              <a:t>competitive 2×2 matrix positioning]</a:t>
             </a:r>
           </a:p>
         </p:txBody>
@@ -5392,8 +5690,8 @@
         </p:nvSpPr>
         <p:spPr>
           <a:xfrm>
-            <a:off x="731520" y="548640"/>
-            <a:ext cx="73152" cy="548640"/>
+            <a:off x="0" y="0"/>
+            <a:ext cx="12191695" cy="73152"/>
           </a:xfrm>
           <a:prstGeom prst="rect">
             <a:avLst/>
@@ -5435,8 +5733,8 @@
         </p:nvSpPr>
         <p:spPr>
           <a:xfrm>
-            <a:off x="1005840" y="457200"/>
-            <a:ext cx="9144000" cy="822960"/>
+            <a:off x="548640" y="274320"/>
+            <a:ext cx="10972800" cy="640080"/>
           </a:xfrm>
           <a:prstGeom prst="rect">
             <a:avLst/>
@@ -5450,6 +5748,9 @@
           <a:lstStyle/>
           <a:p>
             <a:pPr algn="l">
+              <a:spcAft>
+                <a:spcPts val="400"/>
+              </a:spcAft>
               <a:defRPr sz="3600" b="1">
                 <a:solidFill>
                   <a:srgbClr val="FFFFFF"/>
@@ -5458,21 +5759,64 @@
               </a:defRPr>
             </a:pPr>
             <a:r>
-              <a:t>Use Case 5: Key Takeaways</a:t>
-            </a:r>
-          </a:p>
-        </p:txBody>
-      </p:sp>
-      <p:sp>
-        <p:nvSpPr>
-          <p:cNvPr id="4" name="TextBox 3"/>
+              <a:t>🚀 UC5: Key Takeaways</a:t>
+            </a:r>
+          </a:p>
+        </p:txBody>
+      </p:sp>
+      <p:sp>
+        <p:nvSpPr>
+          <p:cNvPr id="4" name="Rectangle 3"/>
+          <p:cNvSpPr/>
+          <p:nvPr/>
+        </p:nvSpPr>
+        <p:spPr>
+          <a:xfrm>
+            <a:off x="365760" y="1280160"/>
+            <a:ext cx="11430000" cy="5029200"/>
+          </a:xfrm>
+          <a:prstGeom prst="rect">
+            <a:avLst/>
+          </a:prstGeom>
+          <a:solidFill>
+            <a:srgbClr val="222638"/>
+          </a:solidFill>
+          <a:ln>
+            <a:noFill/>
+          </a:ln>
+        </p:spPr>
+        <p:style>
+          <a:lnRef idx="1">
+            <a:schemeClr val="accent1"/>
+          </a:lnRef>
+          <a:fillRef idx="3">
+            <a:schemeClr val="accent1"/>
+          </a:fillRef>
+          <a:effectRef idx="2">
+            <a:schemeClr val="accent1"/>
+          </a:effectRef>
+          <a:fontRef idx="minor">
+            <a:schemeClr val="lt1"/>
+          </a:fontRef>
+        </p:style>
+        <p:txBody>
+          <a:bodyPr rtlCol="0" anchor="ctr"/>
+          <a:lstStyle/>
+          <a:p>
+            <a:pPr algn="ctr"/>
+          </a:p>
+        </p:txBody>
+      </p:sp>
+      <p:sp>
+        <p:nvSpPr>
+          <p:cNvPr id="5" name="TextBox 4"/>
           <p:cNvSpPr txBox="1"/>
           <p:nvPr/>
         </p:nvSpPr>
         <p:spPr>
           <a:xfrm>
-            <a:off x="1005840" y="1280160"/>
-            <a:ext cx="9144000" cy="457200"/>
+            <a:off x="548640" y="1371600"/>
+            <a:ext cx="10972800" cy="4846320"/>
           </a:xfrm>
           <a:prstGeom prst="rect">
             <a:avLst/>
@@ -5486,163 +5830,168 @@
           <a:lstStyle/>
           <a:p>
             <a:pPr algn="l">
+              <a:spcAft>
+                <a:spcPts val="400"/>
+              </a:spcAft>
+              <a:defRPr sz="2400" b="1">
+                <a:solidFill>
+                  <a:srgbClr val="FF6B35"/>
+                </a:solidFill>
+                <a:latin typeface="Calibri"/>
+              </a:defRPr>
+            </a:pPr>
+            <a:r>
+              <a:t>What Just Happened</a:t>
+            </a:r>
+          </a:p>
+          <a:p>
+            <a:pPr algn="l">
+              <a:defRPr sz="2000" b="0">
+                <a:solidFill>
+                  <a:srgbClr val="FFFFFF"/>
+                </a:solidFill>
+                <a:latin typeface="Calibri"/>
+              </a:defRPr>
+            </a:pPr>
+            <a:r>
+              <a:t>✅ Full 12-slide pitch deck from a single paragraph</a:t>
+            </a:r>
+          </a:p>
+          <a:p>
+            <a:pPr algn="l">
+              <a:defRPr sz="2000" b="0">
+                <a:solidFill>
+                  <a:srgbClr val="FFFFFF"/>
+                </a:solidFill>
+                <a:latin typeface="Calibri"/>
+              </a:defRPr>
+            </a:pPr>
+            <a:r>
+              <a:t>✅ Emotionally compelling problem framing</a:t>
+            </a:r>
+          </a:p>
+          <a:p>
+            <a:pPr algn="l">
+              <a:defRPr sz="2000" b="0">
+                <a:solidFill>
+                  <a:srgbClr val="FFFFFF"/>
+                </a:solidFill>
+                <a:latin typeface="Calibri"/>
+              </a:defRPr>
+            </a:pPr>
+            <a:r>
+              <a:t>✅ Structured financial projections with assumptions</a:t>
+            </a:r>
+          </a:p>
+          <a:p>
+            <a:pPr algn="l">
+              <a:defRPr sz="2000" b="0">
+                <a:solidFill>
+                  <a:srgbClr val="FFFFFF"/>
+                </a:solidFill>
+                <a:latin typeface="Calibri"/>
+              </a:defRPr>
+            </a:pPr>
+            <a:r>
+              <a:t>✅ Competitive positioning matrix</a:t>
+            </a:r>
+          </a:p>
+          <a:p>
+            <a:pPr algn="l">
+              <a:defRPr sz="2000" b="0">
+                <a:solidFill>
+                  <a:srgbClr val="FFFFFF"/>
+                </a:solidFill>
+                <a:latin typeface="Calibri"/>
+              </a:defRPr>
+            </a:pPr>
+            <a:r>
+              <a:t>✅ Presentable artifact — no copy-paste needed</a:t>
+            </a:r>
+          </a:p>
+          <a:p>
+            <a:pPr algn="l">
+              <a:defRPr sz="1200" b="0">
+                <a:solidFill>
+                  <a:srgbClr val="FFFFFF"/>
+                </a:solidFill>
+                <a:latin typeface="Calibri"/>
+              </a:defRPr>
+            </a:pPr>
+          </a:p>
+          <a:p>
+            <a:pPr algn="l">
+              <a:defRPr sz="2200" b="1">
+                <a:solidFill>
+                  <a:srgbClr val="00D4F5"/>
+                </a:solidFill>
+                <a:latin typeface="Calibri"/>
+              </a:defRPr>
+            </a:pPr>
+            <a:r>
+              <a:t>⏱ Time: ~7 minutes  vs  days with a presentation designer</a:t>
+            </a:r>
+          </a:p>
+          <a:p>
+            <a:pPr algn="l">
+              <a:defRPr sz="1200" b="0">
+                <a:solidFill>
+                  <a:srgbClr val="FFFFFF"/>
+                </a:solidFill>
+                <a:latin typeface="Calibri"/>
+              </a:defRPr>
+            </a:pPr>
+          </a:p>
+          <a:p>
+            <a:pPr algn="l">
+              <a:defRPr sz="2200" b="1">
+                <a:solidFill>
+                  <a:srgbClr val="FF6B35"/>
+                </a:solidFill>
+                <a:latin typeface="Calibri"/>
+              </a:defRPr>
+            </a:pPr>
+            <a:r>
+              <a:t>💡 The Pattern: Structure Your Ask</a:t>
+            </a:r>
+          </a:p>
+          <a:p>
+            <a:pPr algn="l">
               <a:defRPr sz="1800" b="0">
                 <a:solidFill>
-                  <a:srgbClr val="BBBBCC"/>
-                </a:solidFill>
-                <a:latin typeface="Calibri"/>
-              </a:defRPr>
-            </a:pPr>
-            <a:r>
-              <a:t>🚀  What to notice in the output</a:t>
-            </a:r>
-          </a:p>
-        </p:txBody>
-      </p:sp>
-      <p:sp>
-        <p:nvSpPr>
-          <p:cNvPr id="5" name="TextBox 4"/>
-          <p:cNvSpPr txBox="1"/>
-          <p:nvPr/>
-        </p:nvSpPr>
-        <p:spPr>
-          <a:xfrm>
-            <a:off x="1005840" y="1828800"/>
-            <a:ext cx="10058400" cy="4572000"/>
-          </a:xfrm>
-          <a:prstGeom prst="rect">
-            <a:avLst/>
-          </a:prstGeom>
-          <a:noFill/>
-        </p:spPr>
-        <p:txBody>
-          <a:bodyPr wrap="square">
-            <a:spAutoFit/>
-          </a:bodyPr>
-          <a:lstStyle/>
-          <a:p>
-            <a:pPr>
-              <a:defRPr sz="2200" b="1">
-                <a:solidFill>
-                  <a:srgbClr val="FFFFFF"/>
-                </a:solidFill>
-                <a:latin typeface="Calibri"/>
-              </a:defRPr>
-            </a:pPr>
-            <a:r>
-              <a:t>▸ Structure drives quality</a:t>
-            </a:r>
-          </a:p>
-          <a:p>
-            <a:pPr>
-              <a:spcBef>
-                <a:spcPts val="200"/>
-              </a:spcBef>
-              <a:defRPr sz="1800">
-                <a:solidFill>
-                  <a:srgbClr val="BBBBCC"/>
-                </a:solidFill>
-                <a:latin typeface="Calibri"/>
-              </a:defRPr>
-            </a:pPr>
-            <a:r>
-              <a:t>    Specifying each slide = less editing later</a:t>
-            </a:r>
-          </a:p>
-          <a:p>
-            <a:pPr>
-              <a:spcBef>
-                <a:spcPts val="1000"/>
-              </a:spcBef>
-              <a:defRPr sz="2200" b="1">
-                <a:solidFill>
-                  <a:srgbClr val="FFFFFF"/>
-                </a:solidFill>
-                <a:latin typeface="Calibri"/>
-              </a:defRPr>
-            </a:pPr>
-            <a:r>
-              <a:t>▸ Chain your tools</a:t>
-            </a:r>
-          </a:p>
-          <a:p>
-            <a:pPr>
-              <a:spcBef>
-                <a:spcPts val="200"/>
-              </a:spcBef>
-              <a:defRPr sz="1800">
-                <a:solidFill>
-                  <a:srgbClr val="BBBBCC"/>
-                </a:solidFill>
-                <a:latin typeface="Calibri"/>
-              </a:defRPr>
-            </a:pPr>
-            <a:r>
-              <a:t>    Claude writes content → Gamma designs slides → done</a:t>
-            </a:r>
-          </a:p>
-          <a:p>
-            <a:pPr>
-              <a:spcBef>
-                <a:spcPts val="1000"/>
-              </a:spcBef>
-              <a:defRPr sz="2200" b="1">
-                <a:solidFill>
-                  <a:srgbClr val="FFFFFF"/>
-                </a:solidFill>
-                <a:latin typeface="Calibri"/>
-              </a:defRPr>
-            </a:pPr>
-            <a:r>
-              <a:t>▸ Storytelling matters</a:t>
-            </a:r>
-          </a:p>
-          <a:p>
-            <a:pPr>
-              <a:spcBef>
-                <a:spcPts val="200"/>
-              </a:spcBef>
-              <a:defRPr sz="1800">
-                <a:solidFill>
-                  <a:srgbClr val="BBBBCC"/>
-                </a:solidFill>
-                <a:latin typeface="Calibri"/>
-              </a:defRPr>
-            </a:pPr>
-            <a:r>
-              <a:t>    Ask for emotional framing, not just facts</a:t>
-            </a:r>
-          </a:p>
-          <a:p>
-            <a:pPr>
-              <a:spcBef>
-                <a:spcPts val="1000"/>
-              </a:spcBef>
-              <a:defRPr sz="2200" b="1">
-                <a:solidFill>
-                  <a:srgbClr val="FFFFFF"/>
-                </a:solidFill>
-                <a:latin typeface="Calibri"/>
-              </a:defRPr>
-            </a:pPr>
-            <a:r>
-              <a:t>▸ A starting point, not a final deck</a:t>
-            </a:r>
-          </a:p>
-          <a:p>
-            <a:pPr>
-              <a:spcBef>
-                <a:spcPts val="200"/>
-              </a:spcBef>
-              <a:defRPr sz="1800">
-                <a:solidFill>
-                  <a:srgbClr val="BBBBCC"/>
-                </a:solidFill>
-                <a:latin typeface="Calibri"/>
-              </a:defRPr>
-            </a:pPr>
-            <a:r>
-              <a:t>    Refine with your own expertise and judgement</a:t>
+                  <a:srgbClr val="CCCCCC"/>
+                </a:solidFill>
+                <a:latin typeface="Calibri"/>
+              </a:defRPr>
+            </a:pPr>
+            <a:r>
+              <a:t>• Specify every slide by number and purpose</a:t>
+            </a:r>
+          </a:p>
+          <a:p>
+            <a:pPr algn="l">
+              <a:defRPr sz="1800" b="0">
+                <a:solidFill>
+                  <a:srgbClr val="CCCCCC"/>
+                </a:solidFill>
+                <a:latin typeface="Calibri"/>
+              </a:defRPr>
+            </a:pPr>
+            <a:r>
+              <a:t>• Give concrete data (£4M raise, 3 pilots, team backgrounds)</a:t>
+            </a:r>
+          </a:p>
+          <a:p>
+            <a:pPr algn="l">
+              <a:defRPr sz="1800" b="0">
+                <a:solidFill>
+                  <a:srgbClr val="CCCCCC"/>
+                </a:solidFill>
+                <a:latin typeface="Calibri"/>
+              </a:defRPr>
+            </a:pPr>
+            <a:r>
+              <a:t>• Iterate: storytelling → financials → competitive positioning</a:t>
             </a:r>
           </a:p>
         </p:txBody>
@@ -5681,8 +6030,8 @@
         </p:nvSpPr>
         <p:spPr>
           <a:xfrm>
-            <a:off x="731520" y="548640"/>
-            <a:ext cx="73152" cy="548640"/>
+            <a:off x="0" y="0"/>
+            <a:ext cx="12191695" cy="109728"/>
           </a:xfrm>
           <a:prstGeom prst="rect">
             <a:avLst/>
@@ -5724,8 +6073,8 @@
         </p:nvSpPr>
         <p:spPr>
           <a:xfrm>
-            <a:off x="1005840" y="457200"/>
-            <a:ext cx="9144000" cy="822960"/>
+            <a:off x="548640" y="274320"/>
+            <a:ext cx="10972800" cy="731520"/>
           </a:xfrm>
           <a:prstGeom prst="rect">
             <a:avLst/>
@@ -5739,6 +6088,9 @@
           <a:lstStyle/>
           <a:p>
             <a:pPr algn="l">
+              <a:spcAft>
+                <a:spcPts val="400"/>
+              </a:spcAft>
               <a:defRPr sz="3800" b="1">
                 <a:solidFill>
                   <a:srgbClr val="FFFFFF"/>
@@ -5747,21 +6099,64 @@
               </a:defRPr>
             </a:pPr>
             <a:r>
-              <a:t>What We Learned</a:t>
-            </a:r>
-          </a:p>
-        </p:txBody>
-      </p:sp>
-      <p:sp>
-        <p:nvSpPr>
-          <p:cNvPr id="4" name="TextBox 3"/>
+              <a:t>What We Learned Today</a:t>
+            </a:r>
+          </a:p>
+        </p:txBody>
+      </p:sp>
+      <p:sp>
+        <p:nvSpPr>
+          <p:cNvPr id="4" name="Rectangle 3"/>
+          <p:cNvSpPr/>
+          <p:nvPr/>
+        </p:nvSpPr>
+        <p:spPr>
+          <a:xfrm>
+            <a:off x="365760" y="1280160"/>
+            <a:ext cx="11430000" cy="640080"/>
+          </a:xfrm>
+          <a:prstGeom prst="rect">
+            <a:avLst/>
+          </a:prstGeom>
+          <a:solidFill>
+            <a:srgbClr val="222638"/>
+          </a:solidFill>
+          <a:ln>
+            <a:noFill/>
+          </a:ln>
+        </p:spPr>
+        <p:style>
+          <a:lnRef idx="1">
+            <a:schemeClr val="accent1"/>
+          </a:lnRef>
+          <a:fillRef idx="3">
+            <a:schemeClr val="accent1"/>
+          </a:fillRef>
+          <a:effectRef idx="2">
+            <a:schemeClr val="accent1"/>
+          </a:effectRef>
+          <a:fontRef idx="minor">
+            <a:schemeClr val="lt1"/>
+          </a:fontRef>
+        </p:style>
+        <p:txBody>
+          <a:bodyPr rtlCol="0" anchor="ctr"/>
+          <a:lstStyle/>
+          <a:p>
+            <a:pPr algn="ctr"/>
+          </a:p>
+        </p:txBody>
+      </p:sp>
+      <p:sp>
+        <p:nvSpPr>
+          <p:cNvPr id="5" name="TextBox 4"/>
           <p:cNvSpPr txBox="1"/>
           <p:nvPr/>
         </p:nvSpPr>
         <p:spPr>
           <a:xfrm>
-            <a:off x="1005840" y="1463040"/>
-            <a:ext cx="10058400" cy="5029200"/>
+            <a:off x="548640" y="1325880"/>
+            <a:ext cx="4114800" cy="548640"/>
           </a:xfrm>
           <a:prstGeom prst="rect">
             <a:avLst/>
@@ -5774,8 +6169,11 @@
           </a:bodyPr>
           <a:lstStyle/>
           <a:p>
-            <a:pPr>
-              <a:defRPr sz="2200" b="1">
+            <a:pPr algn="l">
+              <a:spcAft>
+                <a:spcPts val="400"/>
+              </a:spcAft>
+              <a:defRPr sz="2000" b="1">
                 <a:solidFill>
                   <a:srgbClr val="FF6B35"/>
                 </a:solidFill>
@@ -5783,31 +6181,120 @@
               </a:defRPr>
             </a:pPr>
             <a:r>
-              <a:t>▸  AI is an accelerator, not a replacement</a:t>
-            </a:r>
-          </a:p>
-          <a:p>
-            <a:pPr>
-              <a:spcBef>
-                <a:spcPts val="200"/>
-              </a:spcBef>
-              <a:defRPr sz="1800">
-                <a:solidFill>
-                  <a:srgbClr val="BBBBCC"/>
-                </a:solidFill>
-                <a:latin typeface="Calibri"/>
-              </a:defRPr>
-            </a:pPr>
-            <a:r>
-              <a:t>    It gets you 70-80% there. Your expertise finishes the job.</a:t>
-            </a:r>
-          </a:p>
-          <a:p>
-            <a:pPr>
-              <a:spcBef>
-                <a:spcPts val="1600"/>
-              </a:spcBef>
-              <a:defRPr sz="2200" b="1">
+              <a:t>📊 Financial Analysis</a:t>
+            </a:r>
+          </a:p>
+        </p:txBody>
+      </p:sp>
+      <p:sp>
+        <p:nvSpPr>
+          <p:cNvPr id="6" name="TextBox 5"/>
+          <p:cNvSpPr txBox="1"/>
+          <p:nvPr/>
+        </p:nvSpPr>
+        <p:spPr>
+          <a:xfrm>
+            <a:off x="4754880" y="1325880"/>
+            <a:ext cx="6858000" cy="548640"/>
+          </a:xfrm>
+          <a:prstGeom prst="rect">
+            <a:avLst/>
+          </a:prstGeom>
+          <a:noFill/>
+        </p:spPr>
+        <p:txBody>
+          <a:bodyPr wrap="square">
+            <a:spAutoFit/>
+          </a:bodyPr>
+          <a:lstStyle/>
+          <a:p>
+            <a:pPr algn="l">
+              <a:spcAft>
+                <a:spcPts val="400"/>
+              </a:spcAft>
+              <a:defRPr sz="1800" b="0">
+                <a:solidFill>
+                  <a:srgbClr val="FFFFFF"/>
+                </a:solidFill>
+                <a:latin typeface="Calibri"/>
+              </a:defRPr>
+            </a:pPr>
+            <a:r>
+              <a:t>Messy spreadsheet → board-ready report in 45 seconds</a:t>
+            </a:r>
+          </a:p>
+        </p:txBody>
+      </p:sp>
+      <p:sp>
+        <p:nvSpPr>
+          <p:cNvPr id="7" name="Rectangle 6"/>
+          <p:cNvSpPr/>
+          <p:nvPr/>
+        </p:nvSpPr>
+        <p:spPr>
+          <a:xfrm>
+            <a:off x="365760" y="1965960"/>
+            <a:ext cx="11430000" cy="640080"/>
+          </a:xfrm>
+          <a:prstGeom prst="rect">
+            <a:avLst/>
+          </a:prstGeom>
+          <a:solidFill>
+            <a:srgbClr val="2A2E42"/>
+          </a:solidFill>
+          <a:ln>
+            <a:noFill/>
+          </a:ln>
+        </p:spPr>
+        <p:style>
+          <a:lnRef idx="1">
+            <a:schemeClr val="accent1"/>
+          </a:lnRef>
+          <a:fillRef idx="3">
+            <a:schemeClr val="accent1"/>
+          </a:fillRef>
+          <a:effectRef idx="2">
+            <a:schemeClr val="accent1"/>
+          </a:effectRef>
+          <a:fontRef idx="minor">
+            <a:schemeClr val="lt1"/>
+          </a:fontRef>
+        </p:style>
+        <p:txBody>
+          <a:bodyPr rtlCol="0" anchor="ctr"/>
+          <a:lstStyle/>
+          <a:p>
+            <a:pPr algn="ctr"/>
+          </a:p>
+        </p:txBody>
+      </p:sp>
+      <p:sp>
+        <p:nvSpPr>
+          <p:cNvPr id="8" name="TextBox 7"/>
+          <p:cNvSpPr txBox="1"/>
+          <p:nvPr/>
+        </p:nvSpPr>
+        <p:spPr>
+          <a:xfrm>
+            <a:off x="548640" y="2011679"/>
+            <a:ext cx="4114800" cy="548640"/>
+          </a:xfrm>
+          <a:prstGeom prst="rect">
+            <a:avLst/>
+          </a:prstGeom>
+          <a:noFill/>
+        </p:spPr>
+        <p:txBody>
+          <a:bodyPr wrap="square">
+            <a:spAutoFit/>
+          </a:bodyPr>
+          <a:lstStyle/>
+          <a:p>
+            <a:pPr algn="l">
+              <a:spcAft>
+                <a:spcPts val="400"/>
+              </a:spcAft>
+              <a:defRPr sz="2000" b="1">
                 <a:solidFill>
                   <a:srgbClr val="FF6B35"/>
                 </a:solidFill>
@@ -5815,31 +6302,120 @@
               </a:defRPr>
             </a:pPr>
             <a:r>
-              <a:t>▸  Specificity is everything</a:t>
-            </a:r>
-          </a:p>
-          <a:p>
-            <a:pPr>
-              <a:spcBef>
-                <a:spcPts val="200"/>
-              </a:spcBef>
-              <a:defRPr sz="1800">
-                <a:solidFill>
-                  <a:srgbClr val="BBBBCC"/>
-                </a:solidFill>
-                <a:latin typeface="Calibri"/>
-              </a:defRPr>
-            </a:pPr>
-            <a:r>
-              <a:t>    Vague prompt → vague answer. Detailed prompt → professional output.</a:t>
-            </a:r>
-          </a:p>
-          <a:p>
-            <a:pPr>
-              <a:spcBef>
-                <a:spcPts val="1600"/>
-              </a:spcBef>
-              <a:defRPr sz="2200" b="1">
+              <a:t>📝 Contract Drafting</a:t>
+            </a:r>
+          </a:p>
+        </p:txBody>
+      </p:sp>
+      <p:sp>
+        <p:nvSpPr>
+          <p:cNvPr id="9" name="TextBox 8"/>
+          <p:cNvSpPr txBox="1"/>
+          <p:nvPr/>
+        </p:nvSpPr>
+        <p:spPr>
+          <a:xfrm>
+            <a:off x="4754880" y="2011679"/>
+            <a:ext cx="6858000" cy="548640"/>
+          </a:xfrm>
+          <a:prstGeom prst="rect">
+            <a:avLst/>
+          </a:prstGeom>
+          <a:noFill/>
+        </p:spPr>
+        <p:txBody>
+          <a:bodyPr wrap="square">
+            <a:spAutoFit/>
+          </a:bodyPr>
+          <a:lstStyle/>
+          <a:p>
+            <a:pPr algn="l">
+              <a:spcAft>
+                <a:spcPts val="400"/>
+              </a:spcAft>
+              <a:defRPr sz="1800" b="0">
+                <a:solidFill>
+                  <a:srgbClr val="FFFFFF"/>
+                </a:solidFill>
+                <a:latin typeface="Calibri"/>
+              </a:defRPr>
+            </a:pPr>
+            <a:r>
+              <a:t>Brief → full legal agreement in 4 minutes</a:t>
+            </a:r>
+          </a:p>
+        </p:txBody>
+      </p:sp>
+      <p:sp>
+        <p:nvSpPr>
+          <p:cNvPr id="10" name="Rectangle 9"/>
+          <p:cNvSpPr/>
+          <p:nvPr/>
+        </p:nvSpPr>
+        <p:spPr>
+          <a:xfrm>
+            <a:off x="365760" y="2651760"/>
+            <a:ext cx="11430000" cy="640080"/>
+          </a:xfrm>
+          <a:prstGeom prst="rect">
+            <a:avLst/>
+          </a:prstGeom>
+          <a:solidFill>
+            <a:srgbClr val="222638"/>
+          </a:solidFill>
+          <a:ln>
+            <a:noFill/>
+          </a:ln>
+        </p:spPr>
+        <p:style>
+          <a:lnRef idx="1">
+            <a:schemeClr val="accent1"/>
+          </a:lnRef>
+          <a:fillRef idx="3">
+            <a:schemeClr val="accent1"/>
+          </a:fillRef>
+          <a:effectRef idx="2">
+            <a:schemeClr val="accent1"/>
+          </a:effectRef>
+          <a:fontRef idx="minor">
+            <a:schemeClr val="lt1"/>
+          </a:fontRef>
+        </p:style>
+        <p:txBody>
+          <a:bodyPr rtlCol="0" anchor="ctr"/>
+          <a:lstStyle/>
+          <a:p>
+            <a:pPr algn="ctr"/>
+          </a:p>
+        </p:txBody>
+      </p:sp>
+      <p:sp>
+        <p:nvSpPr>
+          <p:cNvPr id="11" name="TextBox 10"/>
+          <p:cNvSpPr txBox="1"/>
+          <p:nvPr/>
+        </p:nvSpPr>
+        <p:spPr>
+          <a:xfrm>
+            <a:off x="548640" y="2697479"/>
+            <a:ext cx="4114800" cy="548640"/>
+          </a:xfrm>
+          <a:prstGeom prst="rect">
+            <a:avLst/>
+          </a:prstGeom>
+          <a:noFill/>
+        </p:spPr>
+        <p:txBody>
+          <a:bodyPr wrap="square">
+            <a:spAutoFit/>
+          </a:bodyPr>
+          <a:lstStyle/>
+          <a:p>
+            <a:pPr algn="l">
+              <a:spcAft>
+                <a:spcPts val="400"/>
+              </a:spcAft>
+              <a:defRPr sz="2000" b="1">
                 <a:solidFill>
                   <a:srgbClr val="FF6B35"/>
                 </a:solidFill>
@@ -5847,31 +6423,120 @@
               </a:defRPr>
             </a:pPr>
             <a:r>
-              <a:t>▸  Iterate, don't expect magic</a:t>
-            </a:r>
-          </a:p>
-          <a:p>
-            <a:pPr>
-              <a:spcBef>
-                <a:spcPts val="200"/>
-              </a:spcBef>
-              <a:defRPr sz="1800">
-                <a:solidFill>
-                  <a:srgbClr val="BBBBCC"/>
-                </a:solidFill>
-                <a:latin typeface="Calibri"/>
-              </a:defRPr>
-            </a:pPr>
-            <a:r>
-              <a:t>    The real power is in the follow-up prompts — refine, drill down, reshape.</a:t>
-            </a:r>
-          </a:p>
-          <a:p>
-            <a:pPr>
-              <a:spcBef>
-                <a:spcPts val="1600"/>
-              </a:spcBef>
-              <a:defRPr sz="2200" b="1">
+              <a:t>🎨 Brand Identity</a:t>
+            </a:r>
+          </a:p>
+        </p:txBody>
+      </p:sp>
+      <p:sp>
+        <p:nvSpPr>
+          <p:cNvPr id="12" name="TextBox 11"/>
+          <p:cNvSpPr txBox="1"/>
+          <p:nvPr/>
+        </p:nvSpPr>
+        <p:spPr>
+          <a:xfrm>
+            <a:off x="4754880" y="2697479"/>
+            <a:ext cx="6858000" cy="548640"/>
+          </a:xfrm>
+          <a:prstGeom prst="rect">
+            <a:avLst/>
+          </a:prstGeom>
+          <a:noFill/>
+        </p:spPr>
+        <p:txBody>
+          <a:bodyPr wrap="square">
+            <a:spAutoFit/>
+          </a:bodyPr>
+          <a:lstStyle/>
+          <a:p>
+            <a:pPr algn="l">
+              <a:spcAft>
+                <a:spcPts val="400"/>
+              </a:spcAft>
+              <a:defRPr sz="1800" b="0">
+                <a:solidFill>
+                  <a:srgbClr val="FFFFFF"/>
+                </a:solidFill>
+                <a:latin typeface="Calibri"/>
+              </a:defRPr>
+            </a:pPr>
+            <a:r>
+              <a:t>Text description → logo + brand system in 4 minutes</a:t>
+            </a:r>
+          </a:p>
+        </p:txBody>
+      </p:sp>
+      <p:sp>
+        <p:nvSpPr>
+          <p:cNvPr id="13" name="Rectangle 12"/>
+          <p:cNvSpPr/>
+          <p:nvPr/>
+        </p:nvSpPr>
+        <p:spPr>
+          <a:xfrm>
+            <a:off x="365760" y="3337560"/>
+            <a:ext cx="11430000" cy="640080"/>
+          </a:xfrm>
+          <a:prstGeom prst="rect">
+            <a:avLst/>
+          </a:prstGeom>
+          <a:solidFill>
+            <a:srgbClr val="2A2E42"/>
+          </a:solidFill>
+          <a:ln>
+            <a:noFill/>
+          </a:ln>
+        </p:spPr>
+        <p:style>
+          <a:lnRef idx="1">
+            <a:schemeClr val="accent1"/>
+          </a:lnRef>
+          <a:fillRef idx="3">
+            <a:schemeClr val="accent1"/>
+          </a:fillRef>
+          <a:effectRef idx="2">
+            <a:schemeClr val="accent1"/>
+          </a:effectRef>
+          <a:fontRef idx="minor">
+            <a:schemeClr val="lt1"/>
+          </a:fontRef>
+        </p:style>
+        <p:txBody>
+          <a:bodyPr rtlCol="0" anchor="ctr"/>
+          <a:lstStyle/>
+          <a:p>
+            <a:pPr algn="ctr"/>
+          </a:p>
+        </p:txBody>
+      </p:sp>
+      <p:sp>
+        <p:nvSpPr>
+          <p:cNvPr id="14" name="TextBox 13"/>
+          <p:cNvSpPr txBox="1"/>
+          <p:nvPr/>
+        </p:nvSpPr>
+        <p:spPr>
+          <a:xfrm>
+            <a:off x="548640" y="3383279"/>
+            <a:ext cx="4114800" cy="548640"/>
+          </a:xfrm>
+          <a:prstGeom prst="rect">
+            <a:avLst/>
+          </a:prstGeom>
+          <a:noFill/>
+        </p:spPr>
+        <p:txBody>
+          <a:bodyPr wrap="square">
+            <a:spAutoFit/>
+          </a:bodyPr>
+          <a:lstStyle/>
+          <a:p>
+            <a:pPr algn="l">
+              <a:spcAft>
+                <a:spcPts val="400"/>
+              </a:spcAft>
+              <a:defRPr sz="2000" b="1">
                 <a:solidFill>
                   <a:srgbClr val="FF6B35"/>
                 </a:solidFill>
@@ -5879,31 +6544,120 @@
               </a:defRPr>
             </a:pPr>
             <a:r>
-              <a:t>▸  Tools are available today</a:t>
-            </a:r>
-          </a:p>
-          <a:p>
-            <a:pPr>
-              <a:spcBef>
-                <a:spcPts val="200"/>
-              </a:spcBef>
-              <a:defRPr sz="1800">
-                <a:solidFill>
-                  <a:srgbClr val="BBBBCC"/>
-                </a:solidFill>
-                <a:latin typeface="Calibri"/>
-              </a:defRPr>
-            </a:pPr>
-            <a:r>
-              <a:t>    Everything we used is available right now — most with free tiers.</a:t>
-            </a:r>
-          </a:p>
-          <a:p>
-            <a:pPr>
-              <a:spcBef>
-                <a:spcPts val="1600"/>
-              </a:spcBef>
-              <a:defRPr sz="2200" b="1">
+              <a:t>🔍 Market Research</a:t>
+            </a:r>
+          </a:p>
+        </p:txBody>
+      </p:sp>
+      <p:sp>
+        <p:nvSpPr>
+          <p:cNvPr id="15" name="TextBox 14"/>
+          <p:cNvSpPr txBox="1"/>
+          <p:nvPr/>
+        </p:nvSpPr>
+        <p:spPr>
+          <a:xfrm>
+            <a:off x="4754880" y="3383279"/>
+            <a:ext cx="6858000" cy="548640"/>
+          </a:xfrm>
+          <a:prstGeom prst="rect">
+            <a:avLst/>
+          </a:prstGeom>
+          <a:noFill/>
+        </p:spPr>
+        <p:txBody>
+          <a:bodyPr wrap="square">
+            <a:spAutoFit/>
+          </a:bodyPr>
+          <a:lstStyle/>
+          <a:p>
+            <a:pPr algn="l">
+              <a:spcAft>
+                <a:spcPts val="400"/>
+              </a:spcAft>
+              <a:defRPr sz="1800" b="0">
+                <a:solidFill>
+                  <a:srgbClr val="FFFFFF"/>
+                </a:solidFill>
+                <a:latin typeface="Calibri"/>
+              </a:defRPr>
+            </a:pPr>
+            <a:r>
+              <a:t>From scratch → cited research report in 90 seconds</a:t>
+            </a:r>
+          </a:p>
+        </p:txBody>
+      </p:sp>
+      <p:sp>
+        <p:nvSpPr>
+          <p:cNvPr id="16" name="Rectangle 15"/>
+          <p:cNvSpPr/>
+          <p:nvPr/>
+        </p:nvSpPr>
+        <p:spPr>
+          <a:xfrm>
+            <a:off x="365760" y="4023360"/>
+            <a:ext cx="11430000" cy="640080"/>
+          </a:xfrm>
+          <a:prstGeom prst="rect">
+            <a:avLst/>
+          </a:prstGeom>
+          <a:solidFill>
+            <a:srgbClr val="222638"/>
+          </a:solidFill>
+          <a:ln>
+            <a:noFill/>
+          </a:ln>
+        </p:spPr>
+        <p:style>
+          <a:lnRef idx="1">
+            <a:schemeClr val="accent1"/>
+          </a:lnRef>
+          <a:fillRef idx="3">
+            <a:schemeClr val="accent1"/>
+          </a:fillRef>
+          <a:effectRef idx="2">
+            <a:schemeClr val="accent1"/>
+          </a:effectRef>
+          <a:fontRef idx="minor">
+            <a:schemeClr val="lt1"/>
+          </a:fontRef>
+        </p:style>
+        <p:txBody>
+          <a:bodyPr rtlCol="0" anchor="ctr"/>
+          <a:lstStyle/>
+          <a:p>
+            <a:pPr algn="ctr"/>
+          </a:p>
+        </p:txBody>
+      </p:sp>
+      <p:sp>
+        <p:nvSpPr>
+          <p:cNvPr id="17" name="TextBox 16"/>
+          <p:cNvSpPr txBox="1"/>
+          <p:nvPr/>
+        </p:nvSpPr>
+        <p:spPr>
+          <a:xfrm>
+            <a:off x="548640" y="4069080"/>
+            <a:ext cx="4114800" cy="548640"/>
+          </a:xfrm>
+          <a:prstGeom prst="rect">
+            <a:avLst/>
+          </a:prstGeom>
+          <a:noFill/>
+        </p:spPr>
+        <p:txBody>
+          <a:bodyPr wrap="square">
+            <a:spAutoFit/>
+          </a:bodyPr>
+          <a:lstStyle/>
+          <a:p>
+            <a:pPr algn="l">
+              <a:spcAft>
+                <a:spcPts val="400"/>
+              </a:spcAft>
+              <a:defRPr sz="2000" b="1">
                 <a:solidFill>
                   <a:srgbClr val="FF6B35"/>
                 </a:solidFill>
@@ -5911,23 +6665,154 @@
               </a:defRPr>
             </a:pPr>
             <a:r>
-              <a:t>▸  Start with one task</a:t>
-            </a:r>
-          </a:p>
-          <a:p>
-            <a:pPr>
-              <a:spcBef>
-                <a:spcPts val="200"/>
-              </a:spcBef>
-              <a:defRPr sz="1800">
-                <a:solidFill>
-                  <a:srgbClr val="BBBBCC"/>
-                </a:solidFill>
-                <a:latin typeface="Calibri"/>
-              </a:defRPr>
-            </a:pPr>
-            <a:r>
-              <a:t>    Pick the most repetitive part of your week. Try AI on it tomorrow.</a:t>
+              <a:t>🚀 Pitch Deck</a:t>
+            </a:r>
+          </a:p>
+        </p:txBody>
+      </p:sp>
+      <p:sp>
+        <p:nvSpPr>
+          <p:cNvPr id="18" name="TextBox 17"/>
+          <p:cNvSpPr txBox="1"/>
+          <p:nvPr/>
+        </p:nvSpPr>
+        <p:spPr>
+          <a:xfrm>
+            <a:off x="4754880" y="4069080"/>
+            <a:ext cx="6858000" cy="548640"/>
+          </a:xfrm>
+          <a:prstGeom prst="rect">
+            <a:avLst/>
+          </a:prstGeom>
+          <a:noFill/>
+        </p:spPr>
+        <p:txBody>
+          <a:bodyPr wrap="square">
+            <a:spAutoFit/>
+          </a:bodyPr>
+          <a:lstStyle/>
+          <a:p>
+            <a:pPr algn="l">
+              <a:spcAft>
+                <a:spcPts val="400"/>
+              </a:spcAft>
+              <a:defRPr sz="1800" b="0">
+                <a:solidFill>
+                  <a:srgbClr val="FFFFFF"/>
+                </a:solidFill>
+                <a:latin typeface="Calibri"/>
+              </a:defRPr>
+            </a:pPr>
+            <a:r>
+              <a:t>One paragraph → 12-slide deck in 7 minutes</a:t>
+            </a:r>
+          </a:p>
+        </p:txBody>
+      </p:sp>
+      <p:sp>
+        <p:nvSpPr>
+          <p:cNvPr id="19" name="Rectangle 18"/>
+          <p:cNvSpPr/>
+          <p:nvPr/>
+        </p:nvSpPr>
+        <p:spPr>
+          <a:xfrm>
+            <a:off x="365760" y="5120640"/>
+            <a:ext cx="11430000" cy="1463040"/>
+          </a:xfrm>
+          <a:prstGeom prst="rect">
+            <a:avLst/>
+          </a:prstGeom>
+          <a:solidFill>
+            <a:srgbClr val="151825"/>
+          </a:solidFill>
+          <a:ln>
+            <a:noFill/>
+          </a:ln>
+        </p:spPr>
+        <p:style>
+          <a:lnRef idx="1">
+            <a:schemeClr val="accent1"/>
+          </a:lnRef>
+          <a:fillRef idx="3">
+            <a:schemeClr val="accent1"/>
+          </a:fillRef>
+          <a:effectRef idx="2">
+            <a:schemeClr val="accent1"/>
+          </a:effectRef>
+          <a:fontRef idx="minor">
+            <a:schemeClr val="lt1"/>
+          </a:fontRef>
+        </p:style>
+        <p:txBody>
+          <a:bodyPr rtlCol="0" anchor="ctr"/>
+          <a:lstStyle/>
+          <a:p>
+            <a:pPr algn="ctr"/>
+          </a:p>
+        </p:txBody>
+      </p:sp>
+      <p:sp>
+        <p:nvSpPr>
+          <p:cNvPr id="20" name="TextBox 19"/>
+          <p:cNvSpPr txBox="1"/>
+          <p:nvPr/>
+        </p:nvSpPr>
+        <p:spPr>
+          <a:xfrm>
+            <a:off x="548640" y="5212080"/>
+            <a:ext cx="10972800" cy="1280160"/>
+          </a:xfrm>
+          <a:prstGeom prst="rect">
+            <a:avLst/>
+          </a:prstGeom>
+          <a:noFill/>
+        </p:spPr>
+        <p:txBody>
+          <a:bodyPr wrap="square">
+            <a:spAutoFit/>
+          </a:bodyPr>
+          <a:lstStyle/>
+          <a:p>
+            <a:pPr algn="l">
+              <a:spcAft>
+                <a:spcPts val="400"/>
+              </a:spcAft>
+              <a:defRPr sz="2600" b="1">
+                <a:solidFill>
+                  <a:srgbClr val="FF6B35"/>
+                </a:solidFill>
+                <a:latin typeface="Calibri"/>
+              </a:defRPr>
+            </a:pPr>
+            <a:r>
+              <a:t>The Big Takeaway</a:t>
+            </a:r>
+          </a:p>
+          <a:p>
+            <a:pPr algn="l">
+              <a:defRPr sz="2000" b="0">
+                <a:solidFill>
+                  <a:srgbClr val="FFFFFF"/>
+                </a:solidFill>
+                <a:latin typeface="Calibri"/>
+              </a:defRPr>
+            </a:pPr>
+            <a:r>
+              <a:t>AI got us 70-80% of the way there in minutes. That last 20% is where YOUR</a:t>
+            </a:r>
+          </a:p>
+          <a:p>
+            <a:pPr algn="l">
+              <a:defRPr sz="2000" b="0">
+                <a:solidFill>
+                  <a:srgbClr val="FFFFFF"/>
+                </a:solidFill>
+                <a:latin typeface="Calibri"/>
+              </a:defRPr>
+            </a:pPr>
+            <a:r>
+              <a:t>expertise, judgement, and human skills come in. AI is the accelerator. You're the driver.</a:t>
             </a:r>
           </a:p>
         </p:txBody>
@@ -5960,50 +6845,14 @@
       <p:grpSpPr/>
       <p:sp>
         <p:nvSpPr>
-          <p:cNvPr id="2" name="TextBox 1"/>
-          <p:cNvSpPr txBox="1"/>
-          <p:nvPr/>
-        </p:nvSpPr>
-        <p:spPr>
-          <a:xfrm>
-            <a:off x="1371600" y="2286000"/>
-            <a:ext cx="9144000" cy="1097280"/>
-          </a:xfrm>
-          <a:prstGeom prst="rect">
-            <a:avLst/>
-          </a:prstGeom>
-          <a:noFill/>
-        </p:spPr>
-        <p:txBody>
-          <a:bodyPr wrap="square">
-            <a:spAutoFit/>
-          </a:bodyPr>
-          <a:lstStyle/>
-          <a:p>
-            <a:pPr algn="ctr">
-              <a:defRPr sz="5400" b="1">
-                <a:solidFill>
-                  <a:srgbClr val="FFFFFF"/>
-                </a:solidFill>
-                <a:latin typeface="Calibri"/>
-              </a:defRPr>
-            </a:pPr>
-            <a:r>
-              <a:t>Questions?</a:t>
-            </a:r>
-          </a:p>
-        </p:txBody>
-      </p:sp>
-      <p:sp>
-        <p:nvSpPr>
-          <p:cNvPr id="3" name="Rectangle 2"/>
+          <p:cNvPr id="2" name="Rectangle 1"/>
           <p:cNvSpPr/>
           <p:nvPr/>
         </p:nvSpPr>
         <p:spPr>
           <a:xfrm>
-            <a:off x="5029200" y="3474720"/>
-            <a:ext cx="2103120" cy="54864"/>
+            <a:off x="0" y="0"/>
+            <a:ext cx="12191695" cy="109728"/>
           </a:xfrm>
           <a:prstGeom prst="rect">
             <a:avLst/>
@@ -6039,14 +6888,14 @@
       </p:sp>
       <p:sp>
         <p:nvSpPr>
-          <p:cNvPr id="4" name="TextBox 3"/>
+          <p:cNvPr id="3" name="TextBox 2"/>
           <p:cNvSpPr txBox="1"/>
           <p:nvPr/>
         </p:nvSpPr>
         <p:spPr>
           <a:xfrm>
-            <a:off x="1371600" y="3840480"/>
-            <a:ext cx="9144000" cy="914400"/>
+            <a:off x="914400" y="1828800"/>
+            <a:ext cx="10058400" cy="1371600"/>
           </a:xfrm>
           <a:prstGeom prst="rect">
             <a:avLst/>
@@ -6060,19 +6909,57 @@
           <a:lstStyle/>
           <a:p>
             <a:pPr algn="ctr">
-              <a:defRPr sz="2000" b="0" i="1">
-                <a:solidFill>
-                  <a:srgbClr val="BBBBCC"/>
-                </a:solidFill>
-                <a:latin typeface="Calibri"/>
-              </a:defRPr>
-            </a:pPr>
-            <a:r>
-              <a:t>"AI won't replace you. But someone using AI might.</a:t>
-            </a:r>
-            <a:br/>
-            <a:r>
-              <a:t>That's why we're here tonight."</a:t>
+              <a:spcAft>
+                <a:spcPts val="400"/>
+              </a:spcAft>
+              <a:defRPr sz="5400" b="1">
+                <a:solidFill>
+                  <a:srgbClr val="FFFFFF"/>
+                </a:solidFill>
+                <a:latin typeface="Calibri"/>
+              </a:defRPr>
+            </a:pPr>
+            <a:r>
+              <a:t>Questions &amp; Answers</a:t>
+            </a:r>
+          </a:p>
+        </p:txBody>
+      </p:sp>
+      <p:sp>
+        <p:nvSpPr>
+          <p:cNvPr id="4" name="TextBox 3"/>
+          <p:cNvSpPr txBox="1"/>
+          <p:nvPr/>
+        </p:nvSpPr>
+        <p:spPr>
+          <a:xfrm>
+            <a:off x="914400" y="3474720"/>
+            <a:ext cx="10058400" cy="914400"/>
+          </a:xfrm>
+          <a:prstGeom prst="rect">
+            <a:avLst/>
+          </a:prstGeom>
+          <a:noFill/>
+        </p:spPr>
+        <p:txBody>
+          <a:bodyPr wrap="square">
+            <a:spAutoFit/>
+          </a:bodyPr>
+          <a:lstStyle/>
+          <a:p>
+            <a:pPr algn="ctr">
+              <a:spcAft>
+                <a:spcPts val="400"/>
+              </a:spcAft>
+              <a:defRPr sz="2200" b="0">
+                <a:solidFill>
+                  <a:srgbClr val="CCCCCC"/>
+                </a:solidFill>
+                <a:latin typeface="Calibri"/>
+              </a:defRPr>
+            </a:pPr>
+            <a:r>
+              <a:t>Ask me anything — about the tools, the prompts, or how to apply this to your business</a:t>
             </a:r>
           </a:p>
         </p:txBody>
@@ -6111,8 +6998,8 @@
         </p:nvSpPr>
         <p:spPr>
           <a:xfrm>
-            <a:off x="731520" y="548640"/>
-            <a:ext cx="73152" cy="548640"/>
+            <a:off x="0" y="0"/>
+            <a:ext cx="12191695" cy="73152"/>
           </a:xfrm>
           <a:prstGeom prst="rect">
             <a:avLst/>
@@ -6154,8 +7041,8 @@
         </p:nvSpPr>
         <p:spPr>
           <a:xfrm>
-            <a:off x="1005840" y="457200"/>
-            <a:ext cx="9144000" cy="822960"/>
+            <a:off x="548640" y="274320"/>
+            <a:ext cx="10972800" cy="640080"/>
           </a:xfrm>
           <a:prstGeom prst="rect">
             <a:avLst/>
@@ -6169,6 +7056,9 @@
           <a:lstStyle/>
           <a:p>
             <a:pPr algn="l">
+              <a:spcAft>
+                <a:spcPts val="400"/>
+              </a:spcAft>
               <a:defRPr sz="3600" b="1">
                 <a:solidFill>
                   <a:srgbClr val="FFFFFF"/>
@@ -6177,21 +7067,64 @@
               </a:defRPr>
             </a:pPr>
             <a:r>
-              <a:t>Before We Start</a:t>
-            </a:r>
-          </a:p>
-        </p:txBody>
-      </p:sp>
-      <p:sp>
-        <p:nvSpPr>
-          <p:cNvPr id="4" name="TextBox 3"/>
+              <a:t>🔧 Setup — What We're Using Today</a:t>
+            </a:r>
+          </a:p>
+        </p:txBody>
+      </p:sp>
+      <p:sp>
+        <p:nvSpPr>
+          <p:cNvPr id="4" name="Rectangle 3"/>
+          <p:cNvSpPr/>
+          <p:nvPr/>
+        </p:nvSpPr>
+        <p:spPr>
+          <a:xfrm>
+            <a:off x="365760" y="1371600"/>
+            <a:ext cx="5303520" cy="2560320"/>
+          </a:xfrm>
+          <a:prstGeom prst="rect">
+            <a:avLst/>
+          </a:prstGeom>
+          <a:solidFill>
+            <a:srgbClr val="222638"/>
+          </a:solidFill>
+          <a:ln>
+            <a:noFill/>
+          </a:ln>
+        </p:spPr>
+        <p:style>
+          <a:lnRef idx="1">
+            <a:schemeClr val="accent1"/>
+          </a:lnRef>
+          <a:fillRef idx="3">
+            <a:schemeClr val="accent1"/>
+          </a:fillRef>
+          <a:effectRef idx="2">
+            <a:schemeClr val="accent1"/>
+          </a:effectRef>
+          <a:fontRef idx="minor">
+            <a:schemeClr val="lt1"/>
+          </a:fontRef>
+        </p:style>
+        <p:txBody>
+          <a:bodyPr rtlCol="0" anchor="ctr"/>
+          <a:lstStyle/>
+          <a:p>
+            <a:pPr algn="ctr"/>
+          </a:p>
+        </p:txBody>
+      </p:sp>
+      <p:sp>
+        <p:nvSpPr>
+          <p:cNvPr id="5" name="TextBox 4"/>
           <p:cNvSpPr txBox="1"/>
           <p:nvPr/>
         </p:nvSpPr>
         <p:spPr>
           <a:xfrm>
-            <a:off x="1005840" y="1280160"/>
-            <a:ext cx="9144000" cy="457200"/>
+            <a:off x="548640" y="1463040"/>
+            <a:ext cx="4937760" cy="2377440"/>
           </a:xfrm>
           <a:prstGeom prst="rect">
             <a:avLst/>
@@ -6205,29 +7138,153 @@
           <a:lstStyle/>
           <a:p>
             <a:pPr algn="l">
+              <a:spcAft>
+                <a:spcPts val="400"/>
+              </a:spcAft>
+              <a:defRPr sz="2400" b="1">
+                <a:solidFill>
+                  <a:srgbClr val="00D4F5"/>
+                </a:solidFill>
+                <a:latin typeface="Calibri"/>
+              </a:defRPr>
+            </a:pPr>
+            <a:r>
+              <a:t>🟣 Claude (claude.ai)</a:t>
+            </a:r>
+          </a:p>
+          <a:p>
+            <a:pPr algn="l">
               <a:defRPr sz="1800" b="0">
                 <a:solidFill>
-                  <a:srgbClr val="BBBBCC"/>
-                </a:solidFill>
-                <a:latin typeface="Calibri"/>
-              </a:defRPr>
-            </a:pPr>
-            <a:r>
-              <a:t>Tools &amp; accounts you'll need to follow along</a:t>
-            </a:r>
-          </a:p>
-        </p:txBody>
-      </p:sp>
-      <p:sp>
-        <p:nvSpPr>
-          <p:cNvPr id="5" name="TextBox 4"/>
+                  <a:srgbClr val="FFFFFF"/>
+                </a:solidFill>
+                <a:latin typeface="Calibri"/>
+              </a:defRPr>
+            </a:pPr>
+            <a:r>
+              <a:t>Used for 4 of 5 use cases</a:t>
+            </a:r>
+          </a:p>
+          <a:p>
+            <a:pPr algn="l">
+              <a:defRPr sz="1600" b="0">
+                <a:solidFill>
+                  <a:srgbClr val="CCCCCC"/>
+                </a:solidFill>
+                <a:latin typeface="Calibri"/>
+              </a:defRPr>
+            </a:pPr>
+            <a:r>
+              <a:t>• Financial Analysis (Excel upload)</a:t>
+            </a:r>
+          </a:p>
+          <a:p>
+            <a:pPr algn="l">
+              <a:defRPr sz="1600" b="0">
+                <a:solidFill>
+                  <a:srgbClr val="CCCCCC"/>
+                </a:solidFill>
+                <a:latin typeface="Calibri"/>
+              </a:defRPr>
+            </a:pPr>
+            <a:r>
+              <a:t>• Contract Drafting</a:t>
+            </a:r>
+          </a:p>
+          <a:p>
+            <a:pPr algn="l">
+              <a:defRPr sz="1600" b="0">
+                <a:solidFill>
+                  <a:srgbClr val="CCCCCC"/>
+                </a:solidFill>
+                <a:latin typeface="Calibri"/>
+              </a:defRPr>
+            </a:pPr>
+            <a:r>
+              <a:t>• Market Research (web search)</a:t>
+            </a:r>
+          </a:p>
+          <a:p>
+            <a:pPr algn="l">
+              <a:defRPr sz="1600" b="0">
+                <a:solidFill>
+                  <a:srgbClr val="CCCCCC"/>
+                </a:solidFill>
+                <a:latin typeface="Calibri"/>
+              </a:defRPr>
+            </a:pPr>
+            <a:r>
+              <a:t>• Pitch Deck (artifacts)</a:t>
+            </a:r>
+          </a:p>
+          <a:p>
+            <a:pPr algn="l">
+              <a:defRPr sz="1400" b="0">
+                <a:solidFill>
+                  <a:srgbClr val="AAAAAA"/>
+                </a:solidFill>
+                <a:latin typeface="Calibri"/>
+              </a:defRPr>
+            </a:pPr>
+            <a:r>
+              <a:t>Free tier available • Pro: £16/mo</a:t>
+            </a:r>
+          </a:p>
+        </p:txBody>
+      </p:sp>
+      <p:sp>
+        <p:nvSpPr>
+          <p:cNvPr id="6" name="Rectangle 5"/>
+          <p:cNvSpPr/>
+          <p:nvPr/>
+        </p:nvSpPr>
+        <p:spPr>
+          <a:xfrm>
+            <a:off x="6035040" y="1371600"/>
+            <a:ext cx="5760720" cy="2560320"/>
+          </a:xfrm>
+          <a:prstGeom prst="rect">
+            <a:avLst/>
+          </a:prstGeom>
+          <a:solidFill>
+            <a:srgbClr val="222638"/>
+          </a:solidFill>
+          <a:ln>
+            <a:noFill/>
+          </a:ln>
+        </p:spPr>
+        <p:style>
+          <a:lnRef idx="1">
+            <a:schemeClr val="accent1"/>
+          </a:lnRef>
+          <a:fillRef idx="3">
+            <a:schemeClr val="accent1"/>
+          </a:fillRef>
+          <a:effectRef idx="2">
+            <a:schemeClr val="accent1"/>
+          </a:effectRef>
+          <a:fontRef idx="minor">
+            <a:schemeClr val="lt1"/>
+          </a:fontRef>
+        </p:style>
+        <p:txBody>
+          <a:bodyPr rtlCol="0" anchor="ctr"/>
+          <a:lstStyle/>
+          <a:p>
+            <a:pPr algn="ctr"/>
+          </a:p>
+        </p:txBody>
+      </p:sp>
+      <p:sp>
+        <p:nvSpPr>
+          <p:cNvPr id="7" name="TextBox 6"/>
           <p:cNvSpPr txBox="1"/>
           <p:nvPr/>
         </p:nvSpPr>
         <p:spPr>
           <a:xfrm>
-            <a:off x="1005840" y="1828800"/>
-            <a:ext cx="10058400" cy="4572000"/>
+            <a:off x="6217920" y="1463040"/>
+            <a:ext cx="5394960" cy="2377440"/>
           </a:xfrm>
           <a:prstGeom prst="rect">
             <a:avLst/>
@@ -6240,128 +7297,228 @@
           </a:bodyPr>
           <a:lstStyle/>
           <a:p>
-            <a:pPr>
+            <a:pPr algn="l">
+              <a:spcAft>
+                <a:spcPts val="400"/>
+              </a:spcAft>
+              <a:defRPr sz="2400" b="1">
+                <a:solidFill>
+                  <a:srgbClr val="44FF44"/>
+                </a:solidFill>
+                <a:latin typeface="Calibri"/>
+              </a:defRPr>
+            </a:pPr>
+            <a:r>
+              <a:t>🟢 ChatGPT (chatgpt.com)</a:t>
+            </a:r>
+          </a:p>
+          <a:p>
+            <a:pPr algn="l">
+              <a:defRPr sz="1800" b="0">
+                <a:solidFill>
+                  <a:srgbClr val="FFFFFF"/>
+                </a:solidFill>
+                <a:latin typeface="Calibri"/>
+              </a:defRPr>
+            </a:pPr>
+            <a:r>
+              <a:t>Used for 1 use case</a:t>
+            </a:r>
+          </a:p>
+          <a:p>
+            <a:pPr algn="l">
+              <a:defRPr sz="1600" b="0">
+                <a:solidFill>
+                  <a:srgbClr val="CCCCCC"/>
+                </a:solidFill>
+                <a:latin typeface="Calibri"/>
+              </a:defRPr>
+            </a:pPr>
+            <a:r>
+              <a:t>• Brand Identity (GPT Image generation)</a:t>
+            </a:r>
+          </a:p>
+          <a:p>
+            <a:pPr algn="l">
+              <a:defRPr sz="800" b="0">
+                <a:solidFill>
+                  <a:srgbClr val="FFFFFF"/>
+                </a:solidFill>
+                <a:latin typeface="Calibri"/>
+              </a:defRPr>
+            </a:pPr>
+          </a:p>
+          <a:p>
+            <a:pPr algn="l">
+              <a:defRPr sz="1600" b="0">
+                <a:solidFill>
+                  <a:srgbClr val="CCCCCC"/>
+                </a:solidFill>
+                <a:latin typeface="Calibri"/>
+              </a:defRPr>
+            </a:pPr>
+            <a:r>
+              <a:t>Image generation is ChatGPT's strength</a:t>
+            </a:r>
+          </a:p>
+          <a:p>
+            <a:pPr algn="l">
+              <a:defRPr sz="1600" b="1">
+                <a:solidFill>
+                  <a:srgbClr val="44FF44"/>
+                </a:solidFill>
+                <a:latin typeface="Calibri"/>
+              </a:defRPr>
+            </a:pPr>
+            <a:r>
+              <a:t>Available on free tier!</a:t>
+            </a:r>
+          </a:p>
+        </p:txBody>
+      </p:sp>
+      <p:sp>
+        <p:nvSpPr>
+          <p:cNvPr id="8" name="Rectangle 7"/>
+          <p:cNvSpPr/>
+          <p:nvPr/>
+        </p:nvSpPr>
+        <p:spPr>
+          <a:xfrm>
+            <a:off x="365760" y="4206240"/>
+            <a:ext cx="11430000" cy="2377440"/>
+          </a:xfrm>
+          <a:prstGeom prst="rect">
+            <a:avLst/>
+          </a:prstGeom>
+          <a:solidFill>
+            <a:srgbClr val="2A2E42"/>
+          </a:solidFill>
+          <a:ln>
+            <a:noFill/>
+          </a:ln>
+        </p:spPr>
+        <p:style>
+          <a:lnRef idx="1">
+            <a:schemeClr val="accent1"/>
+          </a:lnRef>
+          <a:fillRef idx="3">
+            <a:schemeClr val="accent1"/>
+          </a:fillRef>
+          <a:effectRef idx="2">
+            <a:schemeClr val="accent1"/>
+          </a:effectRef>
+          <a:fontRef idx="minor">
+            <a:schemeClr val="lt1"/>
+          </a:fontRef>
+        </p:style>
+        <p:txBody>
+          <a:bodyPr rtlCol="0" anchor="ctr"/>
+          <a:lstStyle/>
+          <a:p>
+            <a:pPr algn="ctr"/>
+          </a:p>
+        </p:txBody>
+      </p:sp>
+      <p:sp>
+        <p:nvSpPr>
+          <p:cNvPr id="9" name="TextBox 8"/>
+          <p:cNvSpPr txBox="1"/>
+          <p:nvPr/>
+        </p:nvSpPr>
+        <p:spPr>
+          <a:xfrm>
+            <a:off x="548640" y="4297680"/>
+            <a:ext cx="10972800" cy="2194560"/>
+          </a:xfrm>
+          <a:prstGeom prst="rect">
+            <a:avLst/>
+          </a:prstGeom>
+          <a:noFill/>
+        </p:spPr>
+        <p:txBody>
+          <a:bodyPr wrap="square">
+            <a:spAutoFit/>
+          </a:bodyPr>
+          <a:lstStyle/>
+          <a:p>
+            <a:pPr algn="l">
+              <a:spcAft>
+                <a:spcPts val="400"/>
+              </a:spcAft>
               <a:defRPr sz="2200" b="1">
                 <a:solidFill>
-                  <a:srgbClr val="FFFFFF"/>
-                </a:solidFill>
-                <a:latin typeface="Calibri"/>
-              </a:defRPr>
-            </a:pPr>
-            <a:r>
-              <a:t>▸ Claude (claude.ai)</a:t>
-            </a:r>
-          </a:p>
-          <a:p>
-            <a:pPr>
-              <a:spcBef>
-                <a:spcPts val="200"/>
-              </a:spcBef>
-              <a:defRPr sz="1800">
-                <a:solidFill>
-                  <a:srgbClr val="BBBBCC"/>
-                </a:solidFill>
-                <a:latin typeface="Calibri"/>
-              </a:defRPr>
-            </a:pPr>
-            <a:r>
-              <a:t>    Our primary tool — logged in with a fresh chat</a:t>
-            </a:r>
-          </a:p>
-          <a:p>
-            <a:pPr>
-              <a:spcBef>
-                <a:spcPts val="1000"/>
-              </a:spcBef>
-              <a:defRPr sz="2200" b="1">
-                <a:solidFill>
-                  <a:srgbClr val="FFFFFF"/>
-                </a:solidFill>
-                <a:latin typeface="Calibri"/>
-              </a:defRPr>
-            </a:pPr>
-            <a:r>
-              <a:t>▸ Perplexity Pro</a:t>
-            </a:r>
-          </a:p>
-          <a:p>
-            <a:pPr>
-              <a:spcBef>
-                <a:spcPts val="200"/>
-              </a:spcBef>
-              <a:defRPr sz="1800">
-                <a:solidFill>
-                  <a:srgbClr val="BBBBCC"/>
-                </a:solidFill>
-                <a:latin typeface="Calibri"/>
-              </a:defRPr>
-            </a:pPr>
-            <a:r>
-              <a:t>    For research with cited sources</a:t>
-            </a:r>
-          </a:p>
-          <a:p>
-            <a:pPr>
-              <a:spcBef>
-                <a:spcPts val="1000"/>
-              </a:spcBef>
-              <a:defRPr sz="2200" b="1">
-                <a:solidFill>
-                  <a:srgbClr val="FFFFFF"/>
-                </a:solidFill>
-                <a:latin typeface="Calibri"/>
-              </a:defRPr>
-            </a:pPr>
-            <a:r>
-              <a:t>▸ Gamma.app</a:t>
-            </a:r>
-          </a:p>
-          <a:p>
-            <a:pPr>
-              <a:spcBef>
-                <a:spcPts val="200"/>
-              </a:spcBef>
-              <a:defRPr sz="1800">
-                <a:solidFill>
-                  <a:srgbClr val="BBBBCC"/>
-                </a:solidFill>
-                <a:latin typeface="Calibri"/>
-              </a:defRPr>
-            </a:pPr>
-            <a:r>
-              <a:t>    To turn text into designed slides</a:t>
-            </a:r>
-          </a:p>
-          <a:p>
-            <a:pPr>
-              <a:spcBef>
-                <a:spcPts val="1000"/>
-              </a:spcBef>
-              <a:defRPr sz="2200" b="1">
-                <a:solidFill>
-                  <a:srgbClr val="FFFFFF"/>
-                </a:solidFill>
-                <a:latin typeface="Calibri"/>
-              </a:defRPr>
-            </a:pPr>
-            <a:r>
-              <a:t>▸ A sense of adventure</a:t>
-            </a:r>
-          </a:p>
-          <a:p>
-            <a:pPr>
-              <a:spcBef>
-                <a:spcPts val="200"/>
-              </a:spcBef>
-              <a:defRPr sz="1800">
-                <a:solidFill>
-                  <a:srgbClr val="BBBBCC"/>
-                </a:solidFill>
-                <a:latin typeface="Calibri"/>
-              </a:defRPr>
-            </a:pPr>
-            <a:r>
-              <a:t>    Everything is live — things might break!</a:t>
+                  <a:srgbClr val="FF6B35"/>
+                </a:solidFill>
+                <a:latin typeface="Calibri"/>
+              </a:defRPr>
+            </a:pPr>
+            <a:r>
+              <a:t>📋 Today's Use Cases</a:t>
+            </a:r>
+          </a:p>
+          <a:p>
+            <a:pPr algn="l">
+              <a:defRPr sz="1400" b="0">
+                <a:solidFill>
+                  <a:srgbClr val="FFFFFF"/>
+                </a:solidFill>
+                <a:latin typeface="Calibri"/>
+              </a:defRPr>
+            </a:pPr>
+            <a:r>
+              <a:t>1. Financial Analysis  |  Upload messy Excel → clean data, ratios, board summary  |  Claude  |  7 min</a:t>
+            </a:r>
+          </a:p>
+          <a:p>
+            <a:pPr algn="l">
+              <a:defRPr sz="1400" b="0">
+                <a:solidFill>
+                  <a:srgbClr val="FFFFFF"/>
+                </a:solidFill>
+                <a:latin typeface="Calibri"/>
+              </a:defRPr>
+            </a:pPr>
+            <a:r>
+              <a:t>2. Contract Drafting  |  Brief → full professional services agreement  |  Claude  |  7 min</a:t>
+            </a:r>
+          </a:p>
+          <a:p>
+            <a:pPr algn="l">
+              <a:defRPr sz="1400" b="0">
+                <a:solidFill>
+                  <a:srgbClr val="FFFFFF"/>
+                </a:solidFill>
+                <a:latin typeface="Calibri"/>
+              </a:defRPr>
+            </a:pPr>
+            <a:r>
+              <a:t>3. Brand Identity  |  Text → logo, colours, brand guidelines  |  ChatGPT + Claude  |  6 min</a:t>
+            </a:r>
+          </a:p>
+          <a:p>
+            <a:pPr algn="l">
+              <a:defRPr sz="1400" b="0">
+                <a:solidFill>
+                  <a:srgbClr val="FFFFFF"/>
+                </a:solidFill>
+                <a:latin typeface="Calibri"/>
+              </a:defRPr>
+            </a:pPr>
+            <a:r>
+              <a:t>4. Market Research  |  From scratch → sourced report with citations  |  Claude (web search)  |  8 min</a:t>
+            </a:r>
+          </a:p>
+          <a:p>
+            <a:pPr algn="l">
+              <a:defRPr sz="1400" b="0">
+                <a:solidFill>
+                  <a:srgbClr val="FFFFFF"/>
+                </a:solidFill>
+                <a:latin typeface="Calibri"/>
+              </a:defRPr>
+            </a:pPr>
+            <a:r>
+              <a:t>5. Pitch Deck  |  One paragraph → 12-slide investor deck  |  Claude (artifacts)  |  7 min</a:t>
             </a:r>
           </a:p>
         </p:txBody>
@@ -6400,8 +7557,8 @@
         </p:nvSpPr>
         <p:spPr>
           <a:xfrm>
-            <a:off x="731520" y="548640"/>
-            <a:ext cx="73152" cy="548640"/>
+            <a:off x="0" y="0"/>
+            <a:ext cx="12191695" cy="73152"/>
           </a:xfrm>
           <a:prstGeom prst="rect">
             <a:avLst/>
@@ -6443,8 +7600,8 @@
         </p:nvSpPr>
         <p:spPr>
           <a:xfrm>
-            <a:off x="1005840" y="457200"/>
-            <a:ext cx="9144000" cy="822960"/>
+            <a:off x="548640" y="274320"/>
+            <a:ext cx="10972800" cy="640080"/>
           </a:xfrm>
           <a:prstGeom prst="rect">
             <a:avLst/>
@@ -6458,6 +7615,9 @@
           <a:lstStyle/>
           <a:p>
             <a:pPr algn="l">
+              <a:spcAft>
+                <a:spcPts val="400"/>
+              </a:spcAft>
               <a:defRPr sz="3600" b="1">
                 <a:solidFill>
                   <a:srgbClr val="FFFFFF"/>
@@ -6466,21 +7626,64 @@
               </a:defRPr>
             </a:pPr>
             <a:r>
-              <a:t>Resources &amp; Next Steps</a:t>
-            </a:r>
-          </a:p>
-        </p:txBody>
-      </p:sp>
-      <p:sp>
-        <p:nvSpPr>
-          <p:cNvPr id="4" name="TextBox 3"/>
+              <a:t>📚 Resources — Get Started Tonight</a:t>
+            </a:r>
+          </a:p>
+        </p:txBody>
+      </p:sp>
+      <p:sp>
+        <p:nvSpPr>
+          <p:cNvPr id="4" name="Rectangle 3"/>
+          <p:cNvSpPr/>
+          <p:nvPr/>
+        </p:nvSpPr>
+        <p:spPr>
+          <a:xfrm>
+            <a:off x="365760" y="1371600"/>
+            <a:ext cx="5303520" cy="2743200"/>
+          </a:xfrm>
+          <a:prstGeom prst="rect">
+            <a:avLst/>
+          </a:prstGeom>
+          <a:solidFill>
+            <a:srgbClr val="222638"/>
+          </a:solidFill>
+          <a:ln>
+            <a:noFill/>
+          </a:ln>
+        </p:spPr>
+        <p:style>
+          <a:lnRef idx="1">
+            <a:schemeClr val="accent1"/>
+          </a:lnRef>
+          <a:fillRef idx="3">
+            <a:schemeClr val="accent1"/>
+          </a:fillRef>
+          <a:effectRef idx="2">
+            <a:schemeClr val="accent1"/>
+          </a:effectRef>
+          <a:fontRef idx="minor">
+            <a:schemeClr val="lt1"/>
+          </a:fontRef>
+        </p:style>
+        <p:txBody>
+          <a:bodyPr rtlCol="0" anchor="ctr"/>
+          <a:lstStyle/>
+          <a:p>
+            <a:pPr algn="ctr"/>
+          </a:p>
+        </p:txBody>
+      </p:sp>
+      <p:sp>
+        <p:nvSpPr>
+          <p:cNvPr id="5" name="TextBox 4"/>
           <p:cNvSpPr txBox="1"/>
           <p:nvPr/>
         </p:nvSpPr>
         <p:spPr>
           <a:xfrm>
-            <a:off x="1005840" y="1463040"/>
-            <a:ext cx="9144000" cy="5029200"/>
+            <a:off x="548640" y="1463040"/>
+            <a:ext cx="4937760" cy="2560320"/>
           </a:xfrm>
           <a:prstGeom prst="rect">
             <a:avLst/>
@@ -6493,10 +7696,10 @@
           </a:bodyPr>
           <a:lstStyle/>
           <a:p>
-            <a:pPr>
-              <a:spcBef>
-                <a:spcPts val="2000"/>
-              </a:spcBef>
+            <a:pPr algn="l">
+              <a:spcAft>
+                <a:spcPts val="400"/>
+              </a:spcAft>
               <a:defRPr sz="2200" b="1">
                 <a:solidFill>
                   <a:srgbClr val="FF6B35"/>
@@ -6505,205 +7708,116 @@
               </a:defRPr>
             </a:pPr>
             <a:r>
-              <a:t>Try Tonight (Free)</a:t>
-            </a:r>
-          </a:p>
-          <a:p>
-            <a:pPr>
-              <a:spcBef>
-                <a:spcPts val="800"/>
-              </a:spcBef>
-              <a:defRPr sz="2000" b="1">
-                <a:solidFill>
-                  <a:srgbClr val="00D4F5"/>
-                </a:solidFill>
-                <a:latin typeface="Calibri"/>
-              </a:defRPr>
-            </a:pPr>
-            <a:r>
-              <a:t>▸  claude.ai</a:t>
-            </a:r>
-          </a:p>
-          <a:p>
-            <a:pPr>
-              <a:spcBef>
-                <a:spcPts val="200"/>
-              </a:spcBef>
-              <a:defRPr sz="1600">
-                <a:solidFill>
-                  <a:srgbClr val="BBBBCC"/>
-                </a:solidFill>
-                <a:latin typeface="Calibri"/>
-              </a:defRPr>
-            </a:pPr>
-            <a:r>
-              <a:t>    Best for documents, analysis, and reasoning</a:t>
-            </a:r>
-          </a:p>
-          <a:p>
-            <a:pPr>
-              <a:spcBef>
-                <a:spcPts val="800"/>
-              </a:spcBef>
-              <a:defRPr sz="2000" b="1">
-                <a:solidFill>
-                  <a:srgbClr val="00D4F5"/>
-                </a:solidFill>
-                <a:latin typeface="Calibri"/>
-              </a:defRPr>
-            </a:pPr>
-            <a:r>
-              <a:t>▸  chatgpt.com</a:t>
-            </a:r>
-          </a:p>
-          <a:p>
-            <a:pPr>
-              <a:spcBef>
-                <a:spcPts val="200"/>
-              </a:spcBef>
-              <a:defRPr sz="1600">
-                <a:solidFill>
-                  <a:srgbClr val="BBBBCC"/>
-                </a:solidFill>
-                <a:latin typeface="Calibri"/>
-              </a:defRPr>
-            </a:pPr>
-            <a:r>
-              <a:t>    Best all-rounder, image generation</a:t>
-            </a:r>
-          </a:p>
-          <a:p>
-            <a:pPr>
-              <a:spcBef>
-                <a:spcPts val="800"/>
-              </a:spcBef>
-              <a:defRPr sz="2000" b="1">
-                <a:solidFill>
-                  <a:srgbClr val="00D4F5"/>
-                </a:solidFill>
-                <a:latin typeface="Calibri"/>
-              </a:defRPr>
-            </a:pPr>
-            <a:r>
-              <a:t>▸  perplexity.ai</a:t>
-            </a:r>
-          </a:p>
-          <a:p>
-            <a:pPr>
-              <a:spcBef>
-                <a:spcPts val="200"/>
-              </a:spcBef>
-              <a:defRPr sz="1600">
-                <a:solidFill>
-                  <a:srgbClr val="BBBBCC"/>
-                </a:solidFill>
-                <a:latin typeface="Calibri"/>
-              </a:defRPr>
-            </a:pPr>
-            <a:r>
-              <a:t>    Research with cited sources</a:t>
-            </a:r>
-          </a:p>
-          <a:p>
-            <a:pPr>
-              <a:spcBef>
-                <a:spcPts val="800"/>
-              </a:spcBef>
-              <a:defRPr sz="2000" b="1">
-                <a:solidFill>
-                  <a:srgbClr val="00D4F5"/>
-                </a:solidFill>
-                <a:latin typeface="Calibri"/>
-              </a:defRPr>
-            </a:pPr>
-            <a:r>
-              <a:t>▸  gamma.app</a:t>
-            </a:r>
-          </a:p>
-          <a:p>
-            <a:pPr>
-              <a:spcBef>
-                <a:spcPts val="200"/>
-              </a:spcBef>
-              <a:defRPr sz="1600">
-                <a:solidFill>
-                  <a:srgbClr val="BBBBCC"/>
-                </a:solidFill>
-                <a:latin typeface="Calibri"/>
-              </a:defRPr>
-            </a:pPr>
-            <a:r>
-              <a:t>    Turn text into designed presentations</a:t>
-            </a:r>
-          </a:p>
-          <a:p>
-            <a:pPr>
-              <a:spcBef>
-                <a:spcPts val="800"/>
-              </a:spcBef>
-              <a:defRPr sz="800"/>
-            </a:pPr>
-          </a:p>
-          <a:p>
-            <a:pPr>
-              <a:spcBef>
-                <a:spcPts val="2000"/>
-              </a:spcBef>
-              <a:defRPr sz="2200" b="1">
-                <a:solidFill>
-                  <a:srgbClr val="FF6B35"/>
-                </a:solidFill>
-                <a:latin typeface="Calibri"/>
-              </a:defRPr>
-            </a:pPr>
-            <a:r>
-              <a:t>Get in Touch</a:t>
-            </a:r>
-          </a:p>
-          <a:p>
-            <a:pPr>
-              <a:spcBef>
-                <a:spcPts val="800"/>
-              </a:spcBef>
-              <a:defRPr sz="2000" b="1">
-                <a:solidFill>
-                  <a:srgbClr val="00D4F5"/>
-                </a:solidFill>
-                <a:latin typeface="Calibri"/>
-              </a:defRPr>
-            </a:pPr>
-            <a:r>
-              <a:t>▸  Enriched Solutions</a:t>
-            </a:r>
-          </a:p>
-          <a:p>
-            <a:pPr>
-              <a:spcBef>
-                <a:spcPts val="200"/>
-              </a:spcBef>
-              <a:defRPr sz="1600">
-                <a:solidFill>
-                  <a:srgbClr val="BBBBCC"/>
-                </a:solidFill>
-                <a:latin typeface="Calibri"/>
-              </a:defRPr>
-            </a:pPr>
-            <a:r>
-              <a:t>    enrichedsolutions.co.uk</a:t>
-            </a:r>
-          </a:p>
-        </p:txBody>
-      </p:sp>
-      <p:sp>
-        <p:nvSpPr>
-          <p:cNvPr id="5" name="TextBox 4"/>
+              <a:t>🔧 Tools We Used</a:t>
+            </a:r>
+          </a:p>
+          <a:p>
+            <a:pPr algn="l">
+              <a:defRPr sz="1600" b="0">
+                <a:solidFill>
+                  <a:srgbClr val="FFFFFF"/>
+                </a:solidFill>
+                <a:latin typeface="Calibri"/>
+              </a:defRPr>
+            </a:pPr>
+            <a:r>
+              <a:t>Claude → claude.ai (free / Pro £16/mo)</a:t>
+            </a:r>
+          </a:p>
+          <a:p>
+            <a:pPr algn="l">
+              <a:defRPr sz="1600" b="0">
+                <a:solidFill>
+                  <a:srgbClr val="FFFFFF"/>
+                </a:solidFill>
+                <a:latin typeface="Calibri"/>
+              </a:defRPr>
+            </a:pPr>
+            <a:r>
+              <a:t>ChatGPT → chatgpt.com (free / Plus £16/mo)</a:t>
+            </a:r>
+          </a:p>
+          <a:p>
+            <a:pPr algn="l">
+              <a:defRPr sz="1600" b="0">
+                <a:solidFill>
+                  <a:srgbClr val="FFFFFF"/>
+                </a:solidFill>
+                <a:latin typeface="Calibri"/>
+              </a:defRPr>
+            </a:pPr>
+            <a:r>
+              <a:t>Perplexity → perplexity.ai (free / Pro £16/mo)</a:t>
+            </a:r>
+          </a:p>
+          <a:p>
+            <a:pPr algn="l">
+              <a:defRPr sz="1600" b="0">
+                <a:solidFill>
+                  <a:srgbClr val="FFFFFF"/>
+                </a:solidFill>
+                <a:latin typeface="Calibri"/>
+              </a:defRPr>
+            </a:pPr>
+            <a:r>
+              <a:t>Gemini → gemini.google.com (free / Advanced £16/mo)</a:t>
+            </a:r>
+          </a:p>
+        </p:txBody>
+      </p:sp>
+      <p:sp>
+        <p:nvSpPr>
+          <p:cNvPr id="6" name="Rectangle 5"/>
+          <p:cNvSpPr/>
+          <p:nvPr/>
+        </p:nvSpPr>
+        <p:spPr>
+          <a:xfrm>
+            <a:off x="6035040" y="1371600"/>
+            <a:ext cx="5760720" cy="2743200"/>
+          </a:xfrm>
+          <a:prstGeom prst="rect">
+            <a:avLst/>
+          </a:prstGeom>
+          <a:solidFill>
+            <a:srgbClr val="222638"/>
+          </a:solidFill>
+          <a:ln>
+            <a:noFill/>
+          </a:ln>
+        </p:spPr>
+        <p:style>
+          <a:lnRef idx="1">
+            <a:schemeClr val="accent1"/>
+          </a:lnRef>
+          <a:fillRef idx="3">
+            <a:schemeClr val="accent1"/>
+          </a:fillRef>
+          <a:effectRef idx="2">
+            <a:schemeClr val="accent1"/>
+          </a:effectRef>
+          <a:fontRef idx="minor">
+            <a:schemeClr val="lt1"/>
+          </a:fontRef>
+        </p:style>
+        <p:txBody>
+          <a:bodyPr rtlCol="0" anchor="ctr"/>
+          <a:lstStyle/>
+          <a:p>
+            <a:pPr algn="ctr"/>
+          </a:p>
+        </p:txBody>
+      </p:sp>
+      <p:sp>
+        <p:nvSpPr>
+          <p:cNvPr id="7" name="TextBox 6"/>
           <p:cNvSpPr txBox="1"/>
           <p:nvPr/>
         </p:nvSpPr>
         <p:spPr>
           <a:xfrm>
-            <a:off x="1371600" y="5943600"/>
-            <a:ext cx="9144000" cy="457200"/>
+            <a:off x="6217920" y="1463040"/>
+            <a:ext cx="5394960" cy="2560320"/>
           </a:xfrm>
           <a:prstGeom prst="rect">
             <a:avLst/>
@@ -6716,16 +7830,215 @@
           </a:bodyPr>
           <a:lstStyle/>
           <a:p>
+            <a:pPr algn="l">
+              <a:spcAft>
+                <a:spcPts val="400"/>
+              </a:spcAft>
+              <a:defRPr sz="2200" b="1">
+                <a:solidFill>
+                  <a:srgbClr val="FF6B35"/>
+                </a:solidFill>
+                <a:latin typeface="Calibri"/>
+              </a:defRPr>
+            </a:pPr>
+            <a:r>
+              <a:t>🚀 Workflow &amp; Automation</a:t>
+            </a:r>
+          </a:p>
+          <a:p>
+            <a:pPr algn="l">
+              <a:defRPr sz="1600" b="0">
+                <a:solidFill>
+                  <a:srgbClr val="FFFFFF"/>
+                </a:solidFill>
+                <a:latin typeface="Calibri"/>
+              </a:defRPr>
+            </a:pPr>
+            <a:r>
+              <a:t>Make.com → make.com (easiest start)</a:t>
+            </a:r>
+          </a:p>
+          <a:p>
+            <a:pPr algn="l">
+              <a:defRPr sz="1600" b="0">
+                <a:solidFill>
+                  <a:srgbClr val="FFFFFF"/>
+                </a:solidFill>
+                <a:latin typeface="Calibri"/>
+              </a:defRPr>
+            </a:pPr>
+            <a:r>
+              <a:t>Zapier → zapier.com (most integrations)</a:t>
+            </a:r>
+          </a:p>
+          <a:p>
+            <a:pPr algn="l">
+              <a:defRPr sz="1600" b="0">
+                <a:solidFill>
+                  <a:srgbClr val="FFFFFF"/>
+                </a:solidFill>
+                <a:latin typeface="Calibri"/>
+              </a:defRPr>
+            </a:pPr>
+            <a:r>
+              <a:t>Power Automate → built into M365</a:t>
+            </a:r>
+          </a:p>
+          <a:p>
+            <a:pPr algn="l">
+              <a:defRPr sz="1600" b="0">
+                <a:solidFill>
+                  <a:srgbClr val="FFFFFF"/>
+                </a:solidFill>
+                <a:latin typeface="Calibri"/>
+              </a:defRPr>
+            </a:pPr>
+            <a:r>
+              <a:t>n8n → n8n.io (open-source, self-hosted)</a:t>
+            </a:r>
+          </a:p>
+        </p:txBody>
+      </p:sp>
+      <p:sp>
+        <p:nvSpPr>
+          <p:cNvPr id="8" name="Rectangle 7"/>
+          <p:cNvSpPr/>
+          <p:nvPr/>
+        </p:nvSpPr>
+        <p:spPr>
+          <a:xfrm>
+            <a:off x="365760" y="4389120"/>
+            <a:ext cx="11430000" cy="2194560"/>
+          </a:xfrm>
+          <a:prstGeom prst="rect">
+            <a:avLst/>
+          </a:prstGeom>
+          <a:solidFill>
+            <a:srgbClr val="2A2E42"/>
+          </a:solidFill>
+          <a:ln>
+            <a:noFill/>
+          </a:ln>
+        </p:spPr>
+        <p:style>
+          <a:lnRef idx="1">
+            <a:schemeClr val="accent1"/>
+          </a:lnRef>
+          <a:fillRef idx="3">
+            <a:schemeClr val="accent1"/>
+          </a:fillRef>
+          <a:effectRef idx="2">
+            <a:schemeClr val="accent1"/>
+          </a:effectRef>
+          <a:fontRef idx="minor">
+            <a:schemeClr val="lt1"/>
+          </a:fontRef>
+        </p:style>
+        <p:txBody>
+          <a:bodyPr rtlCol="0" anchor="ctr"/>
+          <a:lstStyle/>
+          <a:p>
+            <a:pPr algn="ctr"/>
+          </a:p>
+        </p:txBody>
+      </p:sp>
+      <p:sp>
+        <p:nvSpPr>
+          <p:cNvPr id="9" name="TextBox 8"/>
+          <p:cNvSpPr txBox="1"/>
+          <p:nvPr/>
+        </p:nvSpPr>
+        <p:spPr>
+          <a:xfrm>
+            <a:off x="548640" y="4480560"/>
+            <a:ext cx="10972800" cy="2011680"/>
+          </a:xfrm>
+          <a:prstGeom prst="rect">
+            <a:avLst/>
+          </a:prstGeom>
+          <a:noFill/>
+        </p:spPr>
+        <p:txBody>
+          <a:bodyPr wrap="square">
+            <a:spAutoFit/>
+          </a:bodyPr>
+          <a:lstStyle/>
+          <a:p>
+            <a:pPr algn="l">
+              <a:spcAft>
+                <a:spcPts val="400"/>
+              </a:spcAft>
+              <a:defRPr sz="2400" b="1">
+                <a:solidFill>
+                  <a:srgbClr val="FF6B35"/>
+                </a:solidFill>
+                <a:latin typeface="Calibri"/>
+              </a:defRPr>
+            </a:pPr>
+            <a:r>
+              <a:t>💡 My #1 Recommendation</a:t>
+            </a:r>
+          </a:p>
+          <a:p>
+            <a:pPr algn="l">
+              <a:defRPr sz="1800" b="0">
+                <a:solidFill>
+                  <a:srgbClr val="FFFFFF"/>
+                </a:solidFill>
+                <a:latin typeface="Calibri"/>
+              </a:defRPr>
+            </a:pPr>
+            <a:r>
+              <a:t>Spend £16 on Claude Pro for one month. Use it for EVERYTHING — emails, analysis,</a:t>
+            </a:r>
+          </a:p>
+          <a:p>
+            <a:pPr algn="l">
+              <a:defRPr sz="1800" b="0">
+                <a:solidFill>
+                  <a:srgbClr val="FFFFFF"/>
+                </a:solidFill>
+                <a:latin typeface="Calibri"/>
+              </a:defRPr>
+            </a:pPr>
+            <a:r>
+              <a:t>contracts, research. If after a month you don't think it's worth it, cancel.</a:t>
+            </a:r>
+          </a:p>
+          <a:p>
+            <a:pPr algn="l">
+              <a:defRPr sz="1800" b="1">
+                <a:solidFill>
+                  <a:srgbClr val="00D4F5"/>
+                </a:solidFill>
+                <a:latin typeface="Calibri"/>
+              </a:defRPr>
+            </a:pPr>
+            <a:r>
+              <a:t>I've never met anyone who's cancelled.</a:t>
+            </a:r>
+          </a:p>
+          <a:p>
+            <a:pPr algn="l">
+              <a:defRPr sz="1200" b="0">
+                <a:solidFill>
+                  <a:srgbClr val="FFFFFF"/>
+                </a:solidFill>
+                <a:latin typeface="Calibri"/>
+              </a:defRPr>
+            </a:pPr>
+          </a:p>
+          <a:p>
             <a:pPr algn="ctr">
-              <a:defRPr sz="1400" b="0" i="1">
-                <a:solidFill>
-                  <a:srgbClr val="888899"/>
-                </a:solidFill>
-                <a:latin typeface="Calibri"/>
-              </a:defRPr>
-            </a:pPr>
-            <a:r>
-              <a:t>"You cannot change the wind, but working together, we can adjust the sails"</a:t>
+              <a:defRPr sz="1600" b="0">
+                <a:solidFill>
+                  <a:srgbClr val="AAAAAA"/>
+                </a:solidFill>
+                <a:latin typeface="Calibri"/>
+              </a:defRPr>
+            </a:pPr>
+            <a:r>
+              <a:t>Enriched Solutions  |  enrichedsolutions.co.uk  |  Ali</a:t>
             </a:r>
           </a:p>
         </p:txBody>
@@ -6764,14 +8077,14 @@
         </p:nvSpPr>
         <p:spPr>
           <a:xfrm>
-            <a:off x="731520" y="548640"/>
-            <a:ext cx="73152" cy="548640"/>
+            <a:off x="0" y="0"/>
+            <a:ext cx="12191695" cy="73152"/>
           </a:xfrm>
           <a:prstGeom prst="rect">
             <a:avLst/>
           </a:prstGeom>
           <a:solidFill>
-            <a:srgbClr val="FF6B35"/>
+            <a:srgbClr val="00D4F5"/>
           </a:solidFill>
           <a:ln>
             <a:noFill/>
@@ -6807,8 +8120,8 @@
         </p:nvSpPr>
         <p:spPr>
           <a:xfrm>
-            <a:off x="1005840" y="457200"/>
-            <a:ext cx="9144000" cy="822960"/>
+            <a:off x="548640" y="274320"/>
+            <a:ext cx="10972800" cy="640080"/>
           </a:xfrm>
           <a:prstGeom prst="rect">
             <a:avLst/>
@@ -6822,6 +8135,9 @@
           <a:lstStyle/>
           <a:p>
             <a:pPr algn="l">
+              <a:spcAft>
+                <a:spcPts val="400"/>
+              </a:spcAft>
               <a:defRPr sz="3600" b="1">
                 <a:solidFill>
                   <a:srgbClr val="FFFFFF"/>
@@ -6830,7 +8146,7 @@
               </a:defRPr>
             </a:pPr>
             <a:r>
-              <a:t>Use Case 1: Financial Analysis</a:t>
+              <a:t>📊 Use Case 1: Financial Analysis</a:t>
             </a:r>
           </a:p>
         </p:txBody>
@@ -6843,8 +8159,8 @@
         </p:nvSpPr>
         <p:spPr>
           <a:xfrm>
-            <a:off x="1005840" y="1280160"/>
-            <a:ext cx="9144000" cy="457200"/>
+            <a:off x="548640" y="914400"/>
+            <a:ext cx="10972800" cy="457200"/>
           </a:xfrm>
           <a:prstGeom prst="rect">
             <a:avLst/>
@@ -6858,29 +8174,75 @@
           <a:lstStyle/>
           <a:p>
             <a:pPr algn="l">
+              <a:spcAft>
+                <a:spcPts val="400"/>
+              </a:spcAft>
               <a:defRPr sz="1800" b="0">
                 <a:solidFill>
-                  <a:srgbClr val="BBBBCC"/>
-                </a:solidFill>
-                <a:latin typeface="Calibri"/>
-              </a:defRPr>
-            </a:pPr>
-            <a:r>
-              <a:t>📊  Turn messy financials into an executive summary</a:t>
-            </a:r>
-          </a:p>
-        </p:txBody>
-      </p:sp>
-      <p:sp>
-        <p:nvSpPr>
-          <p:cNvPr id="5" name="TextBox 4"/>
+                  <a:srgbClr val="CCCCCC"/>
+                </a:solidFill>
+                <a:latin typeface="Calibri"/>
+              </a:defRPr>
+            </a:pPr>
+            <a:r>
+              <a:t>GreenPulse Ltd — Messy spreadsheet → Board-ready report</a:t>
+            </a:r>
+          </a:p>
+        </p:txBody>
+      </p:sp>
+      <p:sp>
+        <p:nvSpPr>
+          <p:cNvPr id="5" name="Rectangle 4"/>
+          <p:cNvSpPr/>
+          <p:nvPr/>
+        </p:nvSpPr>
+        <p:spPr>
+          <a:xfrm>
+            <a:off x="365760" y="1463040"/>
+            <a:ext cx="11430000" cy="2286000"/>
+          </a:xfrm>
+          <a:prstGeom prst="rect">
+            <a:avLst/>
+          </a:prstGeom>
+          <a:solidFill>
+            <a:srgbClr val="222638"/>
+          </a:solidFill>
+          <a:ln>
+            <a:noFill/>
+          </a:ln>
+        </p:spPr>
+        <p:style>
+          <a:lnRef idx="1">
+            <a:schemeClr val="accent1"/>
+          </a:lnRef>
+          <a:fillRef idx="3">
+            <a:schemeClr val="accent1"/>
+          </a:fillRef>
+          <a:effectRef idx="2">
+            <a:schemeClr val="accent1"/>
+          </a:effectRef>
+          <a:fontRef idx="minor">
+            <a:schemeClr val="lt1"/>
+          </a:fontRef>
+        </p:style>
+        <p:txBody>
+          <a:bodyPr rtlCol="0" anchor="ctr"/>
+          <a:lstStyle/>
+          <a:p>
+            <a:pPr algn="ctr"/>
+          </a:p>
+        </p:txBody>
+      </p:sp>
+      <p:sp>
+        <p:nvSpPr>
+          <p:cNvPr id="6" name="TextBox 5"/>
           <p:cNvSpPr txBox="1"/>
           <p:nvPr/>
         </p:nvSpPr>
         <p:spPr>
           <a:xfrm>
-            <a:off x="1005840" y="1828800"/>
-            <a:ext cx="10058400" cy="4572000"/>
+            <a:off x="548640" y="1554480"/>
+            <a:ext cx="10972800" cy="2103120"/>
           </a:xfrm>
           <a:prstGeom prst="rect">
             <a:avLst/>
@@ -6893,64 +8255,241 @@
           </a:bodyPr>
           <a:lstStyle/>
           <a:p>
-            <a:pPr>
-              <a:defRPr sz="2200" b="0">
-                <a:solidFill>
-                  <a:srgbClr val="FFFFFF"/>
-                </a:solidFill>
-                <a:latin typeface="Calibri"/>
-              </a:defRPr>
-            </a:pPr>
-            <a:r>
-              <a:t>▸ Company: GreenPulse Ltd — early-stage clean energy startup</a:t>
-            </a:r>
-          </a:p>
-          <a:p>
-            <a:pPr>
-              <a:spcBef>
-                <a:spcPts val="1000"/>
-              </a:spcBef>
-              <a:defRPr sz="2200" b="0">
-                <a:solidFill>
-                  <a:srgbClr val="FFFFFF"/>
-                </a:solidFill>
-                <a:latin typeface="Calibri"/>
-              </a:defRPr>
-            </a:pPr>
-            <a:r>
-              <a:t>▸ Problem: 12 months of messy P&amp;L data — mixed currencies, missing values, bad formatting</a:t>
-            </a:r>
-          </a:p>
-          <a:p>
-            <a:pPr>
-              <a:spcBef>
-                <a:spcPts val="1000"/>
-              </a:spcBef>
-              <a:defRPr sz="2200" b="0">
-                <a:solidFill>
-                  <a:srgbClr val="FFFFFF"/>
-                </a:solidFill>
-                <a:latin typeface="Calibri"/>
-              </a:defRPr>
-            </a:pPr>
-            <a:r>
-              <a:t>▸ Goal: Clean it, calculate key ratios, produce a board-ready executive summary</a:t>
-            </a:r>
-          </a:p>
-          <a:p>
-            <a:pPr>
-              <a:spcBef>
-                <a:spcPts val="1000"/>
-              </a:spcBef>
-              <a:defRPr sz="2200" b="0">
-                <a:solidFill>
-                  <a:srgbClr val="FFFFFF"/>
-                </a:solidFill>
-                <a:latin typeface="Calibri"/>
-              </a:defRPr>
-            </a:pPr>
-            <a:r>
-              <a:t>▸ Time to do this manually: 2–3 hours with a financial analyst</a:t>
+            <a:pPr algn="l">
+              <a:spcAft>
+                <a:spcPts val="400"/>
+              </a:spcAft>
+              <a:defRPr sz="2400" b="1">
+                <a:solidFill>
+                  <a:srgbClr val="FF6B35"/>
+                </a:solidFill>
+                <a:latin typeface="Calibri"/>
+              </a:defRPr>
+            </a:pPr>
+            <a:r>
+              <a:t>The Scenario</a:t>
+            </a:r>
+          </a:p>
+          <a:p>
+            <a:pPr algn="l">
+              <a:defRPr sz="1800" b="0">
+                <a:solidFill>
+                  <a:srgbClr val="FFFFFF"/>
+                </a:solidFill>
+                <a:latin typeface="Calibri"/>
+              </a:defRPr>
+            </a:pPr>
+            <a:r>
+              <a:t>• GreenPulse Ltd — early-stage clean energy startup</a:t>
+            </a:r>
+          </a:p>
+          <a:p>
+            <a:pPr algn="l">
+              <a:defRPr sz="1800" b="0">
+                <a:solidFill>
+                  <a:srgbClr val="FFFFFF"/>
+                </a:solidFill>
+                <a:latin typeface="Calibri"/>
+              </a:defRPr>
+            </a:pPr>
+            <a:r>
+              <a:t>• 12 months of P&amp;L data in a messy Excel file</a:t>
+            </a:r>
+          </a:p>
+          <a:p>
+            <a:pPr algn="l">
+              <a:defRPr sz="1800" b="0">
+                <a:solidFill>
+                  <a:srgbClr val="FFFFFF"/>
+                </a:solidFill>
+                <a:latin typeface="Calibri"/>
+              </a:defRPr>
+            </a:pPr>
+            <a:r>
+              <a:t>• Mixed currencies (GBP &amp; EUR), inconsistent dates, missing values</a:t>
+            </a:r>
+          </a:p>
+          <a:p>
+            <a:pPr algn="l">
+              <a:defRPr sz="1800" b="0">
+                <a:solidFill>
+                  <a:srgbClr val="FFFFFF"/>
+                </a:solidFill>
+                <a:latin typeface="Calibri"/>
+              </a:defRPr>
+            </a:pPr>
+            <a:r>
+              <a:t>• Need: clean data, key ratios, trend analysis, board summary</a:t>
+            </a:r>
+          </a:p>
+        </p:txBody>
+      </p:sp>
+      <p:sp>
+        <p:nvSpPr>
+          <p:cNvPr id="7" name="Rectangle 6"/>
+          <p:cNvSpPr/>
+          <p:nvPr/>
+        </p:nvSpPr>
+        <p:spPr>
+          <a:xfrm>
+            <a:off x="365760" y="4023360"/>
+            <a:ext cx="11430000" cy="2560320"/>
+          </a:xfrm>
+          <a:prstGeom prst="rect">
+            <a:avLst/>
+          </a:prstGeom>
+          <a:solidFill>
+            <a:srgbClr val="2A2E42"/>
+          </a:solidFill>
+          <a:ln>
+            <a:noFill/>
+          </a:ln>
+        </p:spPr>
+        <p:style>
+          <a:lnRef idx="1">
+            <a:schemeClr val="accent1"/>
+          </a:lnRef>
+          <a:fillRef idx="3">
+            <a:schemeClr val="accent1"/>
+          </a:fillRef>
+          <a:effectRef idx="2">
+            <a:schemeClr val="accent1"/>
+          </a:effectRef>
+          <a:fontRef idx="minor">
+            <a:schemeClr val="lt1"/>
+          </a:fontRef>
+        </p:style>
+        <p:txBody>
+          <a:bodyPr rtlCol="0" anchor="ctr"/>
+          <a:lstStyle/>
+          <a:p>
+            <a:pPr algn="ctr"/>
+          </a:p>
+        </p:txBody>
+      </p:sp>
+      <p:sp>
+        <p:nvSpPr>
+          <p:cNvPr id="8" name="TextBox 7"/>
+          <p:cNvSpPr txBox="1"/>
+          <p:nvPr/>
+        </p:nvSpPr>
+        <p:spPr>
+          <a:xfrm>
+            <a:off x="548640" y="4114800"/>
+            <a:ext cx="10972800" cy="2377440"/>
+          </a:xfrm>
+          <a:prstGeom prst="rect">
+            <a:avLst/>
+          </a:prstGeom>
+          <a:noFill/>
+        </p:spPr>
+        <p:txBody>
+          <a:bodyPr wrap="square">
+            <a:spAutoFit/>
+          </a:bodyPr>
+          <a:lstStyle/>
+          <a:p>
+            <a:pPr algn="l">
+              <a:spcAft>
+                <a:spcPts val="400"/>
+              </a:spcAft>
+              <a:defRPr sz="2200" b="1">
+                <a:solidFill>
+                  <a:srgbClr val="00D4F5"/>
+                </a:solidFill>
+                <a:latin typeface="Calibri"/>
+              </a:defRPr>
+            </a:pPr>
+            <a:r>
+              <a:t>What We'll Ask AI To Do</a:t>
+            </a:r>
+          </a:p>
+          <a:p>
+            <a:pPr algn="l">
+              <a:defRPr sz="1600" b="0">
+                <a:solidFill>
+                  <a:srgbClr val="FFFFFF"/>
+                </a:solidFill>
+                <a:latin typeface="Calibri"/>
+              </a:defRPr>
+            </a:pPr>
+            <a:r>
+              <a:t>1. Clean the data — standardise to GBP, fix formatting, flag missing values</a:t>
+            </a:r>
+          </a:p>
+          <a:p>
+            <a:pPr algn="l">
+              <a:defRPr sz="1600" b="0">
+                <a:solidFill>
+                  <a:srgbClr val="FFFFFF"/>
+                </a:solidFill>
+                <a:latin typeface="Calibri"/>
+              </a:defRPr>
+            </a:pPr>
+            <a:r>
+              <a:t>2. Calculate metrics — gross margin, EBITDA, burn rate, revenue growth, runway</a:t>
+            </a:r>
+          </a:p>
+          <a:p>
+            <a:pPr algn="l">
+              <a:defRPr sz="1600" b="0">
+                <a:solidFill>
+                  <a:srgbClr val="FFFFFF"/>
+                </a:solidFill>
+                <a:latin typeface="Calibri"/>
+              </a:defRPr>
+            </a:pPr>
+            <a:r>
+              <a:t>3. Identify top 3 trends — what story do these numbers tell?</a:t>
+            </a:r>
+          </a:p>
+          <a:p>
+            <a:pPr algn="l">
+              <a:defRPr sz="1600" b="0">
+                <a:solidFill>
+                  <a:srgbClr val="FFFFFF"/>
+                </a:solidFill>
+                <a:latin typeface="Calibri"/>
+              </a:defRPr>
+            </a:pPr>
+            <a:r>
+              <a:t>4. Produce clean summary table — 12 months + annual totals</a:t>
+            </a:r>
+          </a:p>
+          <a:p>
+            <a:pPr algn="l">
+              <a:defRPr sz="1600" b="0">
+                <a:solidFill>
+                  <a:srgbClr val="FFFFFF"/>
+                </a:solidFill>
+                <a:latin typeface="Calibri"/>
+              </a:defRPr>
+            </a:pPr>
+            <a:r>
+              <a:t>5. Write 200-word board summary — performance, risks, actions</a:t>
+            </a:r>
+          </a:p>
+          <a:p>
+            <a:pPr algn="l">
+              <a:defRPr sz="800" b="0">
+                <a:solidFill>
+                  <a:srgbClr val="FFFFFF"/>
+                </a:solidFill>
+                <a:latin typeface="Calibri"/>
+              </a:defRPr>
+            </a:pPr>
+          </a:p>
+          <a:p>
+            <a:pPr algn="l">
+              <a:defRPr sz="1600" b="1">
+                <a:solidFill>
+                  <a:srgbClr val="00D4F5"/>
+                </a:solidFill>
+                <a:latin typeface="Calibri"/>
+              </a:defRPr>
+            </a:pPr>
+            <a:r>
+              <a:t>Tool: Claude (claude.ai) — upload Excel file, paste prompt</a:t>
             </a:r>
           </a:p>
         </p:txBody>
@@ -6983,63 +8522,24 @@
       <p:grpSpPr/>
       <p:sp>
         <p:nvSpPr>
-          <p:cNvPr id="2" name="TextBox 1"/>
-          <p:cNvSpPr txBox="1"/>
-          <p:nvPr/>
-        </p:nvSpPr>
-        <p:spPr>
-          <a:xfrm>
-            <a:off x="731520" y="274320"/>
-            <a:ext cx="4572000" cy="548640"/>
-          </a:xfrm>
-          <a:prstGeom prst="rect">
-            <a:avLst/>
-          </a:prstGeom>
-          <a:noFill/>
-        </p:spPr>
-        <p:txBody>
-          <a:bodyPr wrap="square">
-            <a:spAutoFit/>
-          </a:bodyPr>
-          <a:lstStyle/>
-          <a:p>
-            <a:pPr algn="l">
-              <a:defRPr sz="2400" b="1">
-                <a:solidFill>
-                  <a:srgbClr val="00D4F5"/>
-                </a:solidFill>
-                <a:latin typeface="Calibri"/>
-              </a:defRPr>
-            </a:pPr>
-            <a:r>
-              <a:t>Use Case 1 — The Prompt</a:t>
-            </a:r>
-          </a:p>
-        </p:txBody>
-      </p:sp>
-      <p:sp>
-        <p:nvSpPr>
-          <p:cNvPr id="3" name="Rounded Rectangle 2"/>
+          <p:cNvPr id="2" name="Rectangle 1"/>
           <p:cNvSpPr/>
           <p:nvPr/>
         </p:nvSpPr>
         <p:spPr>
           <a:xfrm>
-            <a:off x="457200" y="914400"/>
-            <a:ext cx="11247120" cy="5303520"/>
-          </a:xfrm>
-          <a:prstGeom prst="roundRect">
+            <a:off x="0" y="0"/>
+            <a:ext cx="12191695" cy="73152"/>
+          </a:xfrm>
+          <a:prstGeom prst="rect">
             <a:avLst/>
           </a:prstGeom>
           <a:solidFill>
-            <a:srgbClr val="2A2E3E"/>
+            <a:srgbClr val="00D4F5"/>
           </a:solidFill>
-          <a:ln w="12700">
-            <a:solidFill>
-              <a:srgbClr val="3A3E4E"/>
-            </a:solidFill>
+          <a:ln>
+            <a:noFill/>
           </a:ln>
-          <a:effectLst/>
         </p:spPr>
         <p:style>
           <a:lnRef idx="1">
@@ -7065,14 +8565,14 @@
       </p:sp>
       <p:sp>
         <p:nvSpPr>
-          <p:cNvPr id="4" name="TextBox 3"/>
+          <p:cNvPr id="3" name="TextBox 2"/>
           <p:cNvSpPr txBox="1"/>
           <p:nvPr/>
         </p:nvSpPr>
         <p:spPr>
           <a:xfrm>
-            <a:off x="731520" y="1097280"/>
-            <a:ext cx="10698480" cy="4937760"/>
+            <a:off x="548640" y="274320"/>
+            <a:ext cx="10972800" cy="640080"/>
           </a:xfrm>
           <a:prstGeom prst="rect">
             <a:avLst/>
@@ -7085,154 +8585,143 @@
           </a:bodyPr>
           <a:lstStyle/>
           <a:p>
-            <a:pPr>
-              <a:defRPr sz="1300">
-                <a:solidFill>
-                  <a:srgbClr val="E0E8F0"/>
+            <a:pPr algn="l">
+              <a:spcAft>
+                <a:spcPts val="400"/>
+              </a:spcAft>
+              <a:defRPr sz="3200" b="1">
+                <a:solidFill>
+                  <a:srgbClr val="FFFFFF"/>
+                </a:solidFill>
+                <a:latin typeface="Calibri"/>
+              </a:defRPr>
+            </a:pPr>
+            <a:r>
+              <a:t>📊 UC1: The Prompt</a:t>
+            </a:r>
+          </a:p>
+        </p:txBody>
+      </p:sp>
+      <p:sp>
+        <p:nvSpPr>
+          <p:cNvPr id="4" name="Rectangle 3"/>
+          <p:cNvSpPr/>
+          <p:nvPr/>
+        </p:nvSpPr>
+        <p:spPr>
+          <a:xfrm>
+            <a:off x="365760" y="1097280"/>
+            <a:ext cx="11430000" cy="5303520"/>
+          </a:xfrm>
+          <a:prstGeom prst="rect">
+            <a:avLst/>
+          </a:prstGeom>
+          <a:solidFill>
+            <a:srgbClr val="121422"/>
+          </a:solidFill>
+          <a:ln>
+            <a:noFill/>
+          </a:ln>
+        </p:spPr>
+        <p:style>
+          <a:lnRef idx="1">
+            <a:schemeClr val="accent1"/>
+          </a:lnRef>
+          <a:fillRef idx="3">
+            <a:schemeClr val="accent1"/>
+          </a:fillRef>
+          <a:effectRef idx="2">
+            <a:schemeClr val="accent1"/>
+          </a:effectRef>
+          <a:fontRef idx="minor">
+            <a:schemeClr val="lt1"/>
+          </a:fontRef>
+        </p:style>
+        <p:txBody>
+          <a:bodyPr rtlCol="0" anchor="ctr"/>
+          <a:lstStyle/>
+          <a:p>
+            <a:pPr algn="ctr"/>
+          </a:p>
+        </p:txBody>
+      </p:sp>
+      <p:sp>
+        <p:nvSpPr>
+          <p:cNvPr id="5" name="TextBox 4"/>
+          <p:cNvSpPr txBox="1"/>
+          <p:nvPr/>
+        </p:nvSpPr>
+        <p:spPr>
+          <a:xfrm>
+            <a:off x="548640" y="1280160"/>
+            <a:ext cx="10972800" cy="4937760"/>
+          </a:xfrm>
+          <a:prstGeom prst="rect">
+            <a:avLst/>
+          </a:prstGeom>
+          <a:noFill/>
+        </p:spPr>
+        <p:txBody>
+          <a:bodyPr wrap="square">
+            <a:spAutoFit/>
+          </a:bodyPr>
+          <a:lstStyle/>
+          <a:p>
+            <a:pPr algn="l">
+              <a:spcAft>
+                <a:spcPts val="400"/>
+              </a:spcAft>
+              <a:defRPr sz="1400" b="0">
+                <a:solidFill>
+                  <a:srgbClr val="00D4F5"/>
                 </a:solidFill>
                 <a:latin typeface="Consolas"/>
               </a:defRPr>
             </a:pPr>
             <a:r>
-              <a:t>I've uploaded a 12-month P&amp;L spreadsheet for GreenPulse Ltd, an early-stage clean energy startup. The data is messy — inconsistent date formats, some values in GBP and others in EUR (use 1 EUR = 0.86 GBP), missing values, and inconsistent formatting.</a:t>
-            </a:r>
-          </a:p>
-          <a:p>
-            <a:pPr>
-              <a:spcBef>
-                <a:spcPts val="200"/>
-              </a:spcBef>
-              <a:defRPr sz="1300">
-                <a:solidFill>
-                  <a:srgbClr val="E0E8F0"/>
-                </a:solidFill>
-                <a:latin typeface="Consolas"/>
-              </a:defRPr>
-            </a:pPr>
-          </a:p>
-          <a:p>
-            <a:pPr>
-              <a:spcBef>
-                <a:spcPts val="200"/>
-              </a:spcBef>
-              <a:defRPr sz="1300">
-                <a:solidFill>
-                  <a:srgbClr val="E0E8F0"/>
-                </a:solidFill>
-                <a:latin typeface="Consolas"/>
-              </a:defRPr>
-            </a:pPr>
+              <a:t>I've uploaded a 12-month P&amp;L spreadsheet for GreenPulse Ltd, an early-stage</a:t>
+            </a:r>
+            <a:br/>
+            <a:r>
+              <a:t>clean energy startup. The data is messy — inconsistent date formats, some values</a:t>
+            </a:r>
+            <a:br/>
+            <a:r>
+              <a:t>in GBP and others in EUR (use 1 EUR = 0.86 GBP), missing values.</a:t>
+            </a:r>
+            <a:br/>
+            <a:br/>
             <a:r>
               <a:t>Please:</a:t>
             </a:r>
-          </a:p>
-          <a:p>
-            <a:pPr>
-              <a:spcBef>
-                <a:spcPts val="200"/>
-              </a:spcBef>
-              <a:defRPr sz="1300">
-                <a:solidFill>
-                  <a:srgbClr val="E0E8F0"/>
-                </a:solidFill>
-                <a:latin typeface="Consolas"/>
-              </a:defRPr>
-            </a:pPr>
-            <a:r>
-              <a:t>1. Clean the data — standardise to GBP, fix formatting, flag missing values</a:t>
-            </a:r>
-          </a:p>
-          <a:p>
-            <a:pPr>
-              <a:spcBef>
-                <a:spcPts val="200"/>
-              </a:spcBef>
-              <a:defRPr sz="1300">
-                <a:solidFill>
-                  <a:srgbClr val="E0E8F0"/>
-                </a:solidFill>
-                <a:latin typeface="Consolas"/>
-              </a:defRPr>
-            </a:pPr>
-            <a:r>
-              <a:t>2. Calculate: Gross margin %, EBITDA margin %, monthly burn rate, revenue growth rate, runway estimate (£420K cash)</a:t>
-            </a:r>
-          </a:p>
-          <a:p>
-            <a:pPr>
-              <a:spcBef>
-                <a:spcPts val="200"/>
-              </a:spcBef>
-              <a:defRPr sz="1300">
-                <a:solidFill>
-                  <a:srgbClr val="E0E8F0"/>
-                </a:solidFill>
-                <a:latin typeface="Consolas"/>
-              </a:defRPr>
-            </a:pPr>
+            <a:br/>
+            <a:r>
+              <a:t>1. Clean the data: Standardise to GBP, fix formatting, flag missing values</a:t>
+            </a:r>
+            <a:br/>
+            <a:r>
+              <a:t>2. Calculate key metrics (monthly + annual): Gross margin %, EBITDA &amp; margin %,</a:t>
+            </a:r>
+            <a:br/>
+            <a:r>
+              <a:t>   Monthly burn rate, Revenue growth (MoM), Runway estimate (£420K cash)</a:t>
+            </a:r>
+            <a:br/>
             <a:r>
               <a:t>3. Identify the 3 most important trends</a:t>
             </a:r>
-          </a:p>
-          <a:p>
-            <a:pPr>
-              <a:spcBef>
-                <a:spcPts val="200"/>
-              </a:spcBef>
-              <a:defRPr sz="1300">
-                <a:solidFill>
-                  <a:srgbClr val="E0E8F0"/>
-                </a:solidFill>
-                <a:latin typeface="Consolas"/>
-              </a:defRPr>
-            </a:pPr>
-            <a:r>
-              <a:t>4. Produce a clean summary table (12 months + annual totals)</a:t>
-            </a:r>
-          </a:p>
-          <a:p>
-            <a:pPr>
-              <a:spcBef>
-                <a:spcPts val="200"/>
-              </a:spcBef>
-              <a:defRPr sz="1300">
-                <a:solidFill>
-                  <a:srgbClr val="E0E8F0"/>
-                </a:solidFill>
-                <a:latin typeface="Consolas"/>
-              </a:defRPr>
-            </a:pPr>
-            <a:r>
-              <a:t>5. Write a 200-word board-ready executive summary</a:t>
-            </a:r>
-          </a:p>
-          <a:p>
-            <a:pPr>
-              <a:spcBef>
-                <a:spcPts val="200"/>
-              </a:spcBef>
-              <a:defRPr sz="1300">
-                <a:solidFill>
-                  <a:srgbClr val="E0E8F0"/>
-                </a:solidFill>
-                <a:latin typeface="Consolas"/>
-              </a:defRPr>
-            </a:pPr>
-          </a:p>
-          <a:p>
-            <a:pPr>
-              <a:spcBef>
-                <a:spcPts val="200"/>
-              </a:spcBef>
-              <a:defRPr sz="1300">
-                <a:solidFill>
-                  <a:srgbClr val="E0E8F0"/>
-                </a:solidFill>
-                <a:latin typeface="Consolas"/>
-              </a:defRPr>
-            </a:pPr>
-            <a:r>
-              <a:t>Be specific with numbers — no vague statements.</a:t>
+            <a:br/>
+            <a:r>
+              <a:t>4. Produce a clean summary table — all 12 months + annual totals</a:t>
+            </a:r>
+            <a:br/>
+            <a:r>
+              <a:t>5. Write a 200-word executive summary for a board meeting</a:t>
+            </a:r>
+            <a:br/>
+            <a:br/>
+            <a:r>
+              <a:t>Format with headers and tables. Be specific with numbers.</a:t>
             </a:r>
           </a:p>
         </p:txBody>
@@ -7271,8 +8760,8 @@
         </p:nvSpPr>
         <p:spPr>
           <a:xfrm>
-            <a:off x="731520" y="548640"/>
-            <a:ext cx="73152" cy="548640"/>
+            <a:off x="0" y="0"/>
+            <a:ext cx="12191695" cy="73152"/>
           </a:xfrm>
           <a:prstGeom prst="rect">
             <a:avLst/>
@@ -7314,8 +8803,8 @@
         </p:nvSpPr>
         <p:spPr>
           <a:xfrm>
-            <a:off x="1005840" y="457200"/>
-            <a:ext cx="9144000" cy="822960"/>
+            <a:off x="548640" y="274320"/>
+            <a:ext cx="10972800" cy="640080"/>
           </a:xfrm>
           <a:prstGeom prst="rect">
             <a:avLst/>
@@ -7329,6 +8818,9 @@
           <a:lstStyle/>
           <a:p>
             <a:pPr algn="l">
+              <a:spcAft>
+                <a:spcPts val="400"/>
+              </a:spcAft>
               <a:defRPr sz="3600" b="1">
                 <a:solidFill>
                   <a:srgbClr val="FFFFFF"/>
@@ -7337,21 +8829,64 @@
               </a:defRPr>
             </a:pPr>
             <a:r>
-              <a:t>Use Case 1: Key Takeaways</a:t>
-            </a:r>
-          </a:p>
-        </p:txBody>
-      </p:sp>
-      <p:sp>
-        <p:nvSpPr>
-          <p:cNvPr id="4" name="TextBox 3"/>
+              <a:t>📊 UC1: Key Takeaways</a:t>
+            </a:r>
+          </a:p>
+        </p:txBody>
+      </p:sp>
+      <p:sp>
+        <p:nvSpPr>
+          <p:cNvPr id="4" name="Rectangle 3"/>
+          <p:cNvSpPr/>
+          <p:nvPr/>
+        </p:nvSpPr>
+        <p:spPr>
+          <a:xfrm>
+            <a:off x="365760" y="1280160"/>
+            <a:ext cx="11430000" cy="5029200"/>
+          </a:xfrm>
+          <a:prstGeom prst="rect">
+            <a:avLst/>
+          </a:prstGeom>
+          <a:solidFill>
+            <a:srgbClr val="222638"/>
+          </a:solidFill>
+          <a:ln>
+            <a:noFill/>
+          </a:ln>
+        </p:spPr>
+        <p:style>
+          <a:lnRef idx="1">
+            <a:schemeClr val="accent1"/>
+          </a:lnRef>
+          <a:fillRef idx="3">
+            <a:schemeClr val="accent1"/>
+          </a:fillRef>
+          <a:effectRef idx="2">
+            <a:schemeClr val="accent1"/>
+          </a:effectRef>
+          <a:fontRef idx="minor">
+            <a:schemeClr val="lt1"/>
+          </a:fontRef>
+        </p:style>
+        <p:txBody>
+          <a:bodyPr rtlCol="0" anchor="ctr"/>
+          <a:lstStyle/>
+          <a:p>
+            <a:pPr algn="ctr"/>
+          </a:p>
+        </p:txBody>
+      </p:sp>
+      <p:sp>
+        <p:nvSpPr>
+          <p:cNvPr id="5" name="TextBox 4"/>
           <p:cNvSpPr txBox="1"/>
           <p:nvPr/>
         </p:nvSpPr>
         <p:spPr>
           <a:xfrm>
-            <a:off x="1005840" y="1280160"/>
-            <a:ext cx="9144000" cy="457200"/>
+            <a:off x="548640" y="1371600"/>
+            <a:ext cx="10972800" cy="4846320"/>
           </a:xfrm>
           <a:prstGeom prst="rect">
             <a:avLst/>
@@ -7365,163 +8900,178 @@
           <a:lstStyle/>
           <a:p>
             <a:pPr algn="l">
+              <a:spcAft>
+                <a:spcPts val="400"/>
+              </a:spcAft>
+              <a:defRPr sz="2400" b="1">
+                <a:solidFill>
+                  <a:srgbClr val="FF6B35"/>
+                </a:solidFill>
+                <a:latin typeface="Calibri"/>
+              </a:defRPr>
+            </a:pPr>
+            <a:r>
+              <a:t>What Just Happened</a:t>
+            </a:r>
+          </a:p>
+          <a:p>
+            <a:pPr algn="l">
+              <a:defRPr sz="2000" b="0">
+                <a:solidFill>
+                  <a:srgbClr val="FFFFFF"/>
+                </a:solidFill>
+                <a:latin typeface="Calibri"/>
+              </a:defRPr>
+            </a:pPr>
+            <a:r>
+              <a:t>✅ AI cleaned messy data — fixed currencies, dates, gaps</a:t>
+            </a:r>
+          </a:p>
+          <a:p>
+            <a:pPr algn="l">
+              <a:defRPr sz="2000" b="0">
+                <a:solidFill>
+                  <a:srgbClr val="FFFFFF"/>
+                </a:solidFill>
+                <a:latin typeface="Calibri"/>
+              </a:defRPr>
+            </a:pPr>
+            <a:r>
+              <a:t>✅ Calculated key financial ratios automatically</a:t>
+            </a:r>
+          </a:p>
+          <a:p>
+            <a:pPr algn="l">
+              <a:defRPr sz="2000" b="0">
+                <a:solidFill>
+                  <a:srgbClr val="FFFFFF"/>
+                </a:solidFill>
+                <a:latin typeface="Calibri"/>
+              </a:defRPr>
+            </a:pPr>
+            <a:r>
+              <a:t>✅ Identified trends a human analyst would find</a:t>
+            </a:r>
+          </a:p>
+          <a:p>
+            <a:pPr algn="l">
+              <a:defRPr sz="2000" b="0">
+                <a:solidFill>
+                  <a:srgbClr val="FFFFFF"/>
+                </a:solidFill>
+                <a:latin typeface="Calibri"/>
+              </a:defRPr>
+            </a:pPr>
+            <a:r>
+              <a:t>✅ Produced a board-ready executive summary</a:t>
+            </a:r>
+          </a:p>
+          <a:p>
+            <a:pPr algn="l">
+              <a:defRPr sz="1200" b="0">
+                <a:solidFill>
+                  <a:srgbClr val="FFFFFF"/>
+                </a:solidFill>
+                <a:latin typeface="Calibri"/>
+              </a:defRPr>
+            </a:pPr>
+          </a:p>
+          <a:p>
+            <a:pPr algn="l">
+              <a:defRPr sz="2200" b="1">
+                <a:solidFill>
+                  <a:srgbClr val="00D4F5"/>
+                </a:solidFill>
+                <a:latin typeface="Calibri"/>
+              </a:defRPr>
+            </a:pPr>
+            <a:r>
+              <a:t>⏱ Time: ~45 seconds  vs  2-3 hours for a human analyst</a:t>
+            </a:r>
+          </a:p>
+          <a:p>
+            <a:pPr algn="l">
+              <a:defRPr sz="1200" b="0">
+                <a:solidFill>
+                  <a:srgbClr val="FFFFFF"/>
+                </a:solidFill>
+                <a:latin typeface="Calibri"/>
+              </a:defRPr>
+            </a:pPr>
+          </a:p>
+          <a:p>
+            <a:pPr algn="l">
+              <a:defRPr sz="2200" b="1">
+                <a:solidFill>
+                  <a:srgbClr val="FF6B35"/>
+                </a:solidFill>
+                <a:latin typeface="Calibri"/>
+              </a:defRPr>
+            </a:pPr>
+            <a:r>
+              <a:t>💡 The Secret: Specificity</a:t>
+            </a:r>
+          </a:p>
+          <a:p>
+            <a:pPr algn="l">
               <a:defRPr sz="1800" b="0">
                 <a:solidFill>
-                  <a:srgbClr val="BBBBCC"/>
-                </a:solidFill>
-                <a:latin typeface="Calibri"/>
-              </a:defRPr>
-            </a:pPr>
-            <a:r>
-              <a:t>📊  What to notice in the output</a:t>
-            </a:r>
-          </a:p>
-        </p:txBody>
-      </p:sp>
-      <p:sp>
-        <p:nvSpPr>
-          <p:cNvPr id="5" name="TextBox 4"/>
-          <p:cNvSpPr txBox="1"/>
-          <p:nvPr/>
-        </p:nvSpPr>
-        <p:spPr>
-          <a:xfrm>
-            <a:off x="1005840" y="1828800"/>
-            <a:ext cx="10058400" cy="4572000"/>
-          </a:xfrm>
-          <a:prstGeom prst="rect">
-            <a:avLst/>
-          </a:prstGeom>
-          <a:noFill/>
-        </p:spPr>
-        <p:txBody>
-          <a:bodyPr wrap="square">
-            <a:spAutoFit/>
-          </a:bodyPr>
-          <a:lstStyle/>
-          <a:p>
-            <a:pPr>
-              <a:defRPr sz="2200" b="1">
-                <a:solidFill>
-                  <a:srgbClr val="FFFFFF"/>
-                </a:solidFill>
-                <a:latin typeface="Calibri"/>
-              </a:defRPr>
-            </a:pPr>
-            <a:r>
-              <a:t>▸ Specificity is everything</a:t>
-            </a:r>
-          </a:p>
-          <a:p>
-            <a:pPr>
-              <a:spcBef>
-                <a:spcPts val="200"/>
-              </a:spcBef>
-              <a:defRPr sz="1800">
-                <a:solidFill>
-                  <a:srgbClr val="BBBBCC"/>
-                </a:solidFill>
-                <a:latin typeface="Calibri"/>
-              </a:defRPr>
-            </a:pPr>
-            <a:r>
-              <a:t>    Detailed prompt → analyst-quality output</a:t>
-            </a:r>
-          </a:p>
-          <a:p>
-            <a:pPr>
-              <a:spcBef>
-                <a:spcPts val="1000"/>
-              </a:spcBef>
-              <a:defRPr sz="2200" b="1">
-                <a:solidFill>
-                  <a:srgbClr val="FFFFFF"/>
-                </a:solidFill>
-                <a:latin typeface="Calibri"/>
-              </a:defRPr>
-            </a:pPr>
-            <a:r>
-              <a:t>▸ Iterate, don't expect perfection</a:t>
-            </a:r>
-          </a:p>
-          <a:p>
-            <a:pPr>
-              <a:spcBef>
-                <a:spcPts val="200"/>
-              </a:spcBef>
-              <a:defRPr sz="1800">
-                <a:solidFill>
-                  <a:srgbClr val="BBBBCC"/>
-                </a:solidFill>
-                <a:latin typeface="Calibri"/>
-              </a:defRPr>
-            </a:pPr>
-            <a:r>
-              <a:t>    Follow up: charts, risk matrix, board summary</a:t>
-            </a:r>
-          </a:p>
-          <a:p>
-            <a:pPr>
-              <a:spcBef>
-                <a:spcPts val="1000"/>
-              </a:spcBef>
-              <a:defRPr sz="2200" b="1">
-                <a:solidFill>
-                  <a:srgbClr val="FFFFFF"/>
-                </a:solidFill>
-                <a:latin typeface="Calibri"/>
-              </a:defRPr>
-            </a:pPr>
-            <a:r>
-              <a:t>▸ Context matters</a:t>
-            </a:r>
-          </a:p>
-          <a:p>
-            <a:pPr>
-              <a:spcBef>
-                <a:spcPts val="200"/>
-              </a:spcBef>
-              <a:defRPr sz="1800">
-                <a:solidFill>
-                  <a:srgbClr val="BBBBCC"/>
-                </a:solidFill>
-                <a:latin typeface="Calibri"/>
-              </a:defRPr>
-            </a:pPr>
-            <a:r>
-              <a:t>    We told it the company type, exchange rate, exact metrics</a:t>
-            </a:r>
-          </a:p>
-          <a:p>
-            <a:pPr>
-              <a:spcBef>
-                <a:spcPts val="1000"/>
-              </a:spcBef>
-              <a:defRPr sz="2200" b="1">
-                <a:solidFill>
-                  <a:srgbClr val="FFFFFF"/>
-                </a:solidFill>
-                <a:latin typeface="Calibri"/>
-              </a:defRPr>
-            </a:pPr>
-            <a:r>
-              <a:t>▸ The 80% rule</a:t>
-            </a:r>
-          </a:p>
-          <a:p>
-            <a:pPr>
-              <a:spcBef>
-                <a:spcPts val="200"/>
-              </a:spcBef>
-              <a:defRPr sz="1800">
-                <a:solidFill>
-                  <a:srgbClr val="BBBBCC"/>
-                </a:solidFill>
-                <a:latin typeface="Calibri"/>
-              </a:defRPr>
-            </a:pPr>
-            <a:r>
-              <a:t>    AI gets you 80% there — your expertise finishes it</a:t>
+                  <a:srgbClr val="CCCCCC"/>
+                </a:solidFill>
+                <a:latin typeface="Calibri"/>
+              </a:defRPr>
+            </a:pPr>
+            <a:r>
+              <a:t>We didn't say 'analyse this spreadsheet' — we specified:</a:t>
+            </a:r>
+          </a:p>
+          <a:p>
+            <a:pPr algn="l">
+              <a:defRPr sz="1800" b="0">
+                <a:solidFill>
+                  <a:srgbClr val="CCCCCC"/>
+                </a:solidFill>
+                <a:latin typeface="Calibri"/>
+              </a:defRPr>
+            </a:pPr>
+            <a:r>
+              <a:t>• Exact exchange rate to use  • Which metrics to calculate</a:t>
+            </a:r>
+          </a:p>
+          <a:p>
+            <a:pPr algn="l">
+              <a:defRPr sz="1800" b="0">
+                <a:solidFill>
+                  <a:srgbClr val="CCCCCC"/>
+                </a:solidFill>
+                <a:latin typeface="Calibri"/>
+              </a:defRPr>
+            </a:pPr>
+            <a:r>
+              <a:t>• Output format (tables + summary)  • Word count for the summary</a:t>
+            </a:r>
+          </a:p>
+          <a:p>
+            <a:pPr algn="l">
+              <a:defRPr sz="800" b="0">
+                <a:solidFill>
+                  <a:srgbClr val="FFFFFF"/>
+                </a:solidFill>
+                <a:latin typeface="Calibri"/>
+              </a:defRPr>
+            </a:pPr>
+          </a:p>
+          <a:p>
+            <a:pPr algn="l">
+              <a:defRPr sz="1800" b="0">
+                <a:solidFill>
+                  <a:srgbClr val="00D4F5"/>
+                </a:solidFill>
+                <a:latin typeface="Calibri"/>
+              </a:defRPr>
+            </a:pPr>
+            <a:r>
+              <a:t>Then we iterated: visualisation → risk matrix → board report</a:t>
             </a:r>
           </a:p>
         </p:txBody>
@@ -7560,8 +9110,8 @@
         </p:nvSpPr>
         <p:spPr>
           <a:xfrm>
-            <a:off x="731520" y="548640"/>
-            <a:ext cx="73152" cy="548640"/>
+            <a:off x="0" y="0"/>
+            <a:ext cx="12191695" cy="73152"/>
           </a:xfrm>
           <a:prstGeom prst="rect">
             <a:avLst/>
@@ -7603,8 +9153,8 @@
         </p:nvSpPr>
         <p:spPr>
           <a:xfrm>
-            <a:off x="1005840" y="457200"/>
-            <a:ext cx="9144000" cy="822960"/>
+            <a:off x="548640" y="274320"/>
+            <a:ext cx="10972800" cy="640080"/>
           </a:xfrm>
           <a:prstGeom prst="rect">
             <a:avLst/>
@@ -7618,6 +9168,9 @@
           <a:lstStyle/>
           <a:p>
             <a:pPr algn="l">
+              <a:spcAft>
+                <a:spcPts val="400"/>
+              </a:spcAft>
               <a:defRPr sz="3600" b="1">
                 <a:solidFill>
                   <a:srgbClr val="FFFFFF"/>
@@ -7626,7 +9179,7 @@
               </a:defRPr>
             </a:pPr>
             <a:r>
-              <a:t>Use Case 2: Contract Drafting</a:t>
+              <a:t>📝 Use Case 2: Contract Drafting</a:t>
             </a:r>
           </a:p>
         </p:txBody>
@@ -7639,8 +9192,8 @@
         </p:nvSpPr>
         <p:spPr>
           <a:xfrm>
-            <a:off x="1005840" y="1280160"/>
-            <a:ext cx="9144000" cy="457200"/>
+            <a:off x="548640" y="914400"/>
+            <a:ext cx="10972800" cy="457200"/>
           </a:xfrm>
           <a:prstGeom prst="rect">
             <a:avLst/>
@@ -7654,29 +9207,75 @@
           <a:lstStyle/>
           <a:p>
             <a:pPr algn="l">
+              <a:spcAft>
+                <a:spcPts val="400"/>
+              </a:spcAft>
               <a:defRPr sz="1800" b="0">
                 <a:solidFill>
-                  <a:srgbClr val="BBBBCC"/>
-                </a:solidFill>
-                <a:latin typeface="Calibri"/>
-              </a:defRPr>
-            </a:pPr>
-            <a:r>
-              <a:t>📝  From brief to legal agreement in minutes</a:t>
-            </a:r>
-          </a:p>
-        </p:txBody>
-      </p:sp>
-      <p:sp>
-        <p:nvSpPr>
-          <p:cNvPr id="5" name="TextBox 4"/>
+                  <a:srgbClr val="CCCCCC"/>
+                </a:solidFill>
+                <a:latin typeface="Calibri"/>
+              </a:defRPr>
+            </a:pPr>
+            <a:r>
+              <a:t>Simple brief → Professional services agreement</a:t>
+            </a:r>
+          </a:p>
+        </p:txBody>
+      </p:sp>
+      <p:sp>
+        <p:nvSpPr>
+          <p:cNvPr id="5" name="Rectangle 4"/>
+          <p:cNvSpPr/>
+          <p:nvPr/>
+        </p:nvSpPr>
+        <p:spPr>
+          <a:xfrm>
+            <a:off x="365760" y="1463040"/>
+            <a:ext cx="11430000" cy="2011680"/>
+          </a:xfrm>
+          <a:prstGeom prst="rect">
+            <a:avLst/>
+          </a:prstGeom>
+          <a:solidFill>
+            <a:srgbClr val="222638"/>
+          </a:solidFill>
+          <a:ln>
+            <a:noFill/>
+          </a:ln>
+        </p:spPr>
+        <p:style>
+          <a:lnRef idx="1">
+            <a:schemeClr val="accent1"/>
+          </a:lnRef>
+          <a:fillRef idx="3">
+            <a:schemeClr val="accent1"/>
+          </a:fillRef>
+          <a:effectRef idx="2">
+            <a:schemeClr val="accent1"/>
+          </a:effectRef>
+          <a:fontRef idx="minor">
+            <a:schemeClr val="lt1"/>
+          </a:fontRef>
+        </p:style>
+        <p:txBody>
+          <a:bodyPr rtlCol="0" anchor="ctr"/>
+          <a:lstStyle/>
+          <a:p>
+            <a:pPr algn="ctr"/>
+          </a:p>
+        </p:txBody>
+      </p:sp>
+      <p:sp>
+        <p:nvSpPr>
+          <p:cNvPr id="6" name="TextBox 5"/>
           <p:cNvSpPr txBox="1"/>
           <p:nvPr/>
         </p:nvSpPr>
         <p:spPr>
           <a:xfrm>
-            <a:off x="1005840" y="1828800"/>
-            <a:ext cx="10058400" cy="4572000"/>
+            <a:off x="548640" y="1554480"/>
+            <a:ext cx="10972800" cy="1828800"/>
           </a:xfrm>
           <a:prstGeom prst="rect">
             <a:avLst/>
@@ -7689,64 +9288,228 @@
           </a:bodyPr>
           <a:lstStyle/>
           <a:p>
-            <a:pPr>
-              <a:defRPr sz="2200" b="0">
-                <a:solidFill>
-                  <a:srgbClr val="FFFFFF"/>
-                </a:solidFill>
-                <a:latin typeface="Calibri"/>
-              </a:defRPr>
-            </a:pPr>
-            <a:r>
-              <a:t>▸ Scenario: Draft a professional services agreement for a consulting engagement</a:t>
-            </a:r>
-          </a:p>
-          <a:p>
-            <a:pPr>
-              <a:spcBef>
-                <a:spcPts val="1000"/>
-              </a:spcBef>
-              <a:defRPr sz="2200" b="0">
-                <a:solidFill>
-                  <a:srgbClr val="FFFFFF"/>
-                </a:solidFill>
-                <a:latin typeface="Calibri"/>
-              </a:defRPr>
-            </a:pPr>
-            <a:r>
-              <a:t>▸ Client: NovaTech Solutions (£45M manufacturing company, digital transformation)</a:t>
-            </a:r>
-          </a:p>
-          <a:p>
-            <a:pPr>
-              <a:spcBef>
-                <a:spcPts val="1000"/>
-              </a:spcBef>
-              <a:defRPr sz="2200" b="0">
-                <a:solidFill>
-                  <a:srgbClr val="FFFFFF"/>
-                </a:solidFill>
-                <a:latin typeface="Calibri"/>
-              </a:defRPr>
-            </a:pPr>
-            <a:r>
-              <a:t>▸ Provider: Meridian Consulting — 6 months, £75,000 + VAT</a:t>
-            </a:r>
-          </a:p>
-          <a:p>
-            <a:pPr>
-              <a:spcBef>
-                <a:spcPts val="1000"/>
-              </a:spcBef>
-              <a:defRPr sz="2200" b="0">
-                <a:solidFill>
-                  <a:srgbClr val="FFFFFF"/>
-                </a:solidFill>
-                <a:latin typeface="Calibri"/>
-              </a:defRPr>
-            </a:pPr>
-            <a:r>
-              <a:t>▸ Goal: Full 12-section legal contract from a one-paragraph brief</a:t>
+            <a:pPr algn="l">
+              <a:spcAft>
+                <a:spcPts val="400"/>
+              </a:spcAft>
+              <a:defRPr sz="2400" b="1">
+                <a:solidFill>
+                  <a:srgbClr val="FF6B35"/>
+                </a:solidFill>
+                <a:latin typeface="Calibri"/>
+              </a:defRPr>
+            </a:pPr>
+            <a:r>
+              <a:t>The Scenario</a:t>
+            </a:r>
+          </a:p>
+          <a:p>
+            <a:pPr algn="l">
+              <a:defRPr sz="1800" b="0">
+                <a:solidFill>
+                  <a:srgbClr val="FFFFFF"/>
+                </a:solidFill>
+                <a:latin typeface="Calibri"/>
+              </a:defRPr>
+            </a:pPr>
+            <a:r>
+              <a:t>• Meridian Consulting Ltd → NovaTech Solutions Ltd</a:t>
+            </a:r>
+          </a:p>
+          <a:p>
+            <a:pPr algn="l">
+              <a:defRPr sz="1800" b="0">
+                <a:solidFill>
+                  <a:srgbClr val="FFFFFF"/>
+                </a:solidFill>
+                <a:latin typeface="Calibri"/>
+              </a:defRPr>
+            </a:pPr>
+            <a:r>
+              <a:t>• 6-month digital transformation advisory engagement</a:t>
+            </a:r>
+          </a:p>
+          <a:p>
+            <a:pPr algn="l">
+              <a:defRPr sz="1800" b="0">
+                <a:solidFill>
+                  <a:srgbClr val="FFFFFF"/>
+                </a:solidFill>
+                <a:latin typeface="Calibri"/>
+              </a:defRPr>
+            </a:pPr>
+            <a:r>
+              <a:t>• Fee: £75,000 + VAT, monthly instalments of £12,500</a:t>
+            </a:r>
+          </a:p>
+          <a:p>
+            <a:pPr algn="l">
+              <a:defRPr sz="1800" b="0">
+                <a:solidFill>
+                  <a:srgbClr val="FFFFFF"/>
+                </a:solidFill>
+                <a:latin typeface="Calibri"/>
+              </a:defRPr>
+            </a:pPr>
+            <a:r>
+              <a:t>• Need: full 12-section contract, ready for solicitor review</a:t>
+            </a:r>
+          </a:p>
+        </p:txBody>
+      </p:sp>
+      <p:sp>
+        <p:nvSpPr>
+          <p:cNvPr id="7" name="Rectangle 6"/>
+          <p:cNvSpPr/>
+          <p:nvPr/>
+        </p:nvSpPr>
+        <p:spPr>
+          <a:xfrm>
+            <a:off x="365760" y="3749039"/>
+            <a:ext cx="11430000" cy="2834640"/>
+          </a:xfrm>
+          <a:prstGeom prst="rect">
+            <a:avLst/>
+          </a:prstGeom>
+          <a:solidFill>
+            <a:srgbClr val="2A2E42"/>
+          </a:solidFill>
+          <a:ln>
+            <a:noFill/>
+          </a:ln>
+        </p:spPr>
+        <p:style>
+          <a:lnRef idx="1">
+            <a:schemeClr val="accent1"/>
+          </a:lnRef>
+          <a:fillRef idx="3">
+            <a:schemeClr val="accent1"/>
+          </a:fillRef>
+          <a:effectRef idx="2">
+            <a:schemeClr val="accent1"/>
+          </a:effectRef>
+          <a:fontRef idx="minor">
+            <a:schemeClr val="lt1"/>
+          </a:fontRef>
+        </p:style>
+        <p:txBody>
+          <a:bodyPr rtlCol="0" anchor="ctr"/>
+          <a:lstStyle/>
+          <a:p>
+            <a:pPr algn="ctr"/>
+          </a:p>
+        </p:txBody>
+      </p:sp>
+      <p:sp>
+        <p:nvSpPr>
+          <p:cNvPr id="8" name="TextBox 7"/>
+          <p:cNvSpPr txBox="1"/>
+          <p:nvPr/>
+        </p:nvSpPr>
+        <p:spPr>
+          <a:xfrm>
+            <a:off x="548640" y="3840480"/>
+            <a:ext cx="10972800" cy="2651760"/>
+          </a:xfrm>
+          <a:prstGeom prst="rect">
+            <a:avLst/>
+          </a:prstGeom>
+          <a:noFill/>
+        </p:spPr>
+        <p:txBody>
+          <a:bodyPr wrap="square">
+            <a:spAutoFit/>
+          </a:bodyPr>
+          <a:lstStyle/>
+          <a:p>
+            <a:pPr algn="l">
+              <a:spcAft>
+                <a:spcPts val="400"/>
+              </a:spcAft>
+              <a:defRPr sz="2200" b="1">
+                <a:solidFill>
+                  <a:srgbClr val="00D4F5"/>
+                </a:solidFill>
+                <a:latin typeface="Calibri"/>
+              </a:defRPr>
+            </a:pPr>
+            <a:r>
+              <a:t>The Iteration Chain</a:t>
+            </a:r>
+          </a:p>
+          <a:p>
+            <a:pPr algn="l">
+              <a:defRPr sz="1700" b="0">
+                <a:solidFill>
+                  <a:srgbClr val="FFFFFF"/>
+                </a:solidFill>
+                <a:latin typeface="Calibri"/>
+              </a:defRPr>
+            </a:pPr>
+            <a:r>
+              <a:t>1️⃣  Full contract from brief → 12 sections, formal legal English</a:t>
+            </a:r>
+          </a:p>
+          <a:p>
+            <a:pPr algn="l">
+              <a:defRPr sz="1700" b="0">
+                <a:solidFill>
+                  <a:srgbClr val="FFFFFF"/>
+                </a:solidFill>
+                <a:latin typeface="Calibri"/>
+              </a:defRPr>
+            </a:pPr>
+            <a:r>
+              <a:t>2️⃣  Refine IP clause → pre-existing IP, deliverable IP, licence-back</a:t>
+            </a:r>
+          </a:p>
+          <a:p>
+            <a:pPr algn="l">
+              <a:defRPr sz="1700" b="0">
+                <a:solidFill>
+                  <a:srgbClr val="FFFFFF"/>
+                </a:solidFill>
+                <a:latin typeface="Calibri"/>
+              </a:defRPr>
+            </a:pPr>
+            <a:r>
+              <a:t>3️⃣  Rewrite termination → provider-favourable, kill fee, immediate termination for non-payment</a:t>
+            </a:r>
+          </a:p>
+          <a:p>
+            <a:pPr algn="l">
+              <a:defRPr sz="1700" b="0">
+                <a:solidFill>
+                  <a:srgbClr val="FFFFFF"/>
+                </a:solidFill>
+                <a:latin typeface="Calibri"/>
+              </a:defRPr>
+            </a:pPr>
+            <a:r>
+              <a:t>4️⃣  Simplify language → plain English, keep enforceability</a:t>
+            </a:r>
+          </a:p>
+          <a:p>
+            <a:pPr algn="l">
+              <a:defRPr sz="800" b="0">
+                <a:solidFill>
+                  <a:srgbClr val="FFFFFF"/>
+                </a:solidFill>
+                <a:latin typeface="Calibri"/>
+              </a:defRPr>
+            </a:pPr>
+          </a:p>
+          <a:p>
+            <a:pPr algn="l">
+              <a:defRPr sz="1600" b="1">
+                <a:solidFill>
+                  <a:srgbClr val="00D4F5"/>
+                </a:solidFill>
+                <a:latin typeface="Calibri"/>
+              </a:defRPr>
+            </a:pPr>
+            <a:r>
+              <a:t>Tool: Claude — strongest at long-form structured writing &amp; legal language</a:t>
             </a:r>
           </a:p>
         </p:txBody>
@@ -7779,63 +9542,24 @@
       <p:grpSpPr/>
       <p:sp>
         <p:nvSpPr>
-          <p:cNvPr id="2" name="TextBox 1"/>
-          <p:cNvSpPr txBox="1"/>
-          <p:nvPr/>
-        </p:nvSpPr>
-        <p:spPr>
-          <a:xfrm>
-            <a:off x="731520" y="274320"/>
-            <a:ext cx="4572000" cy="548640"/>
-          </a:xfrm>
-          <a:prstGeom prst="rect">
-            <a:avLst/>
-          </a:prstGeom>
-          <a:noFill/>
-        </p:spPr>
-        <p:txBody>
-          <a:bodyPr wrap="square">
-            <a:spAutoFit/>
-          </a:bodyPr>
-          <a:lstStyle/>
-          <a:p>
-            <a:pPr algn="l">
-              <a:defRPr sz="2400" b="1">
-                <a:solidFill>
-                  <a:srgbClr val="00D4F5"/>
-                </a:solidFill>
-                <a:latin typeface="Calibri"/>
-              </a:defRPr>
-            </a:pPr>
-            <a:r>
-              <a:t>Use Case 2 — The Prompt</a:t>
-            </a:r>
-          </a:p>
-        </p:txBody>
-      </p:sp>
-      <p:sp>
-        <p:nvSpPr>
-          <p:cNvPr id="3" name="Rounded Rectangle 2"/>
+          <p:cNvPr id="2" name="Rectangle 1"/>
           <p:cNvSpPr/>
           <p:nvPr/>
         </p:nvSpPr>
         <p:spPr>
           <a:xfrm>
-            <a:off x="457200" y="914400"/>
-            <a:ext cx="11247120" cy="5303520"/>
-          </a:xfrm>
-          <a:prstGeom prst="roundRect">
+            <a:off x="0" y="0"/>
+            <a:ext cx="12191695" cy="73152"/>
+          </a:xfrm>
+          <a:prstGeom prst="rect">
             <a:avLst/>
           </a:prstGeom>
           <a:solidFill>
-            <a:srgbClr val="2A2E3E"/>
+            <a:srgbClr val="00D4F5"/>
           </a:solidFill>
-          <a:ln w="12700">
-            <a:solidFill>
-              <a:srgbClr val="3A3E4E"/>
-            </a:solidFill>
+          <a:ln>
+            <a:noFill/>
           </a:ln>
-          <a:effectLst/>
         </p:spPr>
         <p:style>
           <a:lnRef idx="1">
@@ -7861,14 +9585,14 @@
       </p:sp>
       <p:sp>
         <p:nvSpPr>
-          <p:cNvPr id="4" name="TextBox 3"/>
+          <p:cNvPr id="3" name="TextBox 2"/>
           <p:cNvSpPr txBox="1"/>
           <p:nvPr/>
         </p:nvSpPr>
         <p:spPr>
           <a:xfrm>
-            <a:off x="731520" y="1097280"/>
-            <a:ext cx="10698480" cy="4937760"/>
+            <a:off x="548640" y="274320"/>
+            <a:ext cx="10972800" cy="640080"/>
           </a:xfrm>
           <a:prstGeom prst="rect">
             <a:avLst/>
@@ -7881,10 +9605,95 @@
           </a:bodyPr>
           <a:lstStyle/>
           <a:p>
-            <a:pPr>
-              <a:defRPr sz="1100">
-                <a:solidFill>
-                  <a:srgbClr val="E0E8F0"/>
+            <a:pPr algn="l">
+              <a:spcAft>
+                <a:spcPts val="400"/>
+              </a:spcAft>
+              <a:defRPr sz="3200" b="1">
+                <a:solidFill>
+                  <a:srgbClr val="FFFFFF"/>
+                </a:solidFill>
+                <a:latin typeface="Calibri"/>
+              </a:defRPr>
+            </a:pPr>
+            <a:r>
+              <a:t>📝 UC2: The Prompt</a:t>
+            </a:r>
+          </a:p>
+        </p:txBody>
+      </p:sp>
+      <p:sp>
+        <p:nvSpPr>
+          <p:cNvPr id="4" name="Rectangle 3"/>
+          <p:cNvSpPr/>
+          <p:nvPr/>
+        </p:nvSpPr>
+        <p:spPr>
+          <a:xfrm>
+            <a:off x="365760" y="1097280"/>
+            <a:ext cx="11430000" cy="5303520"/>
+          </a:xfrm>
+          <a:prstGeom prst="rect">
+            <a:avLst/>
+          </a:prstGeom>
+          <a:solidFill>
+            <a:srgbClr val="121422"/>
+          </a:solidFill>
+          <a:ln>
+            <a:noFill/>
+          </a:ln>
+        </p:spPr>
+        <p:style>
+          <a:lnRef idx="1">
+            <a:schemeClr val="accent1"/>
+          </a:lnRef>
+          <a:fillRef idx="3">
+            <a:schemeClr val="accent1"/>
+          </a:fillRef>
+          <a:effectRef idx="2">
+            <a:schemeClr val="accent1"/>
+          </a:effectRef>
+          <a:fontRef idx="minor">
+            <a:schemeClr val="lt1"/>
+          </a:fontRef>
+        </p:style>
+        <p:txBody>
+          <a:bodyPr rtlCol="0" anchor="ctr"/>
+          <a:lstStyle/>
+          <a:p>
+            <a:pPr algn="ctr"/>
+          </a:p>
+        </p:txBody>
+      </p:sp>
+      <p:sp>
+        <p:nvSpPr>
+          <p:cNvPr id="5" name="TextBox 4"/>
+          <p:cNvSpPr txBox="1"/>
+          <p:nvPr/>
+        </p:nvSpPr>
+        <p:spPr>
+          <a:xfrm>
+            <a:off x="548640" y="1280160"/>
+            <a:ext cx="10972800" cy="4937760"/>
+          </a:xfrm>
+          <a:prstGeom prst="rect">
+            <a:avLst/>
+          </a:prstGeom>
+          <a:noFill/>
+        </p:spPr>
+        <p:txBody>
+          <a:bodyPr wrap="square">
+            <a:spAutoFit/>
+          </a:bodyPr>
+          <a:lstStyle/>
+          <a:p>
+            <a:pPr algn="l">
+              <a:spcAft>
+                <a:spcPts val="400"/>
+              </a:spcAft>
+              <a:defRPr sz="1400" b="0">
+                <a:solidFill>
+                  <a:srgbClr val="00D4F5"/>
                 </a:solidFill>
                 <a:latin typeface="Consolas"/>
               </a:defRPr>
@@ -7892,188 +9701,60 @@
             <a:r>
               <a:t>Draft a Professional Services Agreement:</a:t>
             </a:r>
-          </a:p>
-          <a:p>
-            <a:pPr>
-              <a:spcBef>
-                <a:spcPts val="200"/>
-              </a:spcBef>
-              <a:defRPr sz="1100">
-                <a:solidFill>
-                  <a:srgbClr val="E0E8F0"/>
-                </a:solidFill>
-                <a:latin typeface="Consolas"/>
-              </a:defRPr>
-            </a:pPr>
-          </a:p>
-          <a:p>
-            <a:pPr>
-              <a:spcBef>
-                <a:spcPts val="200"/>
-              </a:spcBef>
-              <a:defRPr sz="1100">
-                <a:solidFill>
-                  <a:srgbClr val="E0E8F0"/>
-                </a:solidFill>
-                <a:latin typeface="Consolas"/>
-              </a:defRPr>
-            </a:pPr>
+            <a:br/>
+            <a:br/>
             <a:r>
               <a:t>Provider: Meridian Consulting Ltd, 45 King Street, London EC2V 8QA</a:t>
             </a:r>
-          </a:p>
-          <a:p>
-            <a:pPr>
-              <a:spcBef>
-                <a:spcPts val="200"/>
-              </a:spcBef>
-              <a:defRPr sz="1100">
-                <a:solidFill>
-                  <a:srgbClr val="E0E8F0"/>
-                </a:solidFill>
-                <a:latin typeface="Consolas"/>
-              </a:defRPr>
-            </a:pPr>
+            <a:br/>
             <a:r>
               <a:t>Client: NovaTech Solutions Ltd, 12 Innovation Park, Manchester M1 3BB</a:t>
             </a:r>
-          </a:p>
-          <a:p>
-            <a:pPr>
-              <a:spcBef>
-                <a:spcPts val="200"/>
-              </a:spcBef>
-              <a:defRPr sz="1100">
-                <a:solidFill>
-                  <a:srgbClr val="E0E8F0"/>
-                </a:solidFill>
-                <a:latin typeface="Consolas"/>
-              </a:defRPr>
-            </a:pPr>
-            <a:r>
-              <a:t>Scope: Digital transformation advisory — assessment, roadmap, vendor selection, implementation oversight</a:t>
-            </a:r>
-          </a:p>
-          <a:p>
-            <a:pPr>
-              <a:spcBef>
-                <a:spcPts val="200"/>
-              </a:spcBef>
-              <a:defRPr sz="1100">
-                <a:solidFill>
-                  <a:srgbClr val="E0E8F0"/>
-                </a:solidFill>
-                <a:latin typeface="Consolas"/>
-              </a:defRPr>
-            </a:pPr>
+            <a:br/>
+            <a:r>
+              <a:t>Scope: Digital transformation advisory — current-state assessment,</a:t>
+            </a:r>
+            <a:br/>
+            <a:r>
+              <a:t>  technology roadmap, vendor selection, implementation oversight</a:t>
+            </a:r>
+            <a:br/>
             <a:r>
               <a:t>Duration: 6 months from 1 April 2026, extendable by mutual agreement</a:t>
             </a:r>
-          </a:p>
-          <a:p>
-            <a:pPr>
-              <a:spcBef>
-                <a:spcPts val="200"/>
-              </a:spcBef>
-              <a:defRPr sz="1100">
-                <a:solidFill>
-                  <a:srgbClr val="E0E8F0"/>
-                </a:solidFill>
-                <a:latin typeface="Consolas"/>
-              </a:defRPr>
-            </a:pPr>
-            <a:r>
-              <a:t>Fee: £75,000, 6 monthly instalments of £12,500 + VAT, due within 14 days</a:t>
-            </a:r>
-          </a:p>
-          <a:p>
-            <a:pPr>
-              <a:spcBef>
-                <a:spcPts val="200"/>
-              </a:spcBef>
-              <a:defRPr sz="1100">
-                <a:solidFill>
-                  <a:srgbClr val="E0E8F0"/>
-                </a:solidFill>
-                <a:latin typeface="Consolas"/>
-              </a:defRPr>
-            </a:pPr>
-            <a:r>
-              <a:t>Key Personnel: Lead Consultant (10+ yrs) + Senior Analyst, no substitution without approval</a:t>
-            </a:r>
-          </a:p>
-          <a:p>
-            <a:pPr>
-              <a:spcBef>
-                <a:spcPts val="200"/>
-              </a:spcBef>
-              <a:defRPr sz="1100">
-                <a:solidFill>
-                  <a:srgbClr val="E0E8F0"/>
-                </a:solidFill>
-                <a:latin typeface="Consolas"/>
-              </a:defRPr>
-            </a:pPr>
-            <a:r>
-              <a:t>Terms: Remote-first, monthly on-site Manchester visits, 30 days termination notice</a:t>
-            </a:r>
-          </a:p>
-          <a:p>
-            <a:pPr>
-              <a:spcBef>
-                <a:spcPts val="200"/>
-              </a:spcBef>
-              <a:defRPr sz="1100">
-                <a:solidFill>
-                  <a:srgbClr val="E0E8F0"/>
-                </a:solidFill>
-                <a:latin typeface="Consolas"/>
-              </a:defRPr>
-            </a:pPr>
-          </a:p>
-          <a:p>
-            <a:pPr>
-              <a:spcBef>
-                <a:spcPts val="200"/>
-              </a:spcBef>
-              <a:defRPr sz="1100">
-                <a:solidFill>
-                  <a:srgbClr val="E0E8F0"/>
-                </a:solidFill>
-                <a:latin typeface="Consolas"/>
-              </a:defRPr>
-            </a:pPr>
-            <a:r>
-              <a:t>Include: Definitions, Scope, Duration, Fees (+ late payment), Personnel, Client Obligations, Confidentiality, IP, Limitation of Liability, Termination, Dispute Resolution, General Provisions.</a:t>
-            </a:r>
-          </a:p>
-          <a:p>
-            <a:pPr>
-              <a:spcBef>
-                <a:spcPts val="200"/>
-              </a:spcBef>
-              <a:defRPr sz="1100">
-                <a:solidFill>
-                  <a:srgbClr val="E0E8F0"/>
-                </a:solidFill>
-                <a:latin typeface="Consolas"/>
-              </a:defRPr>
-            </a:pPr>
-          </a:p>
-          <a:p>
-            <a:pPr>
-              <a:spcBef>
-                <a:spcPts val="200"/>
-              </a:spcBef>
-              <a:defRPr sz="1100">
-                <a:solidFill>
-                  <a:srgbClr val="E0E8F0"/>
-                </a:solidFill>
-                <a:latin typeface="Consolas"/>
-              </a:defRPr>
-            </a:pPr>
-            <a:r>
-              <a:t>Use formal legal English. Comprehensive but not verbose. Ready for solicitor review.</a:t>
+            <a:br/>
+            <a:r>
+              <a:t>Fee: £75,000 total, 6 × £12,500+VAT monthly, 14-day payment terms</a:t>
+            </a:r>
+            <a:br/>
+            <a:r>
+              <a:t>Key Personnel: Lead Consultant (10+ yrs) + Senior Analyst, no substitution</a:t>
+            </a:r>
+            <a:br/>
+            <a:r>
+              <a:t>Special: Remote-first + monthly Manchester visits. System access within 5 days.</a:t>
+            </a:r>
+            <a:br/>
+            <a:br/>
+            <a:r>
+              <a:t>Include sections: Definitions, Scope, Duration, Fees &amp; Payment, Key Personnel,</a:t>
+            </a:r>
+            <a:br/>
+            <a:r>
+              <a:t>Client Obligations, Confidentiality, IP, Limitation of Liability, Termination,</a:t>
+            </a:r>
+            <a:br/>
+            <a:r>
+              <a:t>Dispute Resolution, General Provisions (notices, force majeure, governing law).</a:t>
+            </a:r>
+            <a:br/>
+            <a:br/>
+            <a:r>
+              <a:t>Use formal legal English. Comprehensive but not verbose.</a:t>
+            </a:r>
+            <a:br/>
+            <a:r>
+              <a:t>Ready for solicitor review.</a:t>
             </a:r>
           </a:p>
         </p:txBody>
@@ -8112,14 +9793,14 @@
         </p:nvSpPr>
         <p:spPr>
           <a:xfrm>
-            <a:off x="731520" y="548640"/>
-            <a:ext cx="73152" cy="548640"/>
+            <a:off x="0" y="0"/>
+            <a:ext cx="12191695" cy="73152"/>
           </a:xfrm>
           <a:prstGeom prst="rect">
             <a:avLst/>
           </a:prstGeom>
           <a:solidFill>
-            <a:srgbClr val="00D4F5"/>
+            <a:srgbClr val="FF6B35"/>
           </a:solidFill>
           <a:ln>
             <a:noFill/>
@@ -8155,8 +9836,8 @@
         </p:nvSpPr>
         <p:spPr>
           <a:xfrm>
-            <a:off x="1005840" y="457200"/>
-            <a:ext cx="9144000" cy="822960"/>
+            <a:off x="548640" y="274320"/>
+            <a:ext cx="10972800" cy="640080"/>
           </a:xfrm>
           <a:prstGeom prst="rect">
             <a:avLst/>
@@ -8170,6 +9851,9 @@
           <a:lstStyle/>
           <a:p>
             <a:pPr algn="l">
+              <a:spcAft>
+                <a:spcPts val="400"/>
+              </a:spcAft>
               <a:defRPr sz="3600" b="1">
                 <a:solidFill>
                   <a:srgbClr val="FFFFFF"/>
@@ -8178,21 +9862,64 @@
               </a:defRPr>
             </a:pPr>
             <a:r>
-              <a:t>Use Case 2: Key Takeaways</a:t>
-            </a:r>
-          </a:p>
-        </p:txBody>
-      </p:sp>
-      <p:sp>
-        <p:nvSpPr>
-          <p:cNvPr id="4" name="TextBox 3"/>
+              <a:t>📝 UC2: Key Takeaways</a:t>
+            </a:r>
+          </a:p>
+        </p:txBody>
+      </p:sp>
+      <p:sp>
+        <p:nvSpPr>
+          <p:cNvPr id="4" name="Rectangle 3"/>
+          <p:cNvSpPr/>
+          <p:nvPr/>
+        </p:nvSpPr>
+        <p:spPr>
+          <a:xfrm>
+            <a:off x="365760" y="1280160"/>
+            <a:ext cx="11430000" cy="5029200"/>
+          </a:xfrm>
+          <a:prstGeom prst="rect">
+            <a:avLst/>
+          </a:prstGeom>
+          <a:solidFill>
+            <a:srgbClr val="222638"/>
+          </a:solidFill>
+          <a:ln>
+            <a:noFill/>
+          </a:ln>
+        </p:spPr>
+        <p:style>
+          <a:lnRef idx="1">
+            <a:schemeClr val="accent1"/>
+          </a:lnRef>
+          <a:fillRef idx="3">
+            <a:schemeClr val="accent1"/>
+          </a:fillRef>
+          <a:effectRef idx="2">
+            <a:schemeClr val="accent1"/>
+          </a:effectRef>
+          <a:fontRef idx="minor">
+            <a:schemeClr val="lt1"/>
+          </a:fontRef>
+        </p:style>
+        <p:txBody>
+          <a:bodyPr rtlCol="0" anchor="ctr"/>
+          <a:lstStyle/>
+          <a:p>
+            <a:pPr algn="ctr"/>
+          </a:p>
+        </p:txBody>
+      </p:sp>
+      <p:sp>
+        <p:nvSpPr>
+          <p:cNvPr id="5" name="TextBox 4"/>
           <p:cNvSpPr txBox="1"/>
           <p:nvPr/>
         </p:nvSpPr>
         <p:spPr>
           <a:xfrm>
-            <a:off x="1005840" y="1280160"/>
-            <a:ext cx="9144000" cy="457200"/>
+            <a:off x="548640" y="1371600"/>
+            <a:ext cx="10972800" cy="4846320"/>
           </a:xfrm>
           <a:prstGeom prst="rect">
             <a:avLst/>
@@ -8206,163 +9933,165 @@
           <a:lstStyle/>
           <a:p>
             <a:pPr algn="l">
+              <a:spcAft>
+                <a:spcPts val="400"/>
+              </a:spcAft>
+              <a:defRPr sz="2400" b="1">
+                <a:solidFill>
+                  <a:srgbClr val="FF6B35"/>
+                </a:solidFill>
+                <a:latin typeface="Calibri"/>
+              </a:defRPr>
+            </a:pPr>
+            <a:r>
+              <a:t>What Just Happened</a:t>
+            </a:r>
+          </a:p>
+          <a:p>
+            <a:pPr algn="l">
+              <a:defRPr sz="2000" b="0">
+                <a:solidFill>
+                  <a:srgbClr val="FFFFFF"/>
+                </a:solidFill>
+                <a:latin typeface="Calibri"/>
+              </a:defRPr>
+            </a:pPr>
+            <a:r>
+              <a:t>✅ Full 12-section contract from a one-paragraph brief</a:t>
+            </a:r>
+          </a:p>
+          <a:p>
+            <a:pPr algn="l">
+              <a:defRPr sz="2000" b="0">
+                <a:solidFill>
+                  <a:srgbClr val="FFFFFF"/>
+                </a:solidFill>
+                <a:latin typeface="Calibri"/>
+              </a:defRPr>
+            </a:pPr>
+            <a:r>
+              <a:t>✅ Proper defined terms, cross-references, boilerplate</a:t>
+            </a:r>
+          </a:p>
+          <a:p>
+            <a:pPr algn="l">
+              <a:defRPr sz="2000" b="0">
+                <a:solidFill>
+                  <a:srgbClr val="FFFFFF"/>
+                </a:solidFill>
+                <a:latin typeface="Calibri"/>
+              </a:defRPr>
+            </a:pPr>
+            <a:r>
+              <a:t>✅ Refined specific clauses through iteration</a:t>
+            </a:r>
+          </a:p>
+          <a:p>
+            <a:pPr algn="l">
+              <a:defRPr sz="2000" b="0">
+                <a:solidFill>
+                  <a:srgbClr val="FFFFFF"/>
+                </a:solidFill>
+                <a:latin typeface="Calibri"/>
+              </a:defRPr>
+            </a:pPr>
+            <a:r>
+              <a:t>✅ Shifted contract balance with a single prompt</a:t>
+            </a:r>
+          </a:p>
+          <a:p>
+            <a:pPr algn="l">
+              <a:defRPr sz="1200" b="0">
+                <a:solidFill>
+                  <a:srgbClr val="FFFFFF"/>
+                </a:solidFill>
+                <a:latin typeface="Calibri"/>
+              </a:defRPr>
+            </a:pPr>
+          </a:p>
+          <a:p>
+            <a:pPr algn="l">
+              <a:defRPr sz="2200" b="1">
+                <a:solidFill>
+                  <a:srgbClr val="00D4F5"/>
+                </a:solidFill>
+                <a:latin typeface="Calibri"/>
+              </a:defRPr>
+            </a:pPr>
+            <a:r>
+              <a:t>⏱ Time: ~4 minutes  vs  days of back-and-forth with a lawyer</a:t>
+            </a:r>
+          </a:p>
+          <a:p>
+            <a:pPr algn="l">
+              <a:defRPr sz="1200" b="0">
+                <a:solidFill>
+                  <a:srgbClr val="FFFFFF"/>
+                </a:solidFill>
+                <a:latin typeface="Calibri"/>
+              </a:defRPr>
+            </a:pPr>
+          </a:p>
+          <a:p>
+            <a:pPr algn="l">
+              <a:defRPr sz="2200" b="1">
+                <a:solidFill>
+                  <a:srgbClr val="FF6B35"/>
+                </a:solidFill>
+                <a:latin typeface="Calibri"/>
+              </a:defRPr>
+            </a:pPr>
+            <a:r>
+              <a:t>⚠️ Important Caveat</a:t>
+            </a:r>
+          </a:p>
+          <a:p>
+            <a:pPr algn="l">
               <a:defRPr sz="1800" b="0">
                 <a:solidFill>
-                  <a:srgbClr val="BBBBCC"/>
-                </a:solidFill>
-                <a:latin typeface="Calibri"/>
-              </a:defRPr>
-            </a:pPr>
-            <a:r>
-              <a:t>📝  What to notice in the output</a:t>
-            </a:r>
-          </a:p>
-        </p:txBody>
-      </p:sp>
-      <p:sp>
-        <p:nvSpPr>
-          <p:cNvPr id="5" name="TextBox 4"/>
-          <p:cNvSpPr txBox="1"/>
-          <p:nvPr/>
-        </p:nvSpPr>
-        <p:spPr>
-          <a:xfrm>
-            <a:off x="1005840" y="1828800"/>
-            <a:ext cx="10058400" cy="4572000"/>
-          </a:xfrm>
-          <a:prstGeom prst="rect">
-            <a:avLst/>
-          </a:prstGeom>
-          <a:noFill/>
-        </p:spPr>
-        <p:txBody>
-          <a:bodyPr wrap="square">
-            <a:spAutoFit/>
-          </a:bodyPr>
-          <a:lstStyle/>
-          <a:p>
-            <a:pPr>
-              <a:defRPr sz="2200" b="1">
-                <a:solidFill>
-                  <a:srgbClr val="FFFFFF"/>
-                </a:solidFill>
-                <a:latin typeface="Calibri"/>
-              </a:defRPr>
-            </a:pPr>
-            <a:r>
-              <a:t>▸ Structure your request</a:t>
-            </a:r>
-          </a:p>
-          <a:p>
-            <a:pPr>
-              <a:spcBef>
-                <a:spcPts val="200"/>
-              </a:spcBef>
-              <a:defRPr sz="1800">
-                <a:solidFill>
-                  <a:srgbClr val="BBBBCC"/>
-                </a:solidFill>
-                <a:latin typeface="Calibri"/>
-              </a:defRPr>
-            </a:pPr>
-            <a:r>
-              <a:t>    Specifying 12 sections prevents missed clauses</a:t>
-            </a:r>
-          </a:p>
-          <a:p>
-            <a:pPr>
-              <a:spcBef>
-                <a:spcPts val="1000"/>
-              </a:spcBef>
-              <a:defRPr sz="2200" b="1">
-                <a:solidFill>
-                  <a:srgbClr val="FFFFFF"/>
-                </a:solidFill>
-                <a:latin typeface="Calibri"/>
-              </a:defRPr>
-            </a:pPr>
-            <a:r>
-              <a:t>▸ Iterate for negotiation</a:t>
-            </a:r>
-          </a:p>
-          <a:p>
-            <a:pPr>
-              <a:spcBef>
-                <a:spcPts val="200"/>
-              </a:spcBef>
-              <a:defRPr sz="1800">
-                <a:solidFill>
-                  <a:srgbClr val="BBBBCC"/>
-                </a:solidFill>
-                <a:latin typeface="Calibri"/>
-              </a:defRPr>
-            </a:pPr>
-            <a:r>
-              <a:t>    Shift contract balance with a single follow-up prompt</a:t>
-            </a:r>
-          </a:p>
-          <a:p>
-            <a:pPr>
-              <a:spcBef>
-                <a:spcPts val="1000"/>
-              </a:spcBef>
-              <a:defRPr sz="2200" b="1">
-                <a:solidFill>
-                  <a:srgbClr val="FFFFFF"/>
-                </a:solidFill>
-                <a:latin typeface="Calibri"/>
-              </a:defRPr>
-            </a:pPr>
-            <a:r>
-              <a:t>▸ Plain English on demand</a:t>
-            </a:r>
-          </a:p>
-          <a:p>
-            <a:pPr>
-              <a:spcBef>
-                <a:spcPts val="200"/>
-              </a:spcBef>
-              <a:defRPr sz="1800">
-                <a:solidFill>
-                  <a:srgbClr val="BBBBCC"/>
-                </a:solidFill>
-                <a:latin typeface="Calibri"/>
-              </a:defRPr>
-            </a:pPr>
-            <a:r>
-              <a:t>    Simplify legal jargon while keeping enforceability</a:t>
-            </a:r>
-          </a:p>
-          <a:p>
-            <a:pPr>
-              <a:spcBef>
-                <a:spcPts val="1000"/>
-              </a:spcBef>
-              <a:defRPr sz="2200" b="1">
-                <a:solidFill>
-                  <a:srgbClr val="FFFFFF"/>
-                </a:solidFill>
-                <a:latin typeface="Calibri"/>
-              </a:defRPr>
-            </a:pPr>
-            <a:r>
-              <a:t>▸ Still need a lawyer</a:t>
-            </a:r>
-          </a:p>
-          <a:p>
-            <a:pPr>
-              <a:spcBef>
-                <a:spcPts val="200"/>
-              </a:spcBef>
-              <a:defRPr sz="1800">
-                <a:solidFill>
-                  <a:srgbClr val="BBBBCC"/>
-                </a:solidFill>
-                <a:latin typeface="Calibri"/>
-              </a:defRPr>
-            </a:pPr>
-            <a:r>
-              <a:t>    AI drafts, humans review — this saves days, not replaces expertise</a:t>
+                  <a:srgbClr val="CCCCCC"/>
+                </a:solidFill>
+                <a:latin typeface="Calibri"/>
+              </a:defRPr>
+            </a:pPr>
+            <a:r>
+              <a:t>AI doesn't replace your lawyer — it gets you to the 80% draft</a:t>
+            </a:r>
+          </a:p>
+          <a:p>
+            <a:pPr algn="l">
+              <a:defRPr sz="1800" b="0">
+                <a:solidFill>
+                  <a:srgbClr val="CCCCCC"/>
+                </a:solidFill>
+                <a:latin typeface="Calibri"/>
+              </a:defRPr>
+            </a:pPr>
+            <a:r>
+              <a:t>in minutes instead of days. Always get legal review before signing.</a:t>
+            </a:r>
+          </a:p>
+          <a:p>
+            <a:pPr algn="l">
+              <a:defRPr sz="800" b="0">
+                <a:solidFill>
+                  <a:srgbClr val="FFFFFF"/>
+                </a:solidFill>
+                <a:latin typeface="Calibri"/>
+              </a:defRPr>
+            </a:pPr>
+          </a:p>
+          <a:p>
+            <a:pPr algn="l">
+              <a:defRPr sz="1800" b="1">
+                <a:solidFill>
+                  <a:srgbClr val="00D4F5"/>
+                </a:solidFill>
+                <a:latin typeface="Calibri"/>
+              </a:defRPr>
+            </a:pPr>
+            <a:r>
+              <a:t>💡 Power Move: Ask AI to simplify legal jargon into plain English</a:t>
             </a:r>
           </a:p>
         </p:txBody>
@@ -8401,14 +10130,14 @@
         </p:nvSpPr>
         <p:spPr>
           <a:xfrm>
-            <a:off x="731520" y="548640"/>
-            <a:ext cx="73152" cy="548640"/>
+            <a:off x="0" y="0"/>
+            <a:ext cx="12191695" cy="73152"/>
           </a:xfrm>
           <a:prstGeom prst="rect">
             <a:avLst/>
           </a:prstGeom>
           <a:solidFill>
-            <a:srgbClr val="FF6B35"/>
+            <a:srgbClr val="00D4F5"/>
           </a:solidFill>
           <a:ln>
             <a:noFill/>
@@ -8444,8 +10173,8 @@
         </p:nvSpPr>
         <p:spPr>
           <a:xfrm>
-            <a:off x="1005840" y="457200"/>
-            <a:ext cx="9144000" cy="822960"/>
+            <a:off x="548640" y="274320"/>
+            <a:ext cx="10972800" cy="640080"/>
           </a:xfrm>
           <a:prstGeom prst="rect">
             <a:avLst/>
@@ -8459,6 +10188,9 @@
           <a:lstStyle/>
           <a:p>
             <a:pPr algn="l">
+              <a:spcAft>
+                <a:spcPts val="400"/>
+              </a:spcAft>
               <a:defRPr sz="3600" b="1">
                 <a:solidFill>
                   <a:srgbClr val="FFFFFF"/>
@@ -8467,7 +10199,7 @@
               </a:defRPr>
             </a:pPr>
             <a:r>
-              <a:t>Use Case 3: Brand Identity</a:t>
+              <a:t>🎨 Use Case 3: Brand Identity</a:t>
             </a:r>
           </a:p>
         </p:txBody>
@@ -8480,8 +10212,8 @@
         </p:nvSpPr>
         <p:spPr>
           <a:xfrm>
-            <a:off x="1005840" y="1280160"/>
-            <a:ext cx="9144000" cy="457200"/>
+            <a:off x="548640" y="914400"/>
+            <a:ext cx="10972800" cy="457200"/>
           </a:xfrm>
           <a:prstGeom prst="rect">
             <a:avLst/>
@@ -8495,29 +10227,75 @@
           <a:lstStyle/>
           <a:p>
             <a:pPr algn="l">
+              <a:spcAft>
+                <a:spcPts val="400"/>
+              </a:spcAft>
               <a:defRPr sz="1800" b="0">
                 <a:solidFill>
-                  <a:srgbClr val="BBBBCC"/>
-                </a:solidFill>
-                <a:latin typeface="Calibri"/>
-              </a:defRPr>
-            </a:pPr>
-            <a:r>
-              <a:t>🎨  Create a complete brand identity from a text description</a:t>
-            </a:r>
-          </a:p>
-        </p:txBody>
-      </p:sp>
-      <p:sp>
-        <p:nvSpPr>
-          <p:cNvPr id="5" name="TextBox 4"/>
+                  <a:srgbClr val="CCCCCC"/>
+                </a:solidFill>
+                <a:latin typeface="Calibri"/>
+              </a:defRPr>
+            </a:pPr>
+            <a:r>
+              <a:t>Text description → Logo, colours, guidelines — uses ChatGPT for images</a:t>
+            </a:r>
+          </a:p>
+        </p:txBody>
+      </p:sp>
+      <p:sp>
+        <p:nvSpPr>
+          <p:cNvPr id="5" name="Rectangle 4"/>
+          <p:cNvSpPr/>
+          <p:nvPr/>
+        </p:nvSpPr>
+        <p:spPr>
+          <a:xfrm>
+            <a:off x="365760" y="1463040"/>
+            <a:ext cx="11430000" cy="2011680"/>
+          </a:xfrm>
+          <a:prstGeom prst="rect">
+            <a:avLst/>
+          </a:prstGeom>
+          <a:solidFill>
+            <a:srgbClr val="222638"/>
+          </a:solidFill>
+          <a:ln>
+            <a:noFill/>
+          </a:ln>
+        </p:spPr>
+        <p:style>
+          <a:lnRef idx="1">
+            <a:schemeClr val="accent1"/>
+          </a:lnRef>
+          <a:fillRef idx="3">
+            <a:schemeClr val="accent1"/>
+          </a:fillRef>
+          <a:effectRef idx="2">
+            <a:schemeClr val="accent1"/>
+          </a:effectRef>
+          <a:fontRef idx="minor">
+            <a:schemeClr val="lt1"/>
+          </a:fontRef>
+        </p:style>
+        <p:txBody>
+          <a:bodyPr rtlCol="0" anchor="ctr"/>
+          <a:lstStyle/>
+          <a:p>
+            <a:pPr algn="ctr"/>
+          </a:p>
+        </p:txBody>
+      </p:sp>
+      <p:sp>
+        <p:nvSpPr>
+          <p:cNvPr id="6" name="TextBox 5"/>
           <p:cNvSpPr txBox="1"/>
           <p:nvPr/>
         </p:nvSpPr>
         <p:spPr>
           <a:xfrm>
-            <a:off x="1005840" y="1828800"/>
-            <a:ext cx="10058400" cy="4572000"/>
+            <a:off x="548640" y="1554480"/>
+            <a:ext cx="10972800" cy="1828800"/>
           </a:xfrm>
           <a:prstGeom prst="rect">
             <a:avLst/>
@@ -8530,64 +10308,359 @@
           </a:bodyPr>
           <a:lstStyle/>
           <a:p>
-            <a:pPr>
-              <a:defRPr sz="2200" b="0">
-                <a:solidFill>
-                  <a:srgbClr val="FFFFFF"/>
-                </a:solidFill>
-                <a:latin typeface="Calibri"/>
-              </a:defRPr>
-            </a:pPr>
-            <a:r>
-              <a:t>▸ Company: Aether — AI-powered air quality monitoring for smart cities</a:t>
-            </a:r>
-          </a:p>
-          <a:p>
-            <a:pPr>
-              <a:spcBef>
-                <a:spcPts val="1000"/>
-              </a:spcBef>
-              <a:defRPr sz="2200" b="0">
-                <a:solidFill>
-                  <a:srgbClr val="FFFFFF"/>
-                </a:solidFill>
-                <a:latin typeface="Calibri"/>
-              </a:defRPr>
-            </a:pPr>
-            <a:r>
-              <a:t>▸ Audience: City councils, property developers, health-conscious professionals</a:t>
-            </a:r>
-          </a:p>
-          <a:p>
-            <a:pPr>
-              <a:spcBef>
-                <a:spcPts val="1000"/>
-              </a:spcBef>
-              <a:defRPr sz="2200" b="0">
-                <a:solidFill>
-                  <a:srgbClr val="FFFFFF"/>
-                </a:solidFill>
-                <a:latin typeface="Calibri"/>
-              </a:defRPr>
-            </a:pPr>
-            <a:r>
-              <a:t>▸ Brand feel: Clean, scientific, trustworthy, 'calm technology'</a:t>
-            </a:r>
-          </a:p>
-          <a:p>
-            <a:pPr>
-              <a:spcBef>
-                <a:spcPts val="1000"/>
-              </a:spcBef>
-              <a:defRPr sz="2200" b="0">
-                <a:solidFill>
-                  <a:srgbClr val="FFFFFF"/>
-                </a:solidFill>
-                <a:latin typeface="Calibri"/>
-              </a:defRPr>
-            </a:pPr>
-            <a:r>
-              <a:t>▸ Goal: Logo, colour palette, typography, business card mockup</a:t>
+            <a:pPr algn="l">
+              <a:spcAft>
+                <a:spcPts val="400"/>
+              </a:spcAft>
+              <a:defRPr sz="2400" b="1">
+                <a:solidFill>
+                  <a:srgbClr val="FF6B35"/>
+                </a:solidFill>
+                <a:latin typeface="Calibri"/>
+              </a:defRPr>
+            </a:pPr>
+            <a:r>
+              <a:t>The Scenario</a:t>
+            </a:r>
+          </a:p>
+          <a:p>
+            <a:pPr algn="l">
+              <a:defRPr sz="1800" b="0">
+                <a:solidFill>
+                  <a:srgbClr val="FFFFFF"/>
+                </a:solidFill>
+                <a:latin typeface="Calibri"/>
+              </a:defRPr>
+            </a:pPr>
+            <a:r>
+              <a:t>• "Aether" — AI-powered air quality monitoring for smart cities</a:t>
+            </a:r>
+          </a:p>
+          <a:p>
+            <a:pPr algn="l">
+              <a:defRPr sz="1800" b="0">
+                <a:solidFill>
+                  <a:srgbClr val="FFFFFF"/>
+                </a:solidFill>
+                <a:latin typeface="Calibri"/>
+              </a:defRPr>
+            </a:pPr>
+            <a:r>
+              <a:t>• Need: logo, colour palette, typography, brand guidelines, business card</a:t>
+            </a:r>
+          </a:p>
+          <a:p>
+            <a:pPr algn="l">
+              <a:defRPr sz="1800" b="0">
+                <a:solidFill>
+                  <a:srgbClr val="FFFFFF"/>
+                </a:solidFill>
+                <a:latin typeface="Calibri"/>
+              </a:defRPr>
+            </a:pPr>
+            <a:r>
+              <a:t>• Brand personality: "calm technology" — clean, scientific, trustworthy</a:t>
+            </a:r>
+          </a:p>
+          <a:p>
+            <a:pPr algn="l">
+              <a:defRPr sz="1800" b="0">
+                <a:solidFill>
+                  <a:srgbClr val="FFFFFF"/>
+                </a:solidFill>
+                <a:latin typeface="Calibri"/>
+              </a:defRPr>
+            </a:pPr>
+            <a:r>
+              <a:t>• Visual inspiration: Stripe, Linear, Notion, Headspace</a:t>
+            </a:r>
+          </a:p>
+        </p:txBody>
+      </p:sp>
+      <p:sp>
+        <p:nvSpPr>
+          <p:cNvPr id="7" name="Rectangle 6"/>
+          <p:cNvSpPr/>
+          <p:nvPr/>
+        </p:nvSpPr>
+        <p:spPr>
+          <a:xfrm>
+            <a:off x="365760" y="3749039"/>
+            <a:ext cx="5303520" cy="2834640"/>
+          </a:xfrm>
+          <a:prstGeom prst="rect">
+            <a:avLst/>
+          </a:prstGeom>
+          <a:solidFill>
+            <a:srgbClr val="2A2E42"/>
+          </a:solidFill>
+          <a:ln>
+            <a:noFill/>
+          </a:ln>
+        </p:spPr>
+        <p:style>
+          <a:lnRef idx="1">
+            <a:schemeClr val="accent1"/>
+          </a:lnRef>
+          <a:fillRef idx="3">
+            <a:schemeClr val="accent1"/>
+          </a:fillRef>
+          <a:effectRef idx="2">
+            <a:schemeClr val="accent1"/>
+          </a:effectRef>
+          <a:fontRef idx="minor">
+            <a:schemeClr val="lt1"/>
+          </a:fontRef>
+        </p:style>
+        <p:txBody>
+          <a:bodyPr rtlCol="0" anchor="ctr"/>
+          <a:lstStyle/>
+          <a:p>
+            <a:pPr algn="ctr"/>
+          </a:p>
+        </p:txBody>
+      </p:sp>
+      <p:sp>
+        <p:nvSpPr>
+          <p:cNvPr id="8" name="TextBox 7"/>
+          <p:cNvSpPr txBox="1"/>
+          <p:nvPr/>
+        </p:nvSpPr>
+        <p:spPr>
+          <a:xfrm>
+            <a:off x="548640" y="3840480"/>
+            <a:ext cx="4937760" cy="2651760"/>
+          </a:xfrm>
+          <a:prstGeom prst="rect">
+            <a:avLst/>
+          </a:prstGeom>
+          <a:noFill/>
+        </p:spPr>
+        <p:txBody>
+          <a:bodyPr wrap="square">
+            <a:spAutoFit/>
+          </a:bodyPr>
+          <a:lstStyle/>
+          <a:p>
+            <a:pPr algn="l">
+              <a:spcAft>
+                <a:spcPts val="400"/>
+              </a:spcAft>
+              <a:defRPr sz="2000" b="1">
+                <a:solidFill>
+                  <a:srgbClr val="44FF44"/>
+                </a:solidFill>
+                <a:latin typeface="Calibri"/>
+              </a:defRPr>
+            </a:pPr>
+            <a:r>
+              <a:t>🟢 ChatGPT (GPT Image)</a:t>
+            </a:r>
+          </a:p>
+          <a:p>
+            <a:pPr algn="l">
+              <a:defRPr sz="1600" b="0">
+                <a:solidFill>
+                  <a:srgbClr val="FFFFFF"/>
+                </a:solidFill>
+                <a:latin typeface="Calibri"/>
+              </a:defRPr>
+            </a:pPr>
+            <a:r>
+              <a:t>1. Generate initial logo (icon + wordmark)</a:t>
+            </a:r>
+          </a:p>
+          <a:p>
+            <a:pPr algn="l">
+              <a:defRPr sz="1600" b="0">
+                <a:solidFill>
+                  <a:srgbClr val="FFFFFF"/>
+                </a:solidFill>
+                <a:latin typeface="Calibri"/>
+              </a:defRPr>
+            </a:pPr>
+            <a:r>
+              <a:t>2. Refine → minimal icon mark only</a:t>
+            </a:r>
+          </a:p>
+          <a:p>
+            <a:pPr algn="l">
+              <a:defRPr sz="1600" b="0">
+                <a:solidFill>
+                  <a:srgbClr val="FFFFFF"/>
+                </a:solidFill>
+                <a:latin typeface="Calibri"/>
+              </a:defRPr>
+            </a:pPr>
+            <a:r>
+              <a:t>3. Business card mockup</a:t>
+            </a:r>
+          </a:p>
+          <a:p>
+            <a:pPr algn="l">
+              <a:defRPr sz="800" b="0">
+                <a:solidFill>
+                  <a:srgbClr val="FFFFFF"/>
+                </a:solidFill>
+                <a:latin typeface="Calibri"/>
+              </a:defRPr>
+            </a:pPr>
+          </a:p>
+          <a:p>
+            <a:pPr algn="l">
+              <a:defRPr sz="1500" b="1">
+                <a:solidFill>
+                  <a:srgbClr val="44FF44"/>
+                </a:solidFill>
+                <a:latin typeface="Calibri"/>
+              </a:defRPr>
+            </a:pPr>
+            <a:r>
+              <a:t>Image gen available on ChatGPT free tier!</a:t>
+            </a:r>
+          </a:p>
+        </p:txBody>
+      </p:sp>
+      <p:sp>
+        <p:nvSpPr>
+          <p:cNvPr id="9" name="Rectangle 8"/>
+          <p:cNvSpPr/>
+          <p:nvPr/>
+        </p:nvSpPr>
+        <p:spPr>
+          <a:xfrm>
+            <a:off x="6035040" y="3749039"/>
+            <a:ext cx="5760720" cy="2834640"/>
+          </a:xfrm>
+          <a:prstGeom prst="rect">
+            <a:avLst/>
+          </a:prstGeom>
+          <a:solidFill>
+            <a:srgbClr val="2A2E42"/>
+          </a:solidFill>
+          <a:ln>
+            <a:noFill/>
+          </a:ln>
+        </p:spPr>
+        <p:style>
+          <a:lnRef idx="1">
+            <a:schemeClr val="accent1"/>
+          </a:lnRef>
+          <a:fillRef idx="3">
+            <a:schemeClr val="accent1"/>
+          </a:fillRef>
+          <a:effectRef idx="2">
+            <a:schemeClr val="accent1"/>
+          </a:effectRef>
+          <a:fontRef idx="minor">
+            <a:schemeClr val="lt1"/>
+          </a:fontRef>
+        </p:style>
+        <p:txBody>
+          <a:bodyPr rtlCol="0" anchor="ctr"/>
+          <a:lstStyle/>
+          <a:p>
+            <a:pPr algn="ctr"/>
+          </a:p>
+        </p:txBody>
+      </p:sp>
+      <p:sp>
+        <p:nvSpPr>
+          <p:cNvPr id="10" name="TextBox 9"/>
+          <p:cNvSpPr txBox="1"/>
+          <p:nvPr/>
+        </p:nvSpPr>
+        <p:spPr>
+          <a:xfrm>
+            <a:off x="6217920" y="3840480"/>
+            <a:ext cx="5394960" cy="2651760"/>
+          </a:xfrm>
+          <a:prstGeom prst="rect">
+            <a:avLst/>
+          </a:prstGeom>
+          <a:noFill/>
+        </p:spPr>
+        <p:txBody>
+          <a:bodyPr wrap="square">
+            <a:spAutoFit/>
+          </a:bodyPr>
+          <a:lstStyle/>
+          <a:p>
+            <a:pPr algn="l">
+              <a:spcAft>
+                <a:spcPts val="400"/>
+              </a:spcAft>
+              <a:defRPr sz="2000" b="1">
+                <a:solidFill>
+                  <a:srgbClr val="00D4F5"/>
+                </a:solidFill>
+                <a:latin typeface="Calibri"/>
+              </a:defRPr>
+            </a:pPr>
+            <a:r>
+              <a:t>🟣 Claude (Text &amp; Structure)</a:t>
+            </a:r>
+          </a:p>
+          <a:p>
+            <a:pPr algn="l">
+              <a:defRPr sz="1600" b="0">
+                <a:solidFill>
+                  <a:srgbClr val="FFFFFF"/>
+                </a:solidFill>
+                <a:latin typeface="Calibri"/>
+              </a:defRPr>
+            </a:pPr>
+            <a:r>
+              <a:t>4. Brand colour palette with hex codes</a:t>
+            </a:r>
+          </a:p>
+          <a:p>
+            <a:pPr algn="l">
+              <a:defRPr sz="1600" b="0">
+                <a:solidFill>
+                  <a:srgbClr val="FFFFFF"/>
+                </a:solidFill>
+                <a:latin typeface="Calibri"/>
+              </a:defRPr>
+            </a:pPr>
+            <a:r>
+              <a:t>5. Typography recommendations</a:t>
+            </a:r>
+          </a:p>
+          <a:p>
+            <a:pPr algn="l">
+              <a:defRPr sz="1600" b="0">
+                <a:solidFill>
+                  <a:srgbClr val="FFFFFF"/>
+                </a:solidFill>
+                <a:latin typeface="Calibri"/>
+              </a:defRPr>
+            </a:pPr>
+            <a:r>
+              <a:t>6. Full brand guidelines document</a:t>
+            </a:r>
+          </a:p>
+          <a:p>
+            <a:pPr algn="l">
+              <a:defRPr sz="800" b="0">
+                <a:solidFill>
+                  <a:srgbClr val="FFFFFF"/>
+                </a:solidFill>
+                <a:latin typeface="Calibri"/>
+              </a:defRPr>
+            </a:pPr>
+          </a:p>
+          <a:p>
+            <a:pPr algn="l">
+              <a:defRPr sz="1500" b="1">
+                <a:solidFill>
+                  <a:srgbClr val="00D4F5"/>
+                </a:solidFill>
+                <a:latin typeface="Calibri"/>
+              </a:defRPr>
+            </a:pPr>
+            <a:r>
+              <a:t>Use the best tool for each job!</a:t>
             </a:r>
           </a:p>
         </p:txBody>
